--- a/05_06/05_eloadas_MVC_REST_architektura_alapelvek.pptx
+++ b/05_06/05_eloadas_MVC_REST_architektura_alapelvek.pptx
@@ -6943,7 +6943,7 @@
           <a:p>
             <a:fld id="{4C482E4E-5CEC-44A9-BF2B-512FB3B5604F}" type="datetimeFigureOut">
               <a:rPr lang="en-US" smtClean="0"/>
-              <a:t>1/12/2026</a:t>
+              <a:t>3/8/2026</a:t>
             </a:fld>
             <a:endParaRPr lang="en-US"/>
           </a:p>
@@ -12911,15 +12911,7 @@
             </a:r>
             <a:r>
               <a:rPr lang="hu-HU" dirty="0"/>
-              <a:t>” = erőforrás, ami </a:t>
-            </a:r>
-            <a:r>
-              <a:rPr lang="hu-HU" dirty="0" err="1"/>
-              <a:t>lehget</a:t>
-            </a:r>
-            <a:r>
-              <a:rPr lang="hu-HU" dirty="0"/>
-              <a:t> például:</a:t>
+              <a:t>” = erőforrás, ami lehet például:</a:t>
             </a:r>
           </a:p>
           <a:p>
@@ -14159,7 +14151,7 @@
           <a:p>
             <a:fld id="{E80C50CD-E178-4744-9B35-B2F624D6C5E9}" type="datetimeFigureOut">
               <a:rPr lang="en-US" smtClean="0"/>
-              <a:t>1/12/2026</a:t>
+              <a:t>3/8/2026</a:t>
             </a:fld>
             <a:endParaRPr lang="en-US"/>
           </a:p>
@@ -14357,7 +14349,7 @@
           <a:p>
             <a:fld id="{E80C50CD-E178-4744-9B35-B2F624D6C5E9}" type="datetimeFigureOut">
               <a:rPr lang="en-US" smtClean="0"/>
-              <a:t>1/12/2026</a:t>
+              <a:t>3/8/2026</a:t>
             </a:fld>
             <a:endParaRPr lang="en-US"/>
           </a:p>
@@ -14565,7 +14557,7 @@
           <a:p>
             <a:fld id="{E80C50CD-E178-4744-9B35-B2F624D6C5E9}" type="datetimeFigureOut">
               <a:rPr lang="en-US" smtClean="0"/>
-              <a:t>1/12/2026</a:t>
+              <a:t>3/8/2026</a:t>
             </a:fld>
             <a:endParaRPr lang="en-US"/>
           </a:p>
@@ -14815,7 +14807,7 @@
           <a:p>
             <a:fld id="{E80C50CD-E178-4744-9B35-B2F624D6C5E9}" type="datetimeFigureOut">
               <a:rPr lang="en-US" smtClean="0"/>
-              <a:t>1/12/2026</a:t>
+              <a:t>3/8/2026</a:t>
             </a:fld>
             <a:endParaRPr lang="en-US"/>
           </a:p>
@@ -15094,7 +15086,7 @@
           <a:p>
             <a:fld id="{E80C50CD-E178-4744-9B35-B2F624D6C5E9}" type="datetimeFigureOut">
               <a:rPr lang="en-US" smtClean="0"/>
-              <a:t>1/12/2026</a:t>
+              <a:t>3/8/2026</a:t>
             </a:fld>
             <a:endParaRPr lang="en-US"/>
           </a:p>
@@ -15411,7 +15403,7 @@
           <a:p>
             <a:fld id="{E80C50CD-E178-4744-9B35-B2F624D6C5E9}" type="datetimeFigureOut">
               <a:rPr lang="en-US" smtClean="0"/>
-              <a:t>1/12/2026</a:t>
+              <a:t>3/8/2026</a:t>
             </a:fld>
             <a:endParaRPr lang="en-US"/>
           </a:p>
@@ -15827,7 +15819,7 @@
           <a:p>
             <a:fld id="{E80C50CD-E178-4744-9B35-B2F624D6C5E9}" type="datetimeFigureOut">
               <a:rPr lang="en-US" smtClean="0"/>
-              <a:t>1/12/2026</a:t>
+              <a:t>3/8/2026</a:t>
             </a:fld>
             <a:endParaRPr lang="en-US"/>
           </a:p>
@@ -15968,7 +15960,7 @@
           <a:p>
             <a:fld id="{E80C50CD-E178-4744-9B35-B2F624D6C5E9}" type="datetimeFigureOut">
               <a:rPr lang="en-US" smtClean="0"/>
-              <a:t>1/12/2026</a:t>
+              <a:t>3/8/2026</a:t>
             </a:fld>
             <a:endParaRPr lang="en-US"/>
           </a:p>
@@ -16081,7 +16073,7 @@
           <a:p>
             <a:fld id="{E80C50CD-E178-4744-9B35-B2F624D6C5E9}" type="datetimeFigureOut">
               <a:rPr lang="en-US" smtClean="0"/>
-              <a:t>1/12/2026</a:t>
+              <a:t>3/8/2026</a:t>
             </a:fld>
             <a:endParaRPr lang="en-US"/>
           </a:p>
@@ -16398,7 +16390,7 @@
           <a:p>
             <a:fld id="{E80C50CD-E178-4744-9B35-B2F624D6C5E9}" type="datetimeFigureOut">
               <a:rPr lang="en-US" smtClean="0"/>
-              <a:t>1/12/2026</a:t>
+              <a:t>3/8/2026</a:t>
             </a:fld>
             <a:endParaRPr lang="en-US"/>
           </a:p>
@@ -16690,7 +16682,7 @@
           <a:p>
             <a:fld id="{E80C50CD-E178-4744-9B35-B2F624D6C5E9}" type="datetimeFigureOut">
               <a:rPr lang="en-US" smtClean="0"/>
-              <a:t>1/12/2026</a:t>
+              <a:t>3/8/2026</a:t>
             </a:fld>
             <a:endParaRPr lang="en-US"/>
           </a:p>
@@ -16930,7 +16922,7 @@
             <a:fld id="{E80C50CD-E178-4744-9B35-B2F624D6C5E9}" type="datetimeFigureOut">
               <a:rPr lang="en-US" smtClean="0"/>
               <a:pPr/>
-              <a:t>1/12/2026</a:t>
+              <a:t>3/8/2026</a:t>
             </a:fld>
             <a:endParaRPr lang="en-US"/>
           </a:p>

--- a/05_06/05_eloadas_MVC_REST_architektura_alapelvek.pptx
+++ b/05_06/05_eloadas_MVC_REST_architektura_alapelvek.pptx
@@ -17,14 +17,14 @@
     <p:sldId id="279" r:id="rId8"/>
     <p:sldId id="280" r:id="rId9"/>
     <p:sldId id="281" r:id="rId10"/>
-    <p:sldId id="282" r:id="rId11"/>
-    <p:sldId id="283" r:id="rId12"/>
-    <p:sldId id="284" r:id="rId13"/>
-    <p:sldId id="285" r:id="rId14"/>
-    <p:sldId id="286" r:id="rId15"/>
-    <p:sldId id="287" r:id="rId16"/>
-    <p:sldId id="288" r:id="rId17"/>
-    <p:sldId id="289" r:id="rId18"/>
+    <p:sldId id="288" r:id="rId11"/>
+    <p:sldId id="289" r:id="rId12"/>
+    <p:sldId id="282" r:id="rId13"/>
+    <p:sldId id="283" r:id="rId14"/>
+    <p:sldId id="284" r:id="rId15"/>
+    <p:sldId id="285" r:id="rId16"/>
+    <p:sldId id="286" r:id="rId17"/>
+    <p:sldId id="287" r:id="rId18"/>
     <p:sldId id="274" r:id="rId19"/>
   </p:sldIdLst>
   <p:sldSz cx="12192000" cy="6858000"/>
@@ -6943,7 +6943,7 @@
           <a:p>
             <a:fld id="{4C482E4E-5CEC-44A9-BF2B-512FB3B5604F}" type="datetimeFigureOut">
               <a:rPr lang="en-US" smtClean="0"/>
-              <a:t>3/8/2026</a:t>
+              <a:t>3/16/2026</a:t>
             </a:fld>
             <a:endParaRPr lang="en-US"/>
           </a:p>
@@ -7537,213 +7537,182 @@
           <a:bodyPr/>
           <a:lstStyle/>
           <a:p>
-            <a:pPr marL="0" marR="0" lvl="0" indent="0" algn="l" defTabSz="914400" rtl="0" eaLnBrk="1" fontAlgn="auto" latinLnBrk="0" hangingPunct="1">
-              <a:lnSpc>
-                <a:spcPct val="100000"/>
-              </a:lnSpc>
-              <a:spcBef>
-                <a:spcPts val="0"/>
-              </a:spcBef>
-              <a:spcAft>
-                <a:spcPts val="0"/>
-              </a:spcAft>
-              <a:buClrTx/>
-              <a:buSzTx/>
-              <a:buFontTx/>
-              <a:buNone/>
-              <a:tabLst/>
-              <a:defRPr/>
-            </a:pPr>
-            <a:r>
-              <a:rPr lang="en-US" dirty="0"/>
-              <a:t>Az URI </a:t>
-            </a:r>
-            <a:r>
-              <a:rPr lang="en-US" dirty="0" err="1"/>
-              <a:t>egy</a:t>
-            </a:r>
-            <a:r>
-              <a:rPr lang="en-US" dirty="0"/>
-              <a:t> </a:t>
-            </a:r>
-            <a:r>
-              <a:rPr lang="en-US" dirty="0" err="1"/>
-              <a:t>főnév</a:t>
-            </a:r>
-            <a:r>
-              <a:rPr lang="en-US" dirty="0"/>
+            <a:r>
+              <a:rPr lang="hu-HU" dirty="0"/>
+              <a:t>Sokszor félreértik, és azt gondolják, ha REST-</a:t>
+            </a:r>
+            <a:r>
+              <a:rPr lang="hu-HU" dirty="0" err="1"/>
+              <a:t>et</a:t>
+            </a:r>
+            <a:r>
+              <a:rPr lang="hu-HU" dirty="0"/>
+              <a:t> használunk, akkor az MVC megszűnik. Ez nem igaz. A valóság inkább az, hogy az MVC </a:t>
+            </a:r>
+            <a:r>
+              <a:rPr lang="hu-HU" b="1" dirty="0"/>
+              <a:t>nem eltűnik, </a:t>
+            </a:r>
+            <a:r>
+              <a:rPr lang="hu-HU" dirty="0"/>
+              <a:t>hanem </a:t>
+            </a:r>
+            <a:r>
+              <a:rPr lang="hu-HU" b="1" dirty="0"/>
+              <a:t>más szerepet kap.</a:t>
+            </a:r>
+            <a:endParaRPr lang="hu-HU" dirty="0"/>
+          </a:p>
+          <a:p>
+            <a:r>
+              <a:rPr lang="en-US" b="0" dirty="0"/>
+              <a:t>Mi </a:t>
+            </a:r>
+            <a:r>
+              <a:rPr lang="en-US" b="0" dirty="0" err="1"/>
+              <a:t>változik</a:t>
+            </a:r>
+            <a:r>
+              <a:rPr lang="en-US" b="0" dirty="0"/>
+              <a:t> REST </a:t>
+            </a:r>
+            <a:r>
+              <a:rPr lang="en-US" b="0" dirty="0" err="1"/>
+              <a:t>esetén</a:t>
+            </a:r>
+            <a:r>
+              <a:rPr lang="en-US" b="0" dirty="0"/>
+              <a:t>?</a:t>
+            </a:r>
+            <a:r>
+              <a:rPr lang="hu-HU" b="0" dirty="0"/>
+              <a:t> </a:t>
+            </a:r>
+            <a:r>
+              <a:rPr lang="en-US" b="0" dirty="0"/>
+              <a:t>REST-</a:t>
+            </a:r>
+            <a:r>
+              <a:rPr lang="en-US" b="0" dirty="0" err="1"/>
+              <a:t>nél</a:t>
+            </a:r>
+            <a:r>
+              <a:rPr lang="en-US" b="0" dirty="0"/>
+              <a:t> a </a:t>
+            </a:r>
+            <a:r>
+              <a:rPr lang="en-US" b="0" dirty="0" err="1"/>
+              <a:t>szerver</a:t>
+            </a:r>
+            <a:r>
+              <a:rPr lang="hu-HU" b="0" dirty="0"/>
+              <a:t> </a:t>
+            </a:r>
+            <a:r>
+              <a:rPr lang="en-US" b="0" dirty="0" err="1"/>
+              <a:t>nem</a:t>
+            </a:r>
+            <a:r>
+              <a:rPr lang="en-US" b="0" dirty="0"/>
+              <a:t> HTML-t ad </a:t>
+            </a:r>
+            <a:r>
+              <a:rPr lang="en-US" b="0" dirty="0" err="1"/>
+              <a:t>vissza</a:t>
+            </a:r>
+            <a:r>
+              <a:rPr lang="hu-HU" b="0" dirty="0"/>
               <a:t>, </a:t>
             </a:r>
             <a:r>
-              <a:rPr lang="en-US" dirty="0" err="1"/>
-              <a:t>nem</a:t>
-            </a:r>
-            <a:r>
-              <a:rPr lang="en-US" dirty="0"/>
-              <a:t> </a:t>
-            </a:r>
-            <a:r>
-              <a:rPr lang="en-US" dirty="0" err="1"/>
-              <a:t>egy</a:t>
-            </a:r>
-            <a:r>
-              <a:rPr lang="en-US" dirty="0"/>
-              <a:t> </a:t>
-            </a:r>
-            <a:r>
-              <a:rPr lang="en-US" dirty="0" err="1"/>
-              <a:t>mondat</a:t>
-            </a:r>
-            <a:r>
-              <a:rPr lang="en-US" dirty="0"/>
+              <a:rPr lang="en-US" b="0" dirty="0" err="1"/>
+              <a:t>hanem</a:t>
+            </a:r>
+            <a:r>
+              <a:rPr lang="en-US" b="0" dirty="0"/>
+              <a:t> </a:t>
+            </a:r>
+            <a:r>
+              <a:rPr lang="en-US" b="0" dirty="0" err="1"/>
+              <a:t>adatot</a:t>
+            </a:r>
+            <a:r>
+              <a:rPr lang="en-US" b="0" dirty="0"/>
+              <a:t> (</a:t>
+            </a:r>
+            <a:r>
+              <a:rPr lang="en-US" b="0" dirty="0" err="1"/>
+              <a:t>jellemzően</a:t>
+            </a:r>
+            <a:r>
+              <a:rPr lang="en-US" b="0" dirty="0"/>
+              <a:t> JSON-t)</a:t>
+            </a:r>
+            <a:r>
+              <a:rPr lang="hu-HU" b="0" dirty="0"/>
+              <a:t>. Ezáltal az </a:t>
+            </a:r>
+            <a:r>
+              <a:rPr lang="en-US" b="0" dirty="0"/>
+              <a:t>UI </a:t>
+            </a:r>
+            <a:r>
+              <a:rPr lang="en-US" b="0" dirty="0" err="1"/>
+              <a:t>logika</a:t>
+            </a:r>
+            <a:r>
+              <a:rPr lang="en-US" b="0" dirty="0"/>
+              <a:t> </a:t>
+            </a:r>
+            <a:r>
+              <a:rPr lang="en-US" b="0" dirty="0" err="1"/>
+              <a:t>kikerül</a:t>
+            </a:r>
+            <a:r>
+              <a:rPr lang="en-US" b="0" dirty="0"/>
+              <a:t> a </a:t>
+            </a:r>
+            <a:r>
+              <a:rPr lang="en-US" b="0" dirty="0" err="1"/>
+              <a:t>szerverről</a:t>
+            </a:r>
+            <a:r>
+              <a:rPr lang="hu-HU" b="0" dirty="0"/>
               <a:t>.</a:t>
             </a:r>
           </a:p>
           <a:p>
             <a:r>
-              <a:rPr lang="en-US" dirty="0"/>
-              <a:t>Az URI </a:t>
+              <a:rPr lang="hu-HU" dirty="0"/>
+              <a:t>Egy REST API mögött </a:t>
             </a:r>
             <a:r>
               <a:rPr lang="hu-HU" b="0" dirty="0"/>
-              <a:t>az erőforrás neve</a:t>
-            </a:r>
-            <a:r>
-              <a:rPr lang="en-US" dirty="0"/>
-              <a:t>, a HTTP </a:t>
-            </a:r>
-            <a:r>
-              <a:rPr lang="en-US" dirty="0" err="1"/>
-              <a:t>metódus</a:t>
+              <a:t>szinte mindig </a:t>
             </a:r>
             <a:r>
               <a:rPr lang="hu-HU" dirty="0"/>
-              <a:t> definiálja, hogy</a:t>
-            </a:r>
-            <a:r>
-              <a:rPr lang="en-US" dirty="0"/>
-              <a:t> </a:t>
-            </a:r>
-            <a:r>
-              <a:rPr lang="en-US" b="1" dirty="0" err="1"/>
-              <a:t>mit</a:t>
-            </a:r>
+              <a:t>egy MVC-szerű architektúra dolgozik.</a:t>
+            </a:r>
+            <a:endParaRPr lang="en-US" b="0" dirty="0"/>
+          </a:p>
+          <a:p>
+            <a:endParaRPr lang="hu-HU" dirty="0"/>
+          </a:p>
+          <a:p>
             <a:r>
               <a:rPr lang="en-US" b="1" dirty="0"/>
-              <a:t> </a:t>
-            </a:r>
-            <a:r>
-              <a:rPr lang="en-US" b="1" dirty="0" err="1"/>
-              <a:t>csinál</a:t>
-            </a:r>
-            <a:r>
-              <a:rPr lang="hu-HU" b="1" dirty="0" err="1"/>
-              <a:t>unk</a:t>
-            </a:r>
-            <a:r>
-              <a:rPr lang="hu-HU" b="0" dirty="0"/>
-              <a:t> az erőforráson.</a:t>
-            </a:r>
-          </a:p>
-          <a:p>
-            <a:r>
-              <a:rPr lang="hu-HU" b="0" dirty="0"/>
-              <a:t>Miért többes szám? Mert az URI egy </a:t>
-            </a:r>
-            <a:r>
-              <a:rPr lang="hu-HU" b="1" dirty="0"/>
-              <a:t>erőforrás-gyűjteményt</a:t>
-            </a:r>
-            <a:r>
-              <a:rPr lang="hu-HU" dirty="0"/>
-              <a:t> jelöl, </a:t>
-            </a:r>
-            <a:r>
-              <a:rPr lang="en-US" dirty="0"/>
-              <a:t>és </a:t>
-            </a:r>
-            <a:r>
-              <a:rPr lang="en-US" dirty="0" err="1"/>
-              <a:t>azon</a:t>
-            </a:r>
-            <a:r>
-              <a:rPr lang="en-US" dirty="0"/>
-              <a:t> </a:t>
-            </a:r>
-            <a:r>
-              <a:rPr lang="en-US" dirty="0" err="1"/>
-              <a:t>belül</a:t>
-            </a:r>
-            <a:r>
-              <a:rPr lang="en-US" dirty="0"/>
-              <a:t> </a:t>
-            </a:r>
-            <a:r>
-              <a:rPr lang="en-US" dirty="0" err="1"/>
-              <a:t>egy</a:t>
-            </a:r>
-            <a:r>
-              <a:rPr lang="en-US" dirty="0"/>
-              <a:t> </a:t>
-            </a:r>
-            <a:r>
-              <a:rPr lang="en-US" dirty="0" err="1"/>
-              <a:t>konkrét</a:t>
-            </a:r>
-            <a:r>
-              <a:rPr lang="en-US" dirty="0"/>
-              <a:t> </a:t>
-            </a:r>
-            <a:r>
-              <a:rPr lang="en-US" dirty="0" err="1"/>
-              <a:t>elemet</a:t>
-            </a:r>
-            <a:r>
-              <a:rPr lang="hu-HU" dirty="0"/>
-              <a:t>.</a:t>
-            </a:r>
-            <a:endParaRPr lang="en-US" dirty="0"/>
-          </a:p>
-          <a:p>
-            <a:r>
-              <a:rPr lang="en-US" dirty="0"/>
-              <a:t>URI </a:t>
-            </a:r>
-            <a:r>
-              <a:rPr lang="en-US" dirty="0" err="1"/>
-              <a:t>stabil</a:t>
-            </a:r>
-            <a:r>
-              <a:rPr lang="en-US" dirty="0"/>
-              <a:t> </a:t>
-            </a:r>
-            <a:r>
-              <a:rPr lang="en-US" dirty="0" err="1"/>
-              <a:t>maradjon</a:t>
-            </a:r>
-            <a:r>
-              <a:rPr lang="hu-HU" dirty="0"/>
-              <a:t>, ne változtassuk. Mert a</a:t>
-            </a:r>
-            <a:r>
-              <a:rPr lang="en-US" dirty="0"/>
-              <a:t>z URI</a:t>
-            </a:r>
-            <a:r>
-              <a:rPr lang="hu-HU" dirty="0"/>
-              <a:t> </a:t>
-            </a:r>
-            <a:r>
-              <a:rPr lang="en-US" dirty="0" err="1"/>
-              <a:t>bekerül</a:t>
-            </a:r>
-            <a:r>
-              <a:rPr lang="en-US" dirty="0"/>
-              <a:t> frontend </a:t>
-            </a:r>
-            <a:r>
-              <a:rPr lang="en-US" dirty="0" err="1"/>
-              <a:t>kódba</a:t>
+              <a:t>Controller → REST endpoint</a:t>
+            </a:r>
+          </a:p>
+          <a:p>
+            <a:r>
+              <a:rPr lang="en-US" dirty="0"/>
+              <a:t>HTTP request </a:t>
+            </a:r>
+            <a:r>
+              <a:rPr lang="en-US" dirty="0" err="1"/>
+              <a:t>fogadása</a:t>
             </a:r>
             <a:r>
               <a:rPr lang="hu-HU" dirty="0"/>
@@ -7751,110 +7720,228 @@
             </a:r>
             <a:r>
               <a:rPr lang="en-US" dirty="0" err="1"/>
-              <a:t>bekerül</a:t>
-            </a:r>
-            <a:r>
-              <a:rPr lang="en-US" dirty="0"/>
-              <a:t> </a:t>
-            </a:r>
-            <a:r>
-              <a:rPr lang="en-US" dirty="0" err="1"/>
-              <a:t>mobil</a:t>
-            </a:r>
-            <a:r>
-              <a:rPr lang="en-US" dirty="0"/>
-              <a:t> </a:t>
-            </a:r>
-            <a:r>
-              <a:rPr lang="en-US" dirty="0" err="1"/>
-              <a:t>appba</a:t>
+              <a:t>paraméterek</a:t>
+            </a:r>
+            <a:r>
+              <a:rPr lang="en-US" dirty="0"/>
+              <a:t> </a:t>
+            </a:r>
+            <a:r>
+              <a:rPr lang="en-US" dirty="0" err="1"/>
+              <a:t>feldolgozása</a:t>
             </a:r>
             <a:r>
               <a:rPr lang="hu-HU" dirty="0"/>
-              <a:t>, </a:t>
-            </a:r>
-            <a:r>
-              <a:rPr lang="en-US" dirty="0" err="1"/>
-              <a:t>bekerül</a:t>
-            </a:r>
-            <a:r>
-              <a:rPr lang="en-US" dirty="0"/>
-              <a:t> </a:t>
-            </a:r>
-            <a:r>
-              <a:rPr lang="en-US" dirty="0" err="1"/>
-              <a:t>dokumentációba</a:t>
+              <a:t>, és </a:t>
+            </a:r>
+            <a:r>
+              <a:rPr lang="en-US" dirty="0"/>
+              <a:t>HTTP </a:t>
+            </a:r>
+            <a:r>
+              <a:rPr lang="en-US" dirty="0" err="1"/>
+              <a:t>válasz</a:t>
+            </a:r>
+            <a:r>
+              <a:rPr lang="en-US" dirty="0"/>
+              <a:t> </a:t>
+            </a:r>
+            <a:r>
+              <a:rPr lang="en-US" dirty="0" err="1"/>
+              <a:t>visszaadása</a:t>
             </a:r>
             <a:r>
               <a:rPr lang="hu-HU" dirty="0"/>
-              <a:t>. </a:t>
-            </a:r>
-            <a:r>
-              <a:rPr lang="en-US" dirty="0"/>
-              <a:t>Ha </a:t>
-            </a:r>
-            <a:r>
-              <a:rPr lang="en-US" dirty="0" err="1"/>
-              <a:t>változik</a:t>
-            </a:r>
+              <a:t> (JSON adat).</a:t>
+            </a:r>
+          </a:p>
+          <a:p>
+            <a:endParaRPr lang="hu-HU" dirty="0"/>
+          </a:p>
+          <a:p>
+            <a:r>
+              <a:rPr lang="en-US" b="1" dirty="0"/>
+              <a:t>Model</a:t>
+            </a:r>
+            <a:r>
+              <a:rPr lang="en-US" dirty="0"/>
+              <a:t> </a:t>
+            </a:r>
+            <a:r>
+              <a:rPr lang="en-US" b="1" dirty="0"/>
+              <a:t>→ </a:t>
+            </a:r>
+            <a:r>
+              <a:rPr lang="en-US" b="1" dirty="0" err="1"/>
+              <a:t>üzleti</a:t>
+            </a:r>
+            <a:r>
+              <a:rPr lang="en-US" b="1" dirty="0"/>
+              <a:t> </a:t>
+            </a:r>
+            <a:r>
+              <a:rPr lang="en-US" b="1" dirty="0" err="1"/>
+              <a:t>logika</a:t>
+            </a:r>
+            <a:endParaRPr lang="hu-HU" b="1" dirty="0"/>
+          </a:p>
+          <a:p>
             <a:r>
               <a:rPr lang="hu-HU" dirty="0"/>
-              <a:t>. </a:t>
-            </a:r>
-            <a:r>
-              <a:rPr lang="en-US" dirty="0" err="1"/>
-              <a:t>minden</a:t>
-            </a:r>
-            <a:r>
-              <a:rPr lang="en-US" dirty="0"/>
-              <a:t> </a:t>
-            </a:r>
-            <a:r>
-              <a:rPr lang="en-US" dirty="0" err="1"/>
-              <a:t>kliens</a:t>
-            </a:r>
-            <a:r>
-              <a:rPr lang="en-US" dirty="0"/>
-              <a:t> </a:t>
-            </a:r>
-            <a:r>
-              <a:rPr lang="en-US" dirty="0" err="1"/>
-              <a:t>törik</a:t>
+              <a:t>Ez nem változik a REST-nél sem. A </a:t>
+            </a:r>
+            <a:r>
+              <a:rPr lang="hu-HU" dirty="0" err="1"/>
+              <a:t>Model</a:t>
             </a:r>
             <a:r>
               <a:rPr lang="hu-HU" dirty="0"/>
+              <a:t> tartalmazza: szolgáltatási réteg, üzleti adatok/objektumok, adatbázis-elérés, validációk, és egyéb üzleti szabályok.</a:t>
+            </a:r>
+          </a:p>
+          <a:p>
+            <a:endParaRPr lang="hu-HU" dirty="0"/>
+          </a:p>
+          <a:p>
+            <a:r>
+              <a:rPr lang="en-US" b="1" dirty="0"/>
+              <a:t>View → JSON </a:t>
+            </a:r>
+            <a:r>
+              <a:rPr lang="en-US" b="1" dirty="0" err="1"/>
+              <a:t>válasz</a:t>
+            </a:r>
+            <a:endParaRPr lang="hu-HU" b="1" dirty="0"/>
+          </a:p>
+          <a:p>
+            <a:r>
+              <a:rPr lang="hu-HU" dirty="0"/>
+              <a:t>Itt van a szemléletváltás, és a legnagyobb változás. A REST esetén a </a:t>
+            </a:r>
+            <a:r>
+              <a:rPr lang="hu-HU" dirty="0" err="1"/>
+              <a:t>View</a:t>
+            </a:r>
+            <a:r>
+              <a:rPr lang="hu-HU" dirty="0"/>
+              <a:t> nem HTML, hanem JSON adat.</a:t>
+            </a:r>
+          </a:p>
+          <a:p>
+            <a:endParaRPr lang="hu-HU" dirty="0"/>
+          </a:p>
+          <a:p>
+            <a:r>
+              <a:rPr lang="en-US" dirty="0"/>
+              <a:t>A REST </a:t>
+            </a:r>
+            <a:r>
+              <a:rPr lang="en-US" b="1" dirty="0" err="1"/>
+              <a:t>szétválasztja</a:t>
+            </a:r>
+            <a:r>
+              <a:rPr lang="en-US" b="1" dirty="0"/>
+              <a:t> a </a:t>
+            </a:r>
+            <a:r>
+              <a:rPr lang="en-US" b="1" dirty="0" err="1"/>
+              <a:t>felelősségeket</a:t>
+            </a:r>
+            <a:r>
+              <a:rPr lang="en-US" dirty="0"/>
               <a:t>.</a:t>
             </a:r>
-          </a:p>
-          <a:p>
-            <a:r>
-              <a:rPr lang="en-US" dirty="0"/>
-              <a:t>Ember </a:t>
-            </a:r>
-            <a:r>
-              <a:rPr lang="en-US" dirty="0" err="1"/>
-              <a:t>által</a:t>
-            </a:r>
-            <a:r>
-              <a:rPr lang="en-US" dirty="0"/>
-              <a:t> is </a:t>
-            </a:r>
-            <a:r>
-              <a:rPr lang="en-US" dirty="0" err="1"/>
-              <a:t>értelmezhető</a:t>
-            </a:r>
-            <a:r>
-              <a:rPr lang="en-US" dirty="0"/>
-              <a:t> </a:t>
-            </a:r>
-            <a:r>
-              <a:rPr lang="en-US" dirty="0" err="1"/>
-              <a:t>legyen</a:t>
-            </a:r>
             <a:r>
               <a:rPr lang="hu-HU" dirty="0"/>
-              <a:t>. Olvasható és beszédes.</a:t>
-            </a:r>
+              <a:t> </a:t>
+            </a:r>
+            <a:r>
+              <a:rPr lang="en-US" dirty="0"/>
+              <a:t>Az MVC </a:t>
+            </a:r>
+            <a:r>
+              <a:rPr lang="en-US" dirty="0" err="1"/>
+              <a:t>marad</a:t>
+            </a:r>
+            <a:r>
+              <a:rPr lang="en-US" dirty="0"/>
+              <a:t> a </a:t>
+            </a:r>
+            <a:r>
+              <a:rPr lang="en-US" dirty="0" err="1"/>
+              <a:t>szerveren</a:t>
+            </a:r>
+            <a:r>
+              <a:rPr lang="en-US" dirty="0"/>
+              <a:t>,</a:t>
+            </a:r>
+            <a:r>
+              <a:rPr lang="hu-HU" dirty="0"/>
+              <a:t> </a:t>
+            </a:r>
+            <a:r>
+              <a:rPr lang="en-US" dirty="0"/>
+              <a:t>a </a:t>
+            </a:r>
+            <a:r>
+              <a:rPr lang="en-US" dirty="0" err="1"/>
+              <a:t>megjelenítés</a:t>
+            </a:r>
+            <a:r>
+              <a:rPr lang="en-US" dirty="0"/>
+              <a:t> </a:t>
+            </a:r>
+            <a:r>
+              <a:rPr lang="en-US" dirty="0" err="1"/>
+              <a:t>pedig</a:t>
+            </a:r>
+            <a:r>
+              <a:rPr lang="en-US" dirty="0"/>
+              <a:t> </a:t>
+            </a:r>
+            <a:r>
+              <a:rPr lang="en-US" dirty="0" err="1"/>
+              <a:t>átkerül</a:t>
+            </a:r>
+            <a:r>
+              <a:rPr lang="en-US" dirty="0"/>
+              <a:t> a </a:t>
+            </a:r>
+            <a:r>
+              <a:rPr lang="en-US" dirty="0" err="1"/>
+              <a:t>klienshez</a:t>
+            </a:r>
+            <a:r>
+              <a:rPr lang="en-US" dirty="0"/>
+              <a:t>.</a:t>
+            </a:r>
+            <a:r>
+              <a:rPr lang="hu-HU" dirty="0"/>
+              <a:t> Ennek előnye, hogy a </a:t>
+            </a:r>
+            <a:r>
+              <a:rPr lang="en-US" dirty="0"/>
+              <a:t>frontend és backend </a:t>
+            </a:r>
+            <a:r>
+              <a:rPr lang="en-US" dirty="0" err="1"/>
+              <a:t>külön</a:t>
+            </a:r>
+            <a:r>
+              <a:rPr lang="en-US" dirty="0"/>
+              <a:t> </a:t>
+            </a:r>
+            <a:r>
+              <a:rPr lang="en-US" dirty="0" err="1"/>
+              <a:t>fejleszthető</a:t>
+            </a:r>
+            <a:r>
+              <a:rPr lang="hu-HU" dirty="0"/>
+              <a:t>. UI cserélhető a backend érintése nélkül.</a:t>
+            </a:r>
+            <a:endParaRPr lang="en-US" dirty="0"/>
+          </a:p>
+          <a:p>
             <a:endParaRPr lang="en-US" dirty="0"/>
           </a:p>
         </p:txBody>
@@ -7885,7 +7972,7 @@
     </p:spTree>
     <p:extLst>
       <p:ext uri="{BB962C8B-B14F-4D97-AF65-F5344CB8AC3E}">
-        <p14:creationId xmlns:p14="http://schemas.microsoft.com/office/powerpoint/2010/main" val="3430406636"/>
+        <p14:creationId xmlns:p14="http://schemas.microsoft.com/office/powerpoint/2010/main" val="436745763"/>
       </p:ext>
     </p:extLst>
   </p:cSld>
@@ -7939,476 +8026,324 @@
           <a:bodyPr/>
           <a:lstStyle/>
           <a:p>
-            <a:r>
-              <a:rPr lang="hu-HU" dirty="0">
-                <a:effectLst/>
-              </a:rPr>
-              <a:t>A REST API </a:t>
-            </a:r>
-            <a:r>
-              <a:rPr lang="hu-HU" dirty="0" err="1">
-                <a:effectLst/>
-              </a:rPr>
-              <a:t>verziózás</a:t>
-            </a:r>
-            <a:r>
-              <a:rPr lang="hu-HU" dirty="0">
-                <a:effectLst/>
-              </a:rPr>
-              <a:t> azt jelenti, hogy az API változásait (új funkciók, </a:t>
-            </a:r>
-            <a:r>
-              <a:rPr lang="hu-HU" dirty="0" err="1">
-                <a:effectLst/>
-              </a:rPr>
-              <a:t>breaking</a:t>
-            </a:r>
-            <a:r>
-              <a:rPr lang="hu-HU" dirty="0">
-                <a:effectLst/>
-              </a:rPr>
-              <a:t> </a:t>
-            </a:r>
-            <a:r>
-              <a:rPr lang="hu-HU" dirty="0" err="1">
-                <a:effectLst/>
-              </a:rPr>
-              <a:t>changes</a:t>
-            </a:r>
-            <a:r>
-              <a:rPr lang="hu-HU" dirty="0">
-                <a:effectLst/>
-              </a:rPr>
-              <a:t>) külön verziókba csomagoljuk, hogy a régi kliensek továbbra is működjenek, miközben az új funkciók bevezethetők, így biztosítva a stabilitást és lehetővé téve a fokozatos frissítést, elkerülve a hirtelen, zavaró változtatásokat a meglévő integrációkban. Ez a skálázhatóságot és karbantarthatóságot is segíti.</a:t>
-            </a:r>
-          </a:p>
-          <a:p>
+            <a:pPr marL="0" marR="0" lvl="0" indent="0" algn="l" defTabSz="914400" rtl="0" eaLnBrk="1" fontAlgn="auto" latinLnBrk="0" hangingPunct="1">
+              <a:lnSpc>
+                <a:spcPct val="100000"/>
+              </a:lnSpc>
+              <a:spcBef>
+                <a:spcPts val="0"/>
+              </a:spcBef>
+              <a:spcAft>
+                <a:spcPts val="0"/>
+              </a:spcAft>
+              <a:buClrTx/>
+              <a:buSzTx/>
+              <a:buFontTx/>
+              <a:buNone/>
+              <a:tabLst/>
+              <a:defRPr/>
+            </a:pPr>
+            <a:r>
+              <a:rPr lang="en-US" dirty="0"/>
+              <a:t>Az URI </a:t>
+            </a:r>
+            <a:r>
+              <a:rPr lang="en-US" dirty="0" err="1"/>
+              <a:t>egy</a:t>
+            </a:r>
+            <a:r>
+              <a:rPr lang="en-US" dirty="0"/>
+              <a:t> </a:t>
+            </a:r>
+            <a:r>
+              <a:rPr lang="en-US" dirty="0" err="1"/>
+              <a:t>főnév</a:t>
+            </a:r>
+            <a:r>
+              <a:rPr lang="en-US" dirty="0"/>
+              <a:t>, </a:t>
+            </a:r>
+            <a:r>
+              <a:rPr lang="en-US" dirty="0" err="1"/>
+              <a:t>nem</a:t>
+            </a:r>
+            <a:r>
+              <a:rPr lang="en-US" dirty="0"/>
+              <a:t> </a:t>
+            </a:r>
+            <a:r>
+              <a:rPr lang="en-US" dirty="0" err="1"/>
+              <a:t>egy</a:t>
+            </a:r>
+            <a:r>
+              <a:rPr lang="en-US" dirty="0"/>
+              <a:t> </a:t>
+            </a:r>
+            <a:r>
+              <a:rPr lang="en-US" dirty="0" err="1"/>
+              <a:t>mondat</a:t>
+            </a:r>
+            <a:r>
+              <a:rPr lang="en-US" dirty="0"/>
+              <a:t>.</a:t>
+            </a:r>
+          </a:p>
+          <a:p>
+            <a:r>
+              <a:rPr lang="en-US" dirty="0"/>
+              <a:t>Az URI </a:t>
+            </a:r>
+            <a:r>
+              <a:rPr lang="hu-HU" b="0" dirty="0"/>
+              <a:t>az erőforrás neve</a:t>
+            </a:r>
+            <a:r>
+              <a:rPr lang="en-US" dirty="0"/>
+              <a:t>, a HTTP </a:t>
+            </a:r>
+            <a:r>
+              <a:rPr lang="en-US" dirty="0" err="1"/>
+              <a:t>metódus</a:t>
+            </a:r>
+            <a:r>
+              <a:rPr lang="hu-HU" dirty="0"/>
+              <a:t> definiálja, hogy</a:t>
+            </a:r>
+            <a:r>
+              <a:rPr lang="en-US" dirty="0"/>
+              <a:t> </a:t>
+            </a:r>
+            <a:r>
+              <a:rPr lang="en-US" b="1" dirty="0" err="1"/>
+              <a:t>mit</a:t>
+            </a:r>
+            <a:r>
+              <a:rPr lang="en-US" b="1" dirty="0"/>
+              <a:t> </a:t>
+            </a:r>
+            <a:r>
+              <a:rPr lang="en-US" b="1" dirty="0" err="1"/>
+              <a:t>csinál</a:t>
+            </a:r>
+            <a:r>
+              <a:rPr lang="hu-HU" b="1" dirty="0" err="1"/>
+              <a:t>unk</a:t>
+            </a:r>
+            <a:r>
+              <a:rPr lang="hu-HU" b="0" dirty="0"/>
+              <a:t> az erőforráson.</a:t>
+            </a:r>
+          </a:p>
+          <a:p>
+            <a:r>
+              <a:rPr lang="hu-HU" b="0" dirty="0"/>
+              <a:t>Miért többes szám? Mert az URI egy </a:t>
+            </a:r>
             <a:r>
               <a:rPr lang="hu-HU" b="1" dirty="0"/>
-              <a:t>Miért fontos?</a:t>
-            </a:r>
-            <a:endParaRPr lang="hu-HU" dirty="0"/>
-          </a:p>
-          <a:p>
-            <a:r>
-              <a:rPr lang="hu-HU" b="1" dirty="0"/>
-              <a:t>Stabilitás:</a:t>
+              <a:t>erőforrás-gyűjteményt</a:t>
             </a:r>
             <a:r>
               <a:rPr lang="hu-HU" dirty="0"/>
-              <a:t> A kliensek nem kényszerülnek azonnali frissítésre.</a:t>
-            </a:r>
-          </a:p>
-          <a:p>
-            <a:r>
-              <a:rPr lang="hu-HU" b="1" dirty="0"/>
-              <a:t>Kontrollált változtatás:</a:t>
+              <a:t> jelöl, </a:t>
+            </a:r>
+            <a:r>
+              <a:rPr lang="en-US" dirty="0"/>
+              <a:t>és </a:t>
+            </a:r>
+            <a:r>
+              <a:rPr lang="en-US" dirty="0" err="1"/>
+              <a:t>azon</a:t>
+            </a:r>
+            <a:r>
+              <a:rPr lang="en-US" dirty="0"/>
+              <a:t> </a:t>
+            </a:r>
+            <a:r>
+              <a:rPr lang="en-US" dirty="0" err="1"/>
+              <a:t>belül</a:t>
+            </a:r>
+            <a:r>
+              <a:rPr lang="en-US" dirty="0"/>
+              <a:t> </a:t>
+            </a:r>
+            <a:r>
+              <a:rPr lang="en-US" dirty="0" err="1"/>
+              <a:t>egy</a:t>
+            </a:r>
+            <a:r>
+              <a:rPr lang="en-US" dirty="0"/>
+              <a:t> </a:t>
+            </a:r>
+            <a:r>
+              <a:rPr lang="en-US" dirty="0" err="1"/>
+              <a:t>konkrét</a:t>
+            </a:r>
+            <a:r>
+              <a:rPr lang="en-US" dirty="0"/>
+              <a:t> </a:t>
+            </a:r>
+            <a:r>
+              <a:rPr lang="en-US" dirty="0" err="1"/>
+              <a:t>elemet</a:t>
             </a:r>
             <a:r>
               <a:rPr lang="hu-HU" dirty="0"/>
-              <a:t> Külön kezelhetők az új és a régi funkciók. </a:t>
-            </a:r>
-            <a:r>
-              <a:rPr lang="en-US" dirty="0"/>
-              <a:t>Az API </a:t>
-            </a:r>
-            <a:r>
-              <a:rPr lang="en-US" dirty="0" err="1"/>
-              <a:t>biztonságosan</a:t>
-            </a:r>
-            <a:r>
-              <a:rPr lang="en-US" dirty="0"/>
-              <a:t> </a:t>
-            </a:r>
-            <a:r>
-              <a:rPr lang="en-US" dirty="0" err="1"/>
-              <a:t>fejleszthető</a:t>
-            </a:r>
-            <a:r>
-              <a:rPr lang="en-US" dirty="0"/>
-              <a:t>, </a:t>
-            </a:r>
-            <a:r>
-              <a:rPr lang="en-US" dirty="0" err="1"/>
-              <a:t>új</a:t>
-            </a:r>
-            <a:r>
-              <a:rPr lang="en-US" dirty="0"/>
-              <a:t> </a:t>
-            </a:r>
-            <a:r>
-              <a:rPr lang="en-US" dirty="0" err="1"/>
-              <a:t>funkciók</a:t>
-            </a:r>
-            <a:r>
-              <a:rPr lang="en-US" dirty="0"/>
-              <a:t> és breaking change-ek </a:t>
-            </a:r>
-            <a:r>
-              <a:rPr lang="en-US" dirty="0" err="1"/>
-              <a:t>bevezethetők</a:t>
-            </a:r>
-            <a:r>
-              <a:rPr lang="en-US" dirty="0"/>
-              <a:t> </a:t>
-            </a:r>
-            <a:r>
-              <a:rPr lang="en-US" dirty="0" err="1"/>
-              <a:t>anélkül</a:t>
-            </a:r>
-            <a:r>
-              <a:rPr lang="en-US" dirty="0"/>
-              <a:t>, </a:t>
-            </a:r>
-            <a:r>
-              <a:rPr lang="en-US" dirty="0" err="1"/>
-              <a:t>hogy</a:t>
-            </a:r>
-            <a:r>
-              <a:rPr lang="en-US" dirty="0"/>
-              <a:t> a </a:t>
-            </a:r>
-            <a:r>
-              <a:rPr lang="en-US" dirty="0" err="1"/>
-              <a:t>meglévő</a:t>
-            </a:r>
-            <a:r>
-              <a:rPr lang="en-US" dirty="0"/>
-              <a:t> </a:t>
-            </a:r>
-            <a:r>
-              <a:rPr lang="en-US" dirty="0" err="1"/>
-              <a:t>integrációk</a:t>
-            </a:r>
-            <a:r>
-              <a:rPr lang="en-US" dirty="0"/>
-              <a:t> </a:t>
-            </a:r>
-            <a:r>
-              <a:rPr lang="en-US" dirty="0" err="1"/>
-              <a:t>megsérülnének</a:t>
-            </a:r>
-            <a:r>
-              <a:rPr lang="en-US" dirty="0"/>
               <a:t>.</a:t>
             </a:r>
-            <a:endParaRPr lang="hu-HU" dirty="0"/>
-          </a:p>
-          <a:p>
-            <a:r>
-              <a:rPr lang="en-US" b="1" dirty="0" err="1"/>
-              <a:t>Szerződésvédelem</a:t>
-            </a:r>
-            <a:r>
-              <a:rPr lang="hu-HU" b="1" dirty="0"/>
-              <a:t>:</a:t>
+            <a:endParaRPr lang="en-US" dirty="0"/>
+          </a:p>
+          <a:p>
+            <a:r>
+              <a:rPr lang="en-US" dirty="0"/>
+              <a:t>URI </a:t>
+            </a:r>
+            <a:r>
+              <a:rPr lang="en-US" dirty="0" err="1"/>
+              <a:t>stabil</a:t>
+            </a:r>
+            <a:r>
+              <a:rPr lang="en-US" dirty="0"/>
+              <a:t> </a:t>
+            </a:r>
+            <a:r>
+              <a:rPr lang="en-US" dirty="0" err="1"/>
+              <a:t>maradjon</a:t>
             </a:r>
             <a:r>
               <a:rPr lang="hu-HU" dirty="0"/>
-              <a:t> </a:t>
-            </a:r>
-            <a:r>
-              <a:rPr lang="en-US" dirty="0"/>
-              <a:t>Az API </a:t>
-            </a:r>
-            <a:r>
-              <a:rPr lang="en-US" dirty="0" err="1"/>
-              <a:t>egy</a:t>
-            </a:r>
-            <a:r>
-              <a:rPr lang="en-US" dirty="0"/>
-              <a:t> </a:t>
-            </a:r>
-            <a:r>
-              <a:rPr lang="en-US" dirty="0" err="1"/>
-              <a:t>szerződés</a:t>
-            </a:r>
-            <a:r>
-              <a:rPr lang="en-US" dirty="0"/>
-              <a:t> a </a:t>
-            </a:r>
-            <a:r>
-              <a:rPr lang="en-US" dirty="0" err="1"/>
-              <a:t>kliens</a:t>
-            </a:r>
-            <a:r>
-              <a:rPr lang="en-US" dirty="0"/>
-              <a:t> és a </a:t>
-            </a:r>
-            <a:r>
-              <a:rPr lang="en-US" dirty="0" err="1"/>
-              <a:t>szerver</a:t>
-            </a:r>
-            <a:r>
-              <a:rPr lang="en-US" dirty="0"/>
-              <a:t> </a:t>
-            </a:r>
-            <a:r>
-              <a:rPr lang="en-US" dirty="0" err="1"/>
-              <a:t>között</a:t>
-            </a:r>
-            <a:r>
-              <a:rPr lang="en-US" dirty="0"/>
-              <a:t>. A </a:t>
-            </a:r>
-            <a:r>
-              <a:rPr lang="en-US" dirty="0" err="1"/>
-              <a:t>verziózás</a:t>
-            </a:r>
-            <a:r>
-              <a:rPr lang="en-US" dirty="0"/>
-              <a:t> </a:t>
-            </a:r>
-            <a:r>
-              <a:rPr lang="en-US" dirty="0" err="1"/>
-              <a:t>biztosítja</a:t>
-            </a:r>
-            <a:r>
-              <a:rPr lang="en-US" dirty="0"/>
-              <a:t>, </a:t>
-            </a:r>
-            <a:r>
-              <a:rPr lang="en-US" dirty="0" err="1"/>
-              <a:t>hogy</a:t>
-            </a:r>
-            <a:r>
-              <a:rPr lang="en-US" dirty="0"/>
-              <a:t> </a:t>
-            </a:r>
-            <a:r>
-              <a:rPr lang="en-US" dirty="0" err="1"/>
-              <a:t>egy</a:t>
-            </a:r>
-            <a:r>
-              <a:rPr lang="en-US" dirty="0"/>
-              <a:t> </a:t>
-            </a:r>
-            <a:r>
-              <a:rPr lang="en-US" dirty="0" err="1"/>
-              <a:t>változtatás</a:t>
-            </a:r>
-            <a:r>
-              <a:rPr lang="en-US" dirty="0"/>
-              <a:t> ne </a:t>
-            </a:r>
-            <a:r>
-              <a:rPr lang="en-US" dirty="0" err="1"/>
-              <a:t>törje</a:t>
-            </a:r>
-            <a:r>
-              <a:rPr lang="en-US" dirty="0"/>
-              <a:t> </a:t>
-            </a:r>
-            <a:r>
-              <a:rPr lang="en-US" dirty="0" err="1"/>
-              <a:t>el</a:t>
-            </a:r>
-            <a:r>
-              <a:rPr lang="en-US" dirty="0"/>
-              <a:t> a </a:t>
-            </a:r>
-            <a:r>
-              <a:rPr lang="en-US" dirty="0" err="1"/>
-              <a:t>meglévő</a:t>
-            </a:r>
-            <a:r>
-              <a:rPr lang="en-US" dirty="0"/>
-              <a:t> </a:t>
-            </a:r>
-            <a:r>
-              <a:rPr lang="en-US" dirty="0" err="1"/>
-              <a:t>klienseket</a:t>
-            </a:r>
-            <a:r>
-              <a:rPr lang="en-US" dirty="0"/>
-              <a:t>.</a:t>
-            </a:r>
-            <a:endParaRPr lang="hu-HU" dirty="0"/>
-          </a:p>
-          <a:p>
-            <a:endParaRPr lang="hu-HU" dirty="0"/>
-          </a:p>
-          <a:p>
-            <a:r>
-              <a:rPr lang="hu-HU" b="1" dirty="0"/>
-              <a:t>Gyakori </a:t>
-            </a:r>
-            <a:r>
-              <a:rPr lang="hu-HU" b="1" dirty="0" err="1"/>
-              <a:t>verziózási</a:t>
-            </a:r>
-            <a:r>
-              <a:rPr lang="hu-HU" b="1" dirty="0"/>
-              <a:t> stratégiák:</a:t>
-            </a:r>
-            <a:endParaRPr lang="hu-HU" dirty="0"/>
-          </a:p>
-          <a:p>
-            <a:r>
-              <a:rPr lang="hu-HU" b="1" dirty="0"/>
-              <a:t>URL alapú </a:t>
-            </a:r>
-            <a:r>
-              <a:rPr lang="hu-HU" b="1" dirty="0" err="1"/>
-              <a:t>verziózás</a:t>
-            </a:r>
-            <a:r>
-              <a:rPr lang="hu-HU" b="1" dirty="0"/>
-              <a:t> (</a:t>
-            </a:r>
-            <a:r>
-              <a:rPr lang="hu-HU" b="1" dirty="0" err="1"/>
-              <a:t>Path</a:t>
-            </a:r>
-            <a:r>
-              <a:rPr lang="hu-HU" b="1" dirty="0"/>
-              <a:t> Versioning):</a:t>
+              <a:t>, ne változtassuk. Mert a</a:t>
+            </a:r>
+            <a:r>
+              <a:rPr lang="en-US" dirty="0"/>
+              <a:t>z URI</a:t>
             </a:r>
             <a:r>
               <a:rPr lang="hu-HU" dirty="0"/>
-              <a:t> A leggyakoribb, a verziószám az URL-ben van (</a:t>
-            </a:r>
-            <a:r>
-              <a:rPr lang="hu-HU" sz="1200" kern="1200" dirty="0">
-                <a:solidFill>
-                  <a:schemeClr val="tx1"/>
-                </a:solidFill>
-                <a:latin typeface="+mn-lt"/>
-                <a:ea typeface="+mn-ea"/>
-                <a:cs typeface="+mn-cs"/>
-              </a:rPr>
-              <a:t>/v1/</a:t>
+              <a:t> </a:t>
+            </a:r>
+            <a:r>
+              <a:rPr lang="en-US" dirty="0" err="1"/>
+              <a:t>bekerül</a:t>
+            </a:r>
+            <a:r>
+              <a:rPr lang="en-US" dirty="0"/>
+              <a:t> frontend </a:t>
+            </a:r>
+            <a:r>
+              <a:rPr lang="en-US" dirty="0" err="1"/>
+              <a:t>kódba</a:t>
             </a:r>
             <a:r>
               <a:rPr lang="hu-HU" dirty="0"/>
               <a:t>, </a:t>
             </a:r>
             <a:r>
-              <a:rPr lang="hu-HU" sz="1200" kern="1200" dirty="0">
-                <a:solidFill>
-                  <a:schemeClr val="tx1"/>
-                </a:solidFill>
-                <a:latin typeface="+mn-lt"/>
-                <a:ea typeface="+mn-ea"/>
-                <a:cs typeface="+mn-cs"/>
-              </a:rPr>
-              <a:t>/v2/</a:t>
+              <a:rPr lang="en-US" dirty="0" err="1"/>
+              <a:t>bekerül</a:t>
+            </a:r>
+            <a:r>
+              <a:rPr lang="en-US" dirty="0"/>
+              <a:t> </a:t>
+            </a:r>
+            <a:r>
+              <a:rPr lang="en-US" dirty="0" err="1"/>
+              <a:t>mobil</a:t>
+            </a:r>
+            <a:r>
+              <a:rPr lang="en-US" dirty="0"/>
+              <a:t> </a:t>
+            </a:r>
+            <a:r>
+              <a:rPr lang="en-US" dirty="0" err="1"/>
+              <a:t>appba</a:t>
             </a:r>
             <a:r>
               <a:rPr lang="hu-HU" dirty="0"/>
-              <a:t>).</a:t>
-            </a:r>
-          </a:p>
-          <a:p>
-            <a:r>
-              <a:rPr lang="hu-HU" b="1" dirty="0"/>
-              <a:t>HTTP fejléc alapú </a:t>
-            </a:r>
-            <a:r>
-              <a:rPr lang="hu-HU" b="1" dirty="0" err="1"/>
-              <a:t>verziózás</a:t>
-            </a:r>
-            <a:r>
-              <a:rPr lang="hu-HU" b="1" dirty="0"/>
-              <a:t> (</a:t>
-            </a:r>
-            <a:r>
-              <a:rPr lang="hu-HU" b="1" dirty="0" err="1"/>
-              <a:t>Header</a:t>
-            </a:r>
-            <a:r>
-              <a:rPr lang="hu-HU" b="1" dirty="0"/>
-              <a:t> Versioning):</a:t>
+              <a:t>, </a:t>
+            </a:r>
+            <a:r>
+              <a:rPr lang="en-US" dirty="0" err="1"/>
+              <a:t>bekerül</a:t>
+            </a:r>
+            <a:r>
+              <a:rPr lang="en-US" dirty="0"/>
+              <a:t> </a:t>
+            </a:r>
+            <a:r>
+              <a:rPr lang="en-US" dirty="0" err="1"/>
+              <a:t>dokumentációba</a:t>
             </a:r>
             <a:r>
               <a:rPr lang="hu-HU" dirty="0"/>
-              <a:t> A verzió a </a:t>
-            </a:r>
-            <a:r>
-              <a:rPr lang="hu-HU" sz="1200" kern="1200" dirty="0" err="1">
-                <a:solidFill>
-                  <a:schemeClr val="tx1"/>
-                </a:solidFill>
-                <a:latin typeface="+mn-lt"/>
-                <a:ea typeface="+mn-ea"/>
-                <a:cs typeface="+mn-cs"/>
-              </a:rPr>
-              <a:t>Accept</a:t>
+              <a:t>. </a:t>
+            </a:r>
+            <a:r>
+              <a:rPr lang="en-US" dirty="0"/>
+              <a:t>Ha </a:t>
+            </a:r>
+            <a:r>
+              <a:rPr lang="en-US" dirty="0" err="1"/>
+              <a:t>változik</a:t>
             </a:r>
             <a:r>
               <a:rPr lang="hu-HU" dirty="0"/>
-              <a:t> vagy egyedi </a:t>
-            </a:r>
-            <a:r>
-              <a:rPr lang="hu-HU" sz="1200" kern="1200" dirty="0">
-                <a:solidFill>
-                  <a:schemeClr val="tx1"/>
-                </a:solidFill>
-                <a:latin typeface="+mn-lt"/>
-                <a:ea typeface="+mn-ea"/>
-                <a:cs typeface="+mn-cs"/>
-              </a:rPr>
-              <a:t>X-API-Version</a:t>
+              <a:t>. </a:t>
+            </a:r>
+            <a:r>
+              <a:rPr lang="en-US" dirty="0" err="1"/>
+              <a:t>minden</a:t>
+            </a:r>
+            <a:r>
+              <a:rPr lang="en-US" dirty="0"/>
+              <a:t> </a:t>
+            </a:r>
+            <a:r>
+              <a:rPr lang="en-US" dirty="0" err="1"/>
+              <a:t>kliens</a:t>
+            </a:r>
+            <a:r>
+              <a:rPr lang="en-US" dirty="0"/>
+              <a:t> </a:t>
+            </a:r>
+            <a:r>
+              <a:rPr lang="en-US" dirty="0" err="1"/>
+              <a:t>törik</a:t>
             </a:r>
             <a:r>
               <a:rPr lang="hu-HU" dirty="0"/>
-              <a:t> fejlécben van megadva.</a:t>
-            </a:r>
-          </a:p>
-          <a:p>
-            <a:r>
-              <a:rPr lang="hu-HU" b="1" dirty="0" err="1"/>
-              <a:t>Query</a:t>
-            </a:r>
-            <a:r>
-              <a:rPr lang="hu-HU" b="1" dirty="0"/>
-              <a:t> </a:t>
-            </a:r>
-            <a:r>
-              <a:rPr lang="hu-HU" b="1" dirty="0" err="1"/>
-              <a:t>parameter</a:t>
-            </a:r>
-            <a:r>
-              <a:rPr lang="hu-HU" b="1" dirty="0"/>
-              <a:t> alapú </a:t>
-            </a:r>
-            <a:r>
-              <a:rPr lang="hu-HU" b="1" dirty="0" err="1"/>
-              <a:t>verziózás</a:t>
-            </a:r>
-            <a:r>
-              <a:rPr lang="hu-HU" b="1" dirty="0"/>
-              <a:t>:</a:t>
+              <a:t>.</a:t>
+            </a:r>
+          </a:p>
+          <a:p>
+            <a:r>
+              <a:rPr lang="en-US" dirty="0"/>
+              <a:t>Ember </a:t>
+            </a:r>
+            <a:r>
+              <a:rPr lang="en-US" dirty="0" err="1"/>
+              <a:t>által</a:t>
+            </a:r>
+            <a:r>
+              <a:rPr lang="en-US" dirty="0"/>
+              <a:t> is </a:t>
+            </a:r>
+            <a:r>
+              <a:rPr lang="en-US" dirty="0" err="1"/>
+              <a:t>értelmezhető</a:t>
+            </a:r>
+            <a:r>
+              <a:rPr lang="en-US" dirty="0"/>
+              <a:t> </a:t>
+            </a:r>
+            <a:r>
+              <a:rPr lang="en-US" dirty="0" err="1"/>
+              <a:t>legyen</a:t>
             </a:r>
             <a:r>
               <a:rPr lang="hu-HU" dirty="0"/>
-              <a:t> A verzió egy </a:t>
-            </a:r>
-            <a:r>
-              <a:rPr lang="hu-HU" dirty="0" err="1"/>
-              <a:t>query</a:t>
-            </a:r>
-            <a:r>
-              <a:rPr lang="hu-HU" dirty="0"/>
-              <a:t> paraméter (</a:t>
-            </a:r>
-            <a:r>
-              <a:rPr lang="hu-HU" sz="1200" kern="1200" dirty="0">
-                <a:solidFill>
-                  <a:schemeClr val="tx1"/>
-                </a:solidFill>
-                <a:latin typeface="+mn-lt"/>
-                <a:ea typeface="+mn-ea"/>
-                <a:cs typeface="+mn-cs"/>
-              </a:rPr>
-              <a:t>?version=1.0</a:t>
-            </a:r>
-            <a:r>
-              <a:rPr lang="hu-HU" dirty="0"/>
-              <a:t>).</a:t>
-            </a:r>
-          </a:p>
-          <a:p>
+              <a:t>. Olvasható és beszédes.</a:t>
+            </a:r>
             <a:endParaRPr lang="en-US" dirty="0"/>
           </a:p>
         </p:txBody>
@@ -8430,7 +8365,7 @@
           <a:p>
             <a:fld id="{82D23EBC-67FA-4278-B97C-82D0A52FD2DA}" type="slidenum">
               <a:rPr lang="en-US" smtClean="0"/>
-              <a:t>11</a:t>
+              <a:t>12</a:t>
             </a:fld>
             <a:endParaRPr lang="en-US"/>
           </a:p>
@@ -8439,7 +8374,7 @@
     </p:spTree>
     <p:extLst>
       <p:ext uri="{BB962C8B-B14F-4D97-AF65-F5344CB8AC3E}">
-        <p14:creationId xmlns:p14="http://schemas.microsoft.com/office/powerpoint/2010/main" val="3969346656"/>
+        <p14:creationId xmlns:p14="http://schemas.microsoft.com/office/powerpoint/2010/main" val="3430406636"/>
       </p:ext>
     </p:extLst>
   </p:cSld>
@@ -8494,551 +8429,476 @@
           <a:lstStyle/>
           <a:p>
             <a:r>
-              <a:rPr lang="en-US" dirty="0"/>
-              <a:t>Egy REST API </a:t>
-            </a:r>
-            <a:r>
-              <a:rPr lang="en-US" b="0" dirty="0" err="1"/>
-              <a:t>ritkán</a:t>
-            </a:r>
-            <a:r>
-              <a:rPr lang="en-US" b="0" dirty="0"/>
-              <a:t> </a:t>
-            </a:r>
-            <a:r>
-              <a:rPr lang="hu-HU" b="0" dirty="0" err="1"/>
-              <a:t>lészül</a:t>
-            </a:r>
-            <a:r>
-              <a:rPr lang="hu-HU" b="0" dirty="0"/>
-              <a:t> csak </a:t>
-            </a:r>
-            <a:r>
-              <a:rPr lang="en-US" b="0" dirty="0" err="1"/>
+              <a:rPr lang="hu-HU" dirty="0">
+                <a:effectLst/>
+              </a:rPr>
+              <a:t>A REST API </a:t>
+            </a:r>
+            <a:r>
+              <a:rPr lang="hu-HU" dirty="0" err="1">
+                <a:effectLst/>
+              </a:rPr>
+              <a:t>verziózás</a:t>
+            </a:r>
+            <a:r>
+              <a:rPr lang="hu-HU" dirty="0">
+                <a:effectLst/>
+              </a:rPr>
+              <a:t> azt jelenti, hogy az API változásait (új funkciók, </a:t>
+            </a:r>
+            <a:r>
+              <a:rPr lang="hu-HU" dirty="0" err="1">
+                <a:effectLst/>
+              </a:rPr>
+              <a:t>breaking</a:t>
+            </a:r>
+            <a:r>
+              <a:rPr lang="hu-HU" dirty="0">
+                <a:effectLst/>
+              </a:rPr>
+              <a:t> </a:t>
+            </a:r>
+            <a:r>
+              <a:rPr lang="hu-HU" dirty="0" err="1">
+                <a:effectLst/>
+              </a:rPr>
+              <a:t>changes</a:t>
+            </a:r>
+            <a:r>
+              <a:rPr lang="hu-HU" dirty="0">
+                <a:effectLst/>
+              </a:rPr>
+              <a:t>) külön verziókba csomagoljuk, hogy a régi kliensek továbbra is működjenek, miközben az új funkciók bevezethetők, így biztosítva a stabilitást és lehetővé téve a fokozatos frissítést, elkerülve a hirtelen, zavaró változtatásokat a meglévő integrációkban. Ez a skálázhatóságot és karbantarthatóságot is segíti.</a:t>
+            </a:r>
+          </a:p>
+          <a:p>
+            <a:r>
+              <a:rPr lang="hu-HU" b="1" dirty="0"/>
+              <a:t>Miért fontos?</a:t>
+            </a:r>
+            <a:endParaRPr lang="hu-HU" dirty="0"/>
+          </a:p>
+          <a:p>
+            <a:r>
+              <a:rPr lang="hu-HU" b="1" dirty="0"/>
+              <a:t>Stabilitás:</a:t>
+            </a:r>
+            <a:r>
+              <a:rPr lang="hu-HU" dirty="0"/>
+              <a:t> A kliensek nem kényszerülnek azonnali frissítésre.</a:t>
+            </a:r>
+          </a:p>
+          <a:p>
+            <a:r>
+              <a:rPr lang="hu-HU" b="1" dirty="0"/>
+              <a:t>Kontrollált változtatás:</a:t>
+            </a:r>
+            <a:r>
+              <a:rPr lang="hu-HU" dirty="0"/>
+              <a:t> Külön kezelhetők az új és a régi funkciók. </a:t>
+            </a:r>
+            <a:r>
+              <a:rPr lang="en-US" dirty="0"/>
+              <a:t>Az API </a:t>
+            </a:r>
+            <a:r>
+              <a:rPr lang="en-US" dirty="0" err="1"/>
+              <a:t>biztonságosan</a:t>
+            </a:r>
+            <a:r>
+              <a:rPr lang="en-US" dirty="0"/>
+              <a:t> </a:t>
+            </a:r>
+            <a:r>
+              <a:rPr lang="en-US" dirty="0" err="1"/>
+              <a:t>fejleszthető</a:t>
+            </a:r>
+            <a:r>
+              <a:rPr lang="en-US" dirty="0"/>
+              <a:t>, </a:t>
+            </a:r>
+            <a:r>
+              <a:rPr lang="en-US" dirty="0" err="1"/>
+              <a:t>új</a:t>
+            </a:r>
+            <a:r>
+              <a:rPr lang="en-US" dirty="0"/>
+              <a:t> </a:t>
+            </a:r>
+            <a:r>
+              <a:rPr lang="en-US" dirty="0" err="1"/>
+              <a:t>funkciók</a:t>
+            </a:r>
+            <a:r>
+              <a:rPr lang="en-US" dirty="0"/>
+              <a:t> és breaking change-ek </a:t>
+            </a:r>
+            <a:r>
+              <a:rPr lang="en-US" dirty="0" err="1"/>
+              <a:t>bevezethetők</a:t>
+            </a:r>
+            <a:r>
+              <a:rPr lang="en-US" dirty="0"/>
+              <a:t> </a:t>
+            </a:r>
+            <a:r>
+              <a:rPr lang="en-US" dirty="0" err="1"/>
+              <a:t>anélkül</a:t>
+            </a:r>
+            <a:r>
+              <a:rPr lang="en-US" dirty="0"/>
+              <a:t>, </a:t>
+            </a:r>
+            <a:r>
+              <a:rPr lang="en-US" dirty="0" err="1"/>
+              <a:t>hogy</a:t>
+            </a:r>
+            <a:r>
+              <a:rPr lang="en-US" dirty="0"/>
+              <a:t> a </a:t>
+            </a:r>
+            <a:r>
+              <a:rPr lang="en-US" dirty="0" err="1"/>
+              <a:t>meglévő</a:t>
+            </a:r>
+            <a:r>
+              <a:rPr lang="en-US" dirty="0"/>
+              <a:t> </a:t>
+            </a:r>
+            <a:r>
+              <a:rPr lang="en-US" dirty="0" err="1"/>
+              <a:t>integrációk</a:t>
+            </a:r>
+            <a:r>
+              <a:rPr lang="en-US" dirty="0"/>
+              <a:t> </a:t>
+            </a:r>
+            <a:r>
+              <a:rPr lang="en-US" dirty="0" err="1"/>
+              <a:t>megsérülnének</a:t>
+            </a:r>
+            <a:r>
+              <a:rPr lang="en-US" dirty="0"/>
+              <a:t>.</a:t>
+            </a:r>
+            <a:endParaRPr lang="hu-HU" dirty="0"/>
+          </a:p>
+          <a:p>
+            <a:r>
+              <a:rPr lang="en-US" b="1" dirty="0" err="1"/>
+              <a:t>Szerződésvédelem</a:t>
+            </a:r>
+            <a:r>
+              <a:rPr lang="hu-HU" b="1" dirty="0"/>
+              <a:t>:</a:t>
+            </a:r>
+            <a:r>
+              <a:rPr lang="hu-HU" dirty="0"/>
+              <a:t> </a:t>
+            </a:r>
+            <a:r>
+              <a:rPr lang="en-US" dirty="0"/>
+              <a:t>Az API </a:t>
+            </a:r>
+            <a:r>
+              <a:rPr lang="en-US" dirty="0" err="1"/>
               <a:t>egy</a:t>
             </a:r>
             <a:r>
-              <a:rPr lang="en-US" b="0" dirty="0"/>
-              <a:t> </a:t>
-            </a:r>
-            <a:r>
-              <a:rPr lang="en-US" b="0" dirty="0" err="1"/>
-              <a:t>embernek</a:t>
+              <a:rPr lang="en-US" dirty="0"/>
+              <a:t> </a:t>
+            </a:r>
+            <a:r>
+              <a:rPr lang="en-US" dirty="0" err="1"/>
+              <a:t>szerződés</a:t>
+            </a:r>
+            <a:r>
+              <a:rPr lang="en-US" dirty="0"/>
+              <a:t> a </a:t>
+            </a:r>
+            <a:r>
+              <a:rPr lang="en-US" dirty="0" err="1"/>
+              <a:t>kliens</a:t>
+            </a:r>
+            <a:r>
+              <a:rPr lang="en-US" dirty="0"/>
+              <a:t> és a </a:t>
+            </a:r>
+            <a:r>
+              <a:rPr lang="en-US" dirty="0" err="1"/>
+              <a:t>szerver</a:t>
+            </a:r>
+            <a:r>
+              <a:rPr lang="en-US" dirty="0"/>
+              <a:t> </a:t>
+            </a:r>
+            <a:r>
+              <a:rPr lang="en-US" dirty="0" err="1"/>
+              <a:t>között</a:t>
+            </a:r>
+            <a:r>
+              <a:rPr lang="en-US" dirty="0"/>
+              <a:t>. A </a:t>
+            </a:r>
+            <a:r>
+              <a:rPr lang="en-US" dirty="0" err="1"/>
+              <a:t>verziózás</a:t>
+            </a:r>
+            <a:r>
+              <a:rPr lang="en-US" dirty="0"/>
+              <a:t> </a:t>
+            </a:r>
+            <a:r>
+              <a:rPr lang="en-US" dirty="0" err="1"/>
+              <a:t>biztosítja</a:t>
+            </a:r>
+            <a:r>
+              <a:rPr lang="en-US" dirty="0"/>
+              <a:t>, </a:t>
+            </a:r>
+            <a:r>
+              <a:rPr lang="en-US" dirty="0" err="1"/>
+              <a:t>hogy</a:t>
+            </a:r>
+            <a:r>
+              <a:rPr lang="en-US" dirty="0"/>
+              <a:t> </a:t>
+            </a:r>
+            <a:r>
+              <a:rPr lang="en-US" dirty="0" err="1"/>
+              <a:t>egy</a:t>
+            </a:r>
+            <a:r>
+              <a:rPr lang="en-US" dirty="0"/>
+              <a:t> </a:t>
+            </a:r>
+            <a:r>
+              <a:rPr lang="en-US" dirty="0" err="1"/>
+              <a:t>változtatás</a:t>
+            </a:r>
+            <a:r>
+              <a:rPr lang="en-US" dirty="0"/>
+              <a:t> ne </a:t>
+            </a:r>
+            <a:r>
+              <a:rPr lang="en-US" dirty="0" err="1"/>
+              <a:t>törje</a:t>
+            </a:r>
+            <a:r>
+              <a:rPr lang="en-US" dirty="0"/>
+              <a:t> </a:t>
+            </a:r>
+            <a:r>
+              <a:rPr lang="en-US" dirty="0" err="1"/>
+              <a:t>el</a:t>
+            </a:r>
+            <a:r>
+              <a:rPr lang="en-US" dirty="0"/>
+              <a:t> a </a:t>
+            </a:r>
+            <a:r>
+              <a:rPr lang="en-US" dirty="0" err="1"/>
+              <a:t>meglévő</a:t>
+            </a:r>
+            <a:r>
+              <a:rPr lang="en-US" dirty="0"/>
+              <a:t> </a:t>
+            </a:r>
+            <a:r>
+              <a:rPr lang="en-US" dirty="0" err="1"/>
+              <a:t>klienseket</a:t>
             </a:r>
             <a:r>
               <a:rPr lang="en-US" dirty="0"/>
               <a:t>.</a:t>
             </a:r>
+            <a:endParaRPr lang="hu-HU" dirty="0"/>
+          </a:p>
+          <a:p>
+            <a:endParaRPr lang="hu-HU" dirty="0"/>
+          </a:p>
+          <a:p>
+            <a:r>
+              <a:rPr lang="hu-HU" b="1" dirty="0"/>
+              <a:t>Gyakori </a:t>
+            </a:r>
+            <a:r>
+              <a:rPr lang="hu-HU" b="1" dirty="0" err="1"/>
+              <a:t>verziózási</a:t>
+            </a:r>
+            <a:r>
+              <a:rPr lang="hu-HU" b="1" dirty="0"/>
+              <a:t> stratégiák:</a:t>
+            </a:r>
+            <a:endParaRPr lang="hu-HU" dirty="0"/>
+          </a:p>
+          <a:p>
+            <a:r>
+              <a:rPr lang="hu-HU" b="1" dirty="0"/>
+              <a:t>URL alapú </a:t>
+            </a:r>
+            <a:r>
+              <a:rPr lang="hu-HU" b="1" dirty="0" err="1"/>
+              <a:t>verziózás</a:t>
+            </a:r>
+            <a:r>
+              <a:rPr lang="hu-HU" b="1" dirty="0"/>
+              <a:t> (</a:t>
+            </a:r>
+            <a:r>
+              <a:rPr lang="hu-HU" b="1" dirty="0" err="1"/>
+              <a:t>Path</a:t>
+            </a:r>
+            <a:r>
+              <a:rPr lang="hu-HU" b="1" dirty="0"/>
+              <a:t> Versioning):</a:t>
+            </a:r>
             <a:r>
               <a:rPr lang="hu-HU" dirty="0"/>
-              <a:t> </a:t>
-            </a:r>
-            <a:r>
-              <a:rPr lang="en-US" dirty="0" err="1"/>
-              <a:t>Általában</a:t>
-            </a:r>
-            <a:r>
-              <a:rPr lang="en-US" dirty="0"/>
-              <a:t> </a:t>
-            </a:r>
-            <a:r>
-              <a:rPr lang="hu-HU" b="0" dirty="0"/>
-              <a:t>egy vagy több</a:t>
-            </a:r>
-            <a:r>
-              <a:rPr lang="en-US" b="0" dirty="0"/>
-              <a:t> </a:t>
-            </a:r>
-            <a:r>
-              <a:rPr lang="en-US" b="0" dirty="0" err="1"/>
-              <a:t>csapat</a:t>
-            </a:r>
-            <a:r>
-              <a:rPr lang="en-US" b="0" dirty="0"/>
-              <a:t> </a:t>
-            </a:r>
-            <a:r>
-              <a:rPr lang="en-US" b="0" dirty="0" err="1"/>
-              <a:t>dolgozik</a:t>
-            </a:r>
-            <a:r>
-              <a:rPr lang="en-US" b="0" dirty="0"/>
-              <a:t> </a:t>
-            </a:r>
-            <a:r>
-              <a:rPr lang="en-US" b="0" dirty="0" err="1"/>
-              <a:t>vele</a:t>
-            </a:r>
-            <a:r>
-              <a:rPr lang="en-US" b="0" dirty="0"/>
-              <a:t> </a:t>
-            </a:r>
-            <a:r>
-              <a:rPr lang="en-US" b="0" dirty="0" err="1"/>
-              <a:t>párhuzamosan</a:t>
-            </a:r>
-            <a:r>
-              <a:rPr lang="en-US" dirty="0"/>
-              <a:t>.</a:t>
-            </a:r>
-            <a:r>
-              <a:rPr lang="hu-HU" dirty="0"/>
-              <a:t> </a:t>
-            </a:r>
-            <a:r>
-              <a:rPr lang="en-US" dirty="0"/>
-              <a:t>Ha </a:t>
-            </a:r>
-            <a:r>
-              <a:rPr lang="en-US" dirty="0" err="1"/>
-              <a:t>nincs</a:t>
-            </a:r>
-            <a:r>
-              <a:rPr lang="en-US" dirty="0"/>
-              <a:t> </a:t>
-            </a:r>
-            <a:r>
-              <a:rPr lang="en-US" dirty="0" err="1"/>
-              <a:t>dokumentáció</a:t>
-            </a:r>
-            <a:r>
-              <a:rPr lang="en-US" dirty="0"/>
-              <a:t>, </a:t>
-            </a:r>
-            <a:r>
-              <a:rPr lang="en-US" dirty="0" err="1"/>
-              <a:t>akkor</a:t>
-            </a:r>
-            <a:r>
-              <a:rPr lang="hu-HU" dirty="0"/>
-              <a:t> </a:t>
-            </a:r>
-            <a:r>
-              <a:rPr lang="en-US" dirty="0" err="1"/>
-              <a:t>mindenki</a:t>
-            </a:r>
-            <a:r>
-              <a:rPr lang="en-US" dirty="0"/>
-              <a:t> </a:t>
-            </a:r>
-            <a:r>
-              <a:rPr lang="en-US" dirty="0" err="1"/>
-              <a:t>mást</a:t>
-            </a:r>
-            <a:r>
-              <a:rPr lang="en-US" dirty="0"/>
-              <a:t> </a:t>
-            </a:r>
-            <a:r>
-              <a:rPr lang="en-US" dirty="0" err="1"/>
-              <a:t>gondol</a:t>
-            </a:r>
-            <a:r>
-              <a:rPr lang="en-US" dirty="0"/>
-              <a:t> </a:t>
-            </a:r>
-            <a:r>
-              <a:rPr lang="en-US" dirty="0" err="1"/>
-              <a:t>az</a:t>
-            </a:r>
-            <a:r>
-              <a:rPr lang="en-US" dirty="0"/>
-              <a:t> API-</a:t>
-            </a:r>
-            <a:r>
-              <a:rPr lang="en-US" dirty="0" err="1"/>
-              <a:t>ról</a:t>
+              <a:t> A leggyakoribb, a verziószám az URL-ben van (</a:t>
+            </a:r>
+            <a:r>
+              <a:rPr lang="hu-HU" sz="1200" kern="1200" dirty="0">
+                <a:solidFill>
+                  <a:schemeClr val="tx1"/>
+                </a:solidFill>
+                <a:latin typeface="+mn-lt"/>
+                <a:ea typeface="+mn-ea"/>
+                <a:cs typeface="+mn-cs"/>
+              </a:rPr>
+              <a:t>/v1/</a:t>
             </a:r>
             <a:r>
               <a:rPr lang="hu-HU" dirty="0"/>
               <a:t>, </a:t>
             </a:r>
             <a:r>
-              <a:rPr lang="en-US" dirty="0"/>
-              <a:t>és </a:t>
-            </a:r>
-            <a:r>
-              <a:rPr lang="en-US" dirty="0" err="1"/>
-              <a:t>ebből</a:t>
-            </a:r>
-            <a:r>
-              <a:rPr lang="en-US" dirty="0"/>
-              <a:t> </a:t>
-            </a:r>
-            <a:r>
-              <a:rPr lang="en-US" dirty="0" err="1"/>
-              <a:t>lesznek</a:t>
-            </a:r>
-            <a:r>
-              <a:rPr lang="en-US" dirty="0"/>
-              <a:t> a </a:t>
-            </a:r>
-            <a:r>
-              <a:rPr lang="en-US" dirty="0" err="1"/>
-              <a:t>problémák</a:t>
+              <a:rPr lang="hu-HU" sz="1200" kern="1200" dirty="0">
+                <a:solidFill>
+                  <a:schemeClr val="tx1"/>
+                </a:solidFill>
+                <a:latin typeface="+mn-lt"/>
+                <a:ea typeface="+mn-ea"/>
+                <a:cs typeface="+mn-cs"/>
+              </a:rPr>
+              <a:t>/v2/</a:t>
             </a:r>
             <a:r>
               <a:rPr lang="hu-HU" dirty="0"/>
-              <a:t>.</a:t>
-            </a:r>
-          </a:p>
-          <a:p>
-            <a:r>
-              <a:rPr lang="en-US" dirty="0"/>
-              <a:t>Az API </a:t>
-            </a:r>
-            <a:r>
-              <a:rPr lang="en-US" dirty="0" err="1"/>
-              <a:t>egy</a:t>
-            </a:r>
-            <a:r>
-              <a:rPr lang="en-US" dirty="0"/>
-              <a:t> </a:t>
-            </a:r>
-            <a:r>
-              <a:rPr lang="en-US" dirty="0" err="1"/>
-              <a:t>szerződés</a:t>
+              <a:t>).</a:t>
+            </a:r>
+          </a:p>
+          <a:p>
+            <a:r>
+              <a:rPr lang="hu-HU" b="1" dirty="0"/>
+              <a:t>HTTP fejléc alapú </a:t>
+            </a:r>
+            <a:r>
+              <a:rPr lang="hu-HU" b="1" dirty="0" err="1"/>
+              <a:t>verziózás</a:t>
+            </a:r>
+            <a:r>
+              <a:rPr lang="hu-HU" b="1" dirty="0"/>
+              <a:t> (</a:t>
+            </a:r>
+            <a:r>
+              <a:rPr lang="hu-HU" b="1" dirty="0" err="1"/>
+              <a:t>Header</a:t>
+            </a:r>
+            <a:r>
+              <a:rPr lang="hu-HU" b="1" dirty="0"/>
+              <a:t> Versioning):</a:t>
             </a:r>
             <a:r>
               <a:rPr lang="hu-HU" dirty="0"/>
-              <a:t>, és a</a:t>
-            </a:r>
-            <a:r>
-              <a:rPr lang="en-US" dirty="0"/>
-              <a:t> </a:t>
-            </a:r>
-            <a:r>
-              <a:rPr lang="en-US" dirty="0" err="1"/>
-              <a:t>dokumentáció</a:t>
-            </a:r>
-            <a:r>
-              <a:rPr lang="en-US" dirty="0"/>
-              <a:t> </a:t>
-            </a:r>
-            <a:r>
-              <a:rPr lang="en-US" dirty="0" err="1"/>
-              <a:t>ennek</a:t>
-            </a:r>
-            <a:r>
-              <a:rPr lang="en-US" dirty="0"/>
-              <a:t> </a:t>
-            </a:r>
-            <a:r>
-              <a:rPr lang="en-US" b="1" dirty="0" err="1"/>
-              <a:t>írásos</a:t>
-            </a:r>
-            <a:r>
-              <a:rPr lang="en-US" b="1" dirty="0"/>
-              <a:t> </a:t>
-            </a:r>
-            <a:r>
-              <a:rPr lang="en-US" b="1" dirty="0" err="1"/>
-              <a:t>formája</a:t>
-            </a:r>
-            <a:r>
-              <a:rPr lang="en-US" dirty="0"/>
-              <a:t>.</a:t>
+              <a:t> A verzió a </a:t>
+            </a:r>
+            <a:r>
+              <a:rPr lang="hu-HU" sz="1200" kern="1200" dirty="0" err="1">
+                <a:solidFill>
+                  <a:schemeClr val="tx1"/>
+                </a:solidFill>
+                <a:latin typeface="+mn-lt"/>
+                <a:ea typeface="+mn-ea"/>
+                <a:cs typeface="+mn-cs"/>
+              </a:rPr>
+              <a:t>Accept</a:t>
             </a:r>
             <a:r>
               <a:rPr lang="hu-HU" dirty="0"/>
-              <a:t> A dokumentáció megkönnyíti a verziók követhetőségét is.</a:t>
-            </a:r>
-          </a:p>
-          <a:p>
-            <a:r>
-              <a:rPr lang="en-US" dirty="0"/>
-              <a:t>A </a:t>
-            </a:r>
-            <a:r>
-              <a:rPr lang="en-US" dirty="0" err="1"/>
-              <a:t>dokumentáció</a:t>
-            </a:r>
-            <a:r>
-              <a:rPr lang="en-US" dirty="0"/>
-              <a:t> </a:t>
-            </a:r>
-            <a:r>
-              <a:rPr lang="en-US" dirty="0" err="1"/>
-              <a:t>alapján</a:t>
+              <a:t> vagy egyedi </a:t>
+            </a:r>
+            <a:r>
+              <a:rPr lang="hu-HU" sz="1200" kern="1200" dirty="0">
+                <a:solidFill>
+                  <a:schemeClr val="tx1"/>
+                </a:solidFill>
+                <a:latin typeface="+mn-lt"/>
+                <a:ea typeface="+mn-ea"/>
+                <a:cs typeface="+mn-cs"/>
+              </a:rPr>
+              <a:t>X-API-Version</a:t>
             </a:r>
             <a:r>
               <a:rPr lang="hu-HU" dirty="0"/>
-              <a:t> </a:t>
-            </a:r>
-            <a:r>
-              <a:rPr lang="en-US" dirty="0" err="1"/>
-              <a:t>automatikusan</a:t>
-            </a:r>
-            <a:r>
-              <a:rPr lang="en-US" dirty="0"/>
-              <a:t> </a:t>
-            </a:r>
-            <a:r>
-              <a:rPr lang="en-US" dirty="0" err="1"/>
-              <a:t>generálhatók</a:t>
+              <a:t> fejlécben van megadva.</a:t>
+            </a:r>
+          </a:p>
+          <a:p>
+            <a:r>
+              <a:rPr lang="hu-HU" b="1" dirty="0" err="1"/>
+              <a:t>Query</a:t>
+            </a:r>
+            <a:r>
+              <a:rPr lang="hu-HU" b="1" dirty="0"/>
+              <a:t> </a:t>
+            </a:r>
+            <a:r>
+              <a:rPr lang="hu-HU" b="1" dirty="0" err="1"/>
+              <a:t>parameter</a:t>
+            </a:r>
+            <a:r>
+              <a:rPr lang="hu-HU" b="1" dirty="0"/>
+              <a:t> alapú </a:t>
+            </a:r>
+            <a:r>
+              <a:rPr lang="hu-HU" b="1" dirty="0" err="1"/>
+              <a:t>verziózás</a:t>
+            </a:r>
+            <a:r>
+              <a:rPr lang="hu-HU" b="1" dirty="0"/>
+              <a:t>:</a:t>
             </a:r>
             <a:r>
               <a:rPr lang="hu-HU" dirty="0"/>
-              <a:t> </a:t>
-            </a:r>
-            <a:r>
-              <a:rPr lang="en-US" dirty="0" err="1"/>
-              <a:t>tesztek</a:t>
+              <a:t> A verzió egy </a:t>
+            </a:r>
+            <a:r>
+              <a:rPr lang="hu-HU" dirty="0" err="1"/>
+              <a:t>query</a:t>
             </a:r>
             <a:r>
               <a:rPr lang="hu-HU" dirty="0"/>
-              <a:t> és </a:t>
-            </a:r>
-            <a:r>
-              <a:rPr lang="en-US" dirty="0" err="1"/>
-              <a:t>validációk</a:t>
+              <a:t> paraméter (</a:t>
+            </a:r>
+            <a:r>
+              <a:rPr lang="hu-HU" sz="1200" kern="1200" dirty="0">
+                <a:solidFill>
+                  <a:schemeClr val="tx1"/>
+                </a:solidFill>
+                <a:latin typeface="+mn-lt"/>
+                <a:ea typeface="+mn-ea"/>
+                <a:cs typeface="+mn-cs"/>
+              </a:rPr>
+              <a:t>?version=1.0</a:t>
             </a:r>
             <a:r>
               <a:rPr lang="hu-HU" dirty="0"/>
-              <a:t>.</a:t>
-            </a:r>
+              <a:t>).</a:t>
+            </a:r>
+          </a:p>
+          <a:p>
             <a:endParaRPr lang="en-US" dirty="0"/>
-          </a:p>
-          <a:p>
-            <a:pPr marL="0" marR="0" lvl="0" indent="0" algn="l" defTabSz="914400" rtl="0" eaLnBrk="1" fontAlgn="auto" latinLnBrk="0" hangingPunct="1">
-              <a:lnSpc>
-                <a:spcPct val="100000"/>
-              </a:lnSpc>
-              <a:spcBef>
-                <a:spcPts val="0"/>
-              </a:spcBef>
-              <a:spcAft>
-                <a:spcPts val="0"/>
-              </a:spcAft>
-              <a:buClrTx/>
-              <a:buSzTx/>
-              <a:buFontTx/>
-              <a:buNone/>
-              <a:tabLst/>
-              <a:defRPr/>
-            </a:pPr>
-            <a:r>
-              <a:rPr lang="en-US" dirty="0"/>
-              <a:t>A </a:t>
-            </a:r>
-            <a:r>
-              <a:rPr lang="en-US" dirty="0" err="1"/>
-              <a:t>dokumentációból</a:t>
-            </a:r>
-            <a:r>
-              <a:rPr lang="hu-HU" dirty="0"/>
-              <a:t> </a:t>
-            </a:r>
-            <a:r>
-              <a:rPr lang="en-US" dirty="0"/>
-              <a:t>frontend </a:t>
-            </a:r>
-            <a:r>
-              <a:rPr lang="en-US" dirty="0" err="1"/>
-              <a:t>kliens</a:t>
-            </a:r>
-            <a:r>
-              <a:rPr lang="en-US" dirty="0"/>
-              <a:t> </a:t>
-            </a:r>
-            <a:r>
-              <a:rPr lang="en-US" dirty="0" err="1"/>
-              <a:t>generálható</a:t>
-            </a:r>
-            <a:r>
-              <a:rPr lang="hu-HU" dirty="0"/>
-              <a:t>, vagy </a:t>
-            </a:r>
-            <a:r>
-              <a:rPr lang="en-US" dirty="0"/>
-              <a:t>SDK </a:t>
-            </a:r>
-            <a:r>
-              <a:rPr lang="en-US" dirty="0" err="1"/>
-              <a:t>készíthető</a:t>
-            </a:r>
-            <a:r>
-              <a:rPr lang="hu-HU" dirty="0"/>
-              <a:t> (</a:t>
-            </a:r>
-            <a:r>
-              <a:rPr lang="en-US" dirty="0"/>
-              <a:t>Ez </a:t>
-            </a:r>
-            <a:r>
-              <a:rPr lang="en-US" dirty="0" err="1"/>
-              <a:t>az</a:t>
-            </a:r>
-            <a:r>
-              <a:rPr lang="en-US" dirty="0"/>
-              <a:t> </a:t>
-            </a:r>
-            <a:r>
-              <a:rPr lang="en-US" dirty="0" err="1"/>
-              <a:t>egyik</a:t>
-            </a:r>
-            <a:r>
-              <a:rPr lang="en-US" dirty="0"/>
-              <a:t> </a:t>
-            </a:r>
-            <a:r>
-              <a:rPr lang="en-US" b="0" dirty="0" err="1"/>
-              <a:t>legnagyobb</a:t>
-            </a:r>
-            <a:r>
-              <a:rPr lang="en-US" b="0" dirty="0"/>
-              <a:t> </a:t>
-            </a:r>
-            <a:r>
-              <a:rPr lang="en-US" b="0" dirty="0" err="1"/>
-              <a:t>gyakorlati</a:t>
-            </a:r>
-            <a:r>
-              <a:rPr lang="en-US" b="0" dirty="0"/>
-              <a:t> </a:t>
-            </a:r>
-            <a:r>
-              <a:rPr lang="en-US" b="0" dirty="0" err="1"/>
-              <a:t>előny</a:t>
-            </a:r>
-            <a:r>
-              <a:rPr lang="en-US" b="0" dirty="0"/>
-              <a:t>.</a:t>
-            </a:r>
-            <a:r>
-              <a:rPr lang="hu-HU" dirty="0"/>
-              <a:t>)</a:t>
-            </a:r>
-            <a:endParaRPr lang="en-US" dirty="0"/>
-          </a:p>
-          <a:p>
-            <a:endParaRPr lang="hu-HU" dirty="0"/>
-          </a:p>
-          <a:p>
-            <a:r>
-              <a:rPr lang="en-US" dirty="0"/>
-              <a:t>A </a:t>
-            </a:r>
-            <a:r>
-              <a:rPr lang="en-US" dirty="0" err="1"/>
-              <a:t>kérdés</a:t>
-            </a:r>
-            <a:r>
-              <a:rPr lang="en-US" dirty="0"/>
-              <a:t> </a:t>
-            </a:r>
-            <a:r>
-              <a:rPr lang="en-US" dirty="0" err="1"/>
-              <a:t>innentől</a:t>
-            </a:r>
-            <a:r>
-              <a:rPr lang="en-US" dirty="0"/>
-              <a:t> </a:t>
-            </a:r>
-            <a:r>
-              <a:rPr lang="en-US" dirty="0" err="1"/>
-              <a:t>nem</a:t>
-            </a:r>
-            <a:r>
-              <a:rPr lang="en-US" dirty="0"/>
-              <a:t> </a:t>
-            </a:r>
-            <a:r>
-              <a:rPr lang="en-US" dirty="0" err="1"/>
-              <a:t>az</a:t>
-            </a:r>
-            <a:r>
-              <a:rPr lang="en-US" dirty="0"/>
-              <a:t>, </a:t>
-            </a:r>
-            <a:r>
-              <a:rPr lang="en-US" dirty="0" err="1"/>
-              <a:t>hogy</a:t>
-            </a:r>
-            <a:r>
-              <a:rPr lang="hu-HU" dirty="0"/>
-              <a:t> </a:t>
-            </a:r>
-            <a:r>
-              <a:rPr lang="en-US" b="0" dirty="0" err="1"/>
-              <a:t>kell</a:t>
-            </a:r>
-            <a:r>
-              <a:rPr lang="en-US" b="0" dirty="0"/>
-              <a:t>-e </a:t>
-            </a:r>
-            <a:r>
-              <a:rPr lang="en-US" b="0" dirty="0" err="1"/>
-              <a:t>dokumentáció</a:t>
-            </a:r>
-            <a:r>
-              <a:rPr lang="en-US" b="0" dirty="0"/>
-              <a:t>,</a:t>
-            </a:r>
-            <a:r>
-              <a:rPr lang="hu-HU" b="0" dirty="0"/>
-              <a:t> </a:t>
-            </a:r>
-            <a:r>
-              <a:rPr lang="en-US" b="0" dirty="0" err="1"/>
-              <a:t>hanem</a:t>
-            </a:r>
-            <a:r>
-              <a:rPr lang="en-US" b="0" dirty="0"/>
-              <a:t> </a:t>
-            </a:r>
-            <a:r>
-              <a:rPr lang="en-US" b="0" dirty="0" err="1"/>
-              <a:t>az</a:t>
-            </a:r>
-            <a:r>
-              <a:rPr lang="en-US" b="0" dirty="0"/>
-              <a:t>, </a:t>
-            </a:r>
-            <a:r>
-              <a:rPr lang="en-US" b="0" dirty="0" err="1"/>
-              <a:t>hogy</a:t>
-            </a:r>
-            <a:r>
-              <a:rPr lang="en-US" b="0" dirty="0"/>
-              <a:t> </a:t>
-            </a:r>
-            <a:r>
-              <a:rPr lang="en-US" b="1" dirty="0" err="1"/>
-              <a:t>hogyan</a:t>
-            </a:r>
-            <a:r>
-              <a:rPr lang="en-US" b="1" dirty="0"/>
-              <a:t> </a:t>
-            </a:r>
-            <a:r>
-              <a:rPr lang="en-US" b="1" dirty="0" err="1"/>
-              <a:t>készítjük</a:t>
-            </a:r>
-            <a:r>
-              <a:rPr lang="en-US" b="1" dirty="0"/>
-              <a:t> </a:t>
-            </a:r>
-            <a:r>
-              <a:rPr lang="en-US" b="1" dirty="0" err="1"/>
-              <a:t>el</a:t>
-            </a:r>
-            <a:r>
-              <a:rPr lang="en-US" b="1" dirty="0"/>
-              <a:t> </a:t>
-            </a:r>
-            <a:r>
-              <a:rPr lang="en-US" b="1" dirty="0" err="1"/>
-              <a:t>jól</a:t>
-            </a:r>
-            <a:r>
-              <a:rPr lang="en-US" b="0" dirty="0"/>
-              <a:t>.</a:t>
-            </a:r>
-            <a:endParaRPr lang="hu-HU" b="0" dirty="0"/>
-          </a:p>
-          <a:p>
-            <a:endParaRPr lang="hu-HU" b="0" dirty="0"/>
           </a:p>
         </p:txBody>
       </p:sp>
@@ -9059,7 +8919,7 @@
           <a:p>
             <a:fld id="{82D23EBC-67FA-4278-B97C-82D0A52FD2DA}" type="slidenum">
               <a:rPr lang="en-US" smtClean="0"/>
-              <a:t>12</a:t>
+              <a:t>13</a:t>
             </a:fld>
             <a:endParaRPr lang="en-US"/>
           </a:p>
@@ -9068,7 +8928,7 @@
     </p:spTree>
     <p:extLst>
       <p:ext uri="{BB962C8B-B14F-4D97-AF65-F5344CB8AC3E}">
-        <p14:creationId xmlns:p14="http://schemas.microsoft.com/office/powerpoint/2010/main" val="407882782"/>
+        <p14:creationId xmlns:p14="http://schemas.microsoft.com/office/powerpoint/2010/main" val="3969346656"/>
       </p:ext>
     </p:extLst>
   </p:cSld>
@@ -9123,114 +8983,400 @@
           <a:lstStyle/>
           <a:p>
             <a:r>
+              <a:rPr lang="en-US" dirty="0"/>
+              <a:t>Egy REST API </a:t>
+            </a:r>
+            <a:r>
+              <a:rPr lang="en-US" b="0" dirty="0" err="1"/>
+              <a:t>ritkán</a:t>
+            </a:r>
+            <a:r>
+              <a:rPr lang="en-US" b="0" dirty="0"/>
+              <a:t> </a:t>
+            </a:r>
+            <a:r>
+              <a:rPr lang="hu-HU" b="0" dirty="0"/>
+              <a:t>készül csak </a:t>
+            </a:r>
+            <a:r>
+              <a:rPr lang="en-US" b="0" dirty="0" err="1"/>
+              <a:t>egy</a:t>
+            </a:r>
+            <a:r>
+              <a:rPr lang="en-US" b="0" dirty="0"/>
+              <a:t> </a:t>
+            </a:r>
+            <a:r>
+              <a:rPr lang="en-US" b="0" dirty="0" err="1"/>
+              <a:t>embernek</a:t>
+            </a:r>
+            <a:r>
+              <a:rPr lang="en-US" dirty="0"/>
+              <a:t>.</a:t>
+            </a:r>
+            <a:r>
               <a:rPr lang="hu-HU" dirty="0"/>
-              <a:t>A dokumentációt h</a:t>
-            </a:r>
-            <a:r>
-              <a:rPr lang="en-US" dirty="0" err="1"/>
-              <a:t>ogyan</a:t>
-            </a:r>
-            <a:r>
-              <a:rPr lang="en-US" dirty="0"/>
-              <a:t> </a:t>
-            </a:r>
-            <a:r>
-              <a:rPr lang="en-US" dirty="0" err="1"/>
-              <a:t>csináljuk</a:t>
-            </a:r>
-            <a:r>
-              <a:rPr lang="en-US" dirty="0"/>
-              <a:t> </a:t>
-            </a:r>
-            <a:r>
-              <a:rPr lang="en-US" dirty="0" err="1"/>
-              <a:t>jól</a:t>
-            </a:r>
-            <a:r>
-              <a:rPr lang="en-US" dirty="0"/>
-              <a:t>, modern </a:t>
-            </a:r>
-            <a:r>
-              <a:rPr lang="en-US" dirty="0" err="1"/>
-              <a:t>módon</a:t>
-            </a:r>
-            <a:r>
-              <a:rPr lang="en-US" dirty="0"/>
-              <a:t>?</a:t>
+              <a:t> </a:t>
+            </a:r>
+            <a:r>
+              <a:rPr lang="en-US" dirty="0" err="1"/>
+              <a:t>Általában</a:t>
+            </a:r>
+            <a:r>
+              <a:rPr lang="en-US" dirty="0"/>
+              <a:t> </a:t>
+            </a:r>
+            <a:r>
+              <a:rPr lang="hu-HU" b="0" dirty="0"/>
+              <a:t>egy vagy több</a:t>
+            </a:r>
+            <a:r>
+              <a:rPr lang="en-US" b="0" dirty="0"/>
+              <a:t> </a:t>
+            </a:r>
+            <a:r>
+              <a:rPr lang="en-US" b="0" dirty="0" err="1"/>
+              <a:t>csapat</a:t>
+            </a:r>
+            <a:r>
+              <a:rPr lang="en-US" b="0" dirty="0"/>
+              <a:t> </a:t>
+            </a:r>
+            <a:r>
+              <a:rPr lang="en-US" b="0" dirty="0" err="1"/>
+              <a:t>dolgozik</a:t>
+            </a:r>
+            <a:r>
+              <a:rPr lang="en-US" b="0" dirty="0"/>
+              <a:t> </a:t>
+            </a:r>
+            <a:r>
+              <a:rPr lang="en-US" b="0" dirty="0" err="1"/>
+              <a:t>vele</a:t>
+            </a:r>
+            <a:r>
+              <a:rPr lang="en-US" b="0" dirty="0"/>
+              <a:t> </a:t>
+            </a:r>
+            <a:r>
+              <a:rPr lang="en-US" b="0" dirty="0" err="1"/>
+              <a:t>párhuzamosan</a:t>
+            </a:r>
+            <a:r>
+              <a:rPr lang="en-US" dirty="0"/>
+              <a:t>.</a:t>
             </a:r>
             <a:r>
               <a:rPr lang="hu-HU" dirty="0"/>
-              <a:t> A válasz: </a:t>
-            </a:r>
-            <a:r>
-              <a:rPr lang="en-US" dirty="0" err="1"/>
-              <a:t>OpenAPI</a:t>
-            </a:r>
-            <a:r>
-              <a:rPr lang="en-US" dirty="0"/>
-              <a:t> + Swagger</a:t>
+              <a:t> </a:t>
+            </a:r>
+            <a:r>
+              <a:rPr lang="en-US" dirty="0"/>
+              <a:t>Ha </a:t>
+            </a:r>
+            <a:r>
+              <a:rPr lang="en-US" dirty="0" err="1"/>
+              <a:t>nincs</a:t>
+            </a:r>
+            <a:r>
+              <a:rPr lang="en-US" dirty="0"/>
+              <a:t> </a:t>
+            </a:r>
+            <a:r>
+              <a:rPr lang="en-US" dirty="0" err="1"/>
+              <a:t>dokumentáció</a:t>
+            </a:r>
+            <a:r>
+              <a:rPr lang="en-US" dirty="0"/>
+              <a:t>, </a:t>
+            </a:r>
+            <a:r>
+              <a:rPr lang="en-US" dirty="0" err="1"/>
+              <a:t>akkor</a:t>
+            </a:r>
+            <a:r>
+              <a:rPr lang="hu-HU" dirty="0"/>
+              <a:t> </a:t>
+            </a:r>
+            <a:r>
+              <a:rPr lang="en-US" dirty="0" err="1"/>
+              <a:t>mindenki</a:t>
+            </a:r>
+            <a:r>
+              <a:rPr lang="en-US" dirty="0"/>
+              <a:t> </a:t>
+            </a:r>
+            <a:r>
+              <a:rPr lang="en-US" dirty="0" err="1"/>
+              <a:t>mást</a:t>
+            </a:r>
+            <a:r>
+              <a:rPr lang="en-US" dirty="0"/>
+              <a:t> </a:t>
+            </a:r>
+            <a:r>
+              <a:rPr lang="en-US" dirty="0" err="1"/>
+              <a:t>gondol</a:t>
+            </a:r>
+            <a:r>
+              <a:rPr lang="en-US" dirty="0"/>
+              <a:t> </a:t>
+            </a:r>
+            <a:r>
+              <a:rPr lang="en-US" dirty="0" err="1"/>
+              <a:t>az</a:t>
+            </a:r>
+            <a:r>
+              <a:rPr lang="en-US" dirty="0"/>
+              <a:t> API-</a:t>
+            </a:r>
+            <a:r>
+              <a:rPr lang="en-US" dirty="0" err="1"/>
+              <a:t>ról</a:t>
+            </a:r>
+            <a:r>
+              <a:rPr lang="hu-HU" dirty="0"/>
+              <a:t>, </a:t>
+            </a:r>
+            <a:r>
+              <a:rPr lang="en-US" dirty="0"/>
+              <a:t>és </a:t>
+            </a:r>
+            <a:r>
+              <a:rPr lang="en-US" dirty="0" err="1"/>
+              <a:t>ebből</a:t>
+            </a:r>
+            <a:r>
+              <a:rPr lang="en-US" dirty="0"/>
+              <a:t> </a:t>
+            </a:r>
+            <a:r>
+              <a:rPr lang="en-US" dirty="0" err="1"/>
+              <a:t>lesznek</a:t>
+            </a:r>
+            <a:r>
+              <a:rPr lang="en-US" dirty="0"/>
+              <a:t> a </a:t>
+            </a:r>
+            <a:r>
+              <a:rPr lang="en-US" dirty="0" err="1"/>
+              <a:t>problémák</a:t>
             </a:r>
             <a:r>
               <a:rPr lang="hu-HU" dirty="0"/>
               <a:t>.</a:t>
             </a:r>
-            <a:endParaRPr lang="hu-HU" b="0" dirty="0"/>
-          </a:p>
-          <a:p>
-            <a:r>
-              <a:rPr lang="hu-HU" b="0" dirty="0"/>
-              <a:t>Fontos! A</a:t>
-            </a:r>
-            <a:r>
-              <a:rPr lang="pt-BR" b="0" dirty="0"/>
-              <a:t> dokumentáció nem papír, hanem élő rendszer.</a:t>
-            </a:r>
-            <a:endParaRPr lang="hu-HU" b="0" dirty="0"/>
-          </a:p>
-          <a:p>
-            <a:r>
-              <a:rPr lang="en-US" dirty="0" err="1"/>
-              <a:t>OpenAPI</a:t>
-            </a:r>
-            <a:r>
-              <a:rPr lang="en-US" dirty="0"/>
-              <a:t> = </a:t>
-            </a:r>
-            <a:r>
-              <a:rPr lang="en-US" dirty="0" err="1"/>
-              <a:t>leíró</a:t>
-            </a:r>
-            <a:r>
-              <a:rPr lang="en-US" dirty="0"/>
-              <a:t> </a:t>
-            </a:r>
-            <a:r>
-              <a:rPr lang="en-US" dirty="0" err="1"/>
-              <a:t>nyelv</a:t>
-            </a:r>
-            <a:r>
-              <a:rPr lang="en-US" dirty="0"/>
-              <a:t> </a:t>
+          </a:p>
+          <a:p>
+            <a:r>
+              <a:rPr lang="en-US" dirty="0"/>
+              <a:t>Az API </a:t>
+            </a:r>
+            <a:r>
+              <a:rPr lang="en-US" dirty="0" err="1"/>
+              <a:t>egy</a:t>
+            </a:r>
+            <a:r>
+              <a:rPr lang="en-US" dirty="0"/>
+              <a:t> </a:t>
+            </a:r>
+            <a:r>
+              <a:rPr lang="en-US" dirty="0" err="1"/>
+              <a:t>szerződés</a:t>
             </a:r>
             <a:r>
               <a:rPr lang="hu-HU" dirty="0"/>
-              <a:t>(</a:t>
-            </a:r>
-            <a:r>
-              <a:rPr lang="en-US" dirty="0" err="1"/>
-              <a:t>specifikáció</a:t>
+              <a:t>, és a</a:t>
+            </a:r>
+            <a:r>
+              <a:rPr lang="en-US" dirty="0"/>
+              <a:t> </a:t>
+            </a:r>
+            <a:r>
+              <a:rPr lang="en-US" dirty="0" err="1"/>
+              <a:t>dokumentáció</a:t>
+            </a:r>
+            <a:r>
+              <a:rPr lang="en-US" dirty="0"/>
+              <a:t> </a:t>
+            </a:r>
+            <a:r>
+              <a:rPr lang="en-US" dirty="0" err="1"/>
+              <a:t>ennek</a:t>
+            </a:r>
+            <a:r>
+              <a:rPr lang="en-US" dirty="0"/>
+              <a:t> </a:t>
+            </a:r>
+            <a:r>
+              <a:rPr lang="en-US" b="1" dirty="0" err="1"/>
+              <a:t>írásos</a:t>
+            </a:r>
+            <a:r>
+              <a:rPr lang="en-US" b="1" dirty="0"/>
+              <a:t> </a:t>
+            </a:r>
+            <a:r>
+              <a:rPr lang="en-US" b="1" dirty="0" err="1"/>
+              <a:t>formája</a:t>
+            </a:r>
+            <a:r>
+              <a:rPr lang="en-US" dirty="0"/>
+              <a:t>.</a:t>
             </a:r>
             <a:r>
               <a:rPr lang="hu-HU" dirty="0"/>
-              <a:t>). </a:t>
+              <a:t> A dokumentáció megkönnyíti a verziók követhetőségét is.</a:t>
+            </a:r>
+          </a:p>
+          <a:p>
+            <a:r>
+              <a:rPr lang="en-US" dirty="0"/>
+              <a:t>A </a:t>
+            </a:r>
+            <a:r>
+              <a:rPr lang="en-US" dirty="0" err="1"/>
+              <a:t>dokumentáció</a:t>
+            </a:r>
+            <a:r>
+              <a:rPr lang="en-US" dirty="0"/>
+              <a:t> </a:t>
+            </a:r>
+            <a:r>
+              <a:rPr lang="en-US" dirty="0" err="1"/>
+              <a:t>alapján</a:t>
+            </a:r>
+            <a:r>
+              <a:rPr lang="hu-HU" dirty="0"/>
+              <a:t> </a:t>
+            </a:r>
+            <a:r>
+              <a:rPr lang="en-US" dirty="0" err="1"/>
+              <a:t>automatikusan</a:t>
+            </a:r>
+            <a:r>
+              <a:rPr lang="en-US" dirty="0"/>
+              <a:t> </a:t>
+            </a:r>
+            <a:r>
+              <a:rPr lang="en-US" dirty="0" err="1"/>
+              <a:t>generálhatók</a:t>
+            </a:r>
+            <a:r>
+              <a:rPr lang="hu-HU" dirty="0"/>
+              <a:t> </a:t>
+            </a:r>
+            <a:r>
+              <a:rPr lang="en-US" dirty="0" err="1"/>
+              <a:t>tesztek</a:t>
+            </a:r>
+            <a:r>
+              <a:rPr lang="hu-HU" dirty="0"/>
+              <a:t> és </a:t>
+            </a:r>
+            <a:r>
+              <a:rPr lang="en-US" dirty="0" err="1"/>
+              <a:t>validációk</a:t>
+            </a:r>
+            <a:r>
+              <a:rPr lang="hu-HU" dirty="0"/>
+              <a:t>.</a:t>
+            </a:r>
+            <a:endParaRPr lang="en-US" dirty="0"/>
+          </a:p>
+          <a:p>
+            <a:pPr marL="0" marR="0" lvl="0" indent="0" algn="l" defTabSz="914400" rtl="0" eaLnBrk="1" fontAlgn="auto" latinLnBrk="0" hangingPunct="1">
+              <a:lnSpc>
+                <a:spcPct val="100000"/>
+              </a:lnSpc>
+              <a:spcBef>
+                <a:spcPts val="0"/>
+              </a:spcBef>
+              <a:spcAft>
+                <a:spcPts val="0"/>
+              </a:spcAft>
+              <a:buClrTx/>
+              <a:buSzTx/>
+              <a:buFontTx/>
+              <a:buNone/>
+              <a:tabLst/>
+              <a:defRPr/>
+            </a:pPr>
+            <a:r>
+              <a:rPr lang="en-US" dirty="0"/>
+              <a:t>A </a:t>
+            </a:r>
+            <a:r>
+              <a:rPr lang="en-US" dirty="0" err="1"/>
+              <a:t>dokumentációból</a:t>
+            </a:r>
+            <a:r>
+              <a:rPr lang="hu-HU" dirty="0"/>
+              <a:t> </a:t>
+            </a:r>
+            <a:r>
+              <a:rPr lang="en-US" dirty="0"/>
+              <a:t>frontend </a:t>
+            </a:r>
+            <a:r>
+              <a:rPr lang="en-US" dirty="0" err="1"/>
+              <a:t>kliens</a:t>
+            </a:r>
+            <a:r>
+              <a:rPr lang="en-US" dirty="0"/>
+              <a:t> </a:t>
+            </a:r>
+            <a:r>
+              <a:rPr lang="en-US" dirty="0" err="1"/>
+              <a:t>generálható</a:t>
+            </a:r>
+            <a:r>
+              <a:rPr lang="hu-HU" dirty="0"/>
+              <a:t>, vagy </a:t>
+            </a:r>
+            <a:r>
+              <a:rPr lang="en-US" dirty="0"/>
+              <a:t>SDK </a:t>
+            </a:r>
+            <a:r>
+              <a:rPr lang="en-US" dirty="0" err="1"/>
+              <a:t>készíthető</a:t>
+            </a:r>
+            <a:r>
+              <a:rPr lang="hu-HU" dirty="0"/>
+              <a:t> (</a:t>
+            </a:r>
+            <a:r>
+              <a:rPr lang="en-US" dirty="0"/>
+              <a:t>Ez </a:t>
+            </a:r>
+            <a:r>
+              <a:rPr lang="en-US" dirty="0" err="1"/>
+              <a:t>az</a:t>
+            </a:r>
+            <a:r>
+              <a:rPr lang="en-US" dirty="0"/>
+              <a:t> </a:t>
+            </a:r>
+            <a:r>
+              <a:rPr lang="en-US" dirty="0" err="1"/>
+              <a:t>egyik</a:t>
+            </a:r>
+            <a:r>
+              <a:rPr lang="en-US" dirty="0"/>
+              <a:t> </a:t>
+            </a:r>
+            <a:r>
+              <a:rPr lang="en-US" b="0" dirty="0" err="1"/>
+              <a:t>legnagyobb</a:t>
             </a:r>
             <a:r>
               <a:rPr lang="en-US" b="0" dirty="0"/>
-              <a:t>Az </a:t>
+              <a:t> </a:t>
             </a:r>
             <a:r>
               <a:rPr lang="en-US" b="0" dirty="0" err="1"/>
-              <a:t>OpenAPI</a:t>
+              <a:t>gyakorlati</a:t>
             </a:r>
             <a:r>
               <a:rPr lang="en-US" b="0" dirty="0"/>
@@ -9238,19 +9384,81 @@
             </a:r>
             <a:r>
               <a:rPr lang="en-US" b="0" dirty="0" err="1"/>
+              <a:t>előny</a:t>
+            </a:r>
+            <a:r>
+              <a:rPr lang="en-US" b="0" dirty="0"/>
+              <a:t>.</a:t>
+            </a:r>
+            <a:r>
+              <a:rPr lang="hu-HU" dirty="0"/>
+              <a:t>)</a:t>
+            </a:r>
+            <a:endParaRPr lang="en-US" dirty="0"/>
+          </a:p>
+          <a:p>
+            <a:endParaRPr lang="hu-HU" dirty="0"/>
+          </a:p>
+          <a:p>
+            <a:r>
+              <a:rPr lang="en-US" dirty="0"/>
+              <a:t>A </a:t>
+            </a:r>
+            <a:r>
+              <a:rPr lang="en-US" dirty="0" err="1"/>
+              <a:t>kérdés</a:t>
+            </a:r>
+            <a:r>
+              <a:rPr lang="en-US" dirty="0"/>
+              <a:t> </a:t>
+            </a:r>
+            <a:r>
+              <a:rPr lang="en-US" dirty="0" err="1"/>
+              <a:t>innentől</a:t>
+            </a:r>
+            <a:r>
+              <a:rPr lang="en-US" dirty="0"/>
+              <a:t> </a:t>
+            </a:r>
+            <a:r>
+              <a:rPr lang="en-US" dirty="0" err="1"/>
               <a:t>nem</a:t>
             </a:r>
             <a:r>
+              <a:rPr lang="en-US" dirty="0"/>
+              <a:t> </a:t>
+            </a:r>
+            <a:r>
+              <a:rPr lang="en-US" dirty="0" err="1"/>
+              <a:t>az</a:t>
+            </a:r>
+            <a:r>
+              <a:rPr lang="en-US" dirty="0"/>
+              <a:t>, </a:t>
+            </a:r>
+            <a:r>
+              <a:rPr lang="en-US" dirty="0" err="1"/>
+              <a:t>hogy</a:t>
+            </a:r>
+            <a:r>
+              <a:rPr lang="hu-HU" dirty="0"/>
+              <a:t> </a:t>
+            </a:r>
+            <a:r>
+              <a:rPr lang="en-US" b="0" dirty="0" err="1"/>
+              <a:t>kell</a:t>
+            </a:r>
+            <a:r>
               <a:rPr lang="en-US" b="0" dirty="0"/>
-              <a:t> </a:t>
+              <a:t>-e </a:t>
             </a:r>
             <a:r>
               <a:rPr lang="en-US" b="0" dirty="0" err="1"/>
-              <a:t>egy</a:t>
+              <a:t>dokumentáció</a:t>
             </a:r>
             <a:r>
               <a:rPr lang="en-US" b="0" dirty="0"/>
-              <a:t> program,</a:t>
+              <a:t>,</a:t>
             </a:r>
             <a:r>
               <a:rPr lang="hu-HU" b="0" dirty="0"/>
@@ -9266,303 +9474,56 @@
             </a:r>
             <a:r>
               <a:rPr lang="en-US" b="0" dirty="0" err="1"/>
-              <a:t>egy</a:t>
+              <a:t>az</a:t>
             </a:r>
             <a:r>
               <a:rPr lang="en-US" b="0" dirty="0"/>
-              <a:t> </a:t>
+              <a:t>, </a:t>
             </a:r>
             <a:r>
               <a:rPr lang="en-US" b="0" dirty="0" err="1"/>
-              <a:t>szabványos</a:t>
+              <a:t>hogy</a:t>
             </a:r>
             <a:r>
               <a:rPr lang="en-US" b="0" dirty="0"/>
               <a:t> </a:t>
             </a:r>
             <a:r>
-              <a:rPr lang="en-US" b="0" dirty="0" err="1"/>
-              <a:t>leíró</a:t>
-            </a:r>
-            <a:r>
-              <a:rPr lang="en-US" b="0" dirty="0"/>
-              <a:t> </a:t>
-            </a:r>
-            <a:r>
-              <a:rPr lang="en-US" b="0" dirty="0" err="1"/>
-              <a:t>nyelv</a:t>
+              <a:rPr lang="en-US" b="1" dirty="0" err="1"/>
+              <a:t>hogyan</a:t>
+            </a:r>
+            <a:r>
+              <a:rPr lang="en-US" b="1" dirty="0"/>
+              <a:t> </a:t>
+            </a:r>
+            <a:r>
+              <a:rPr lang="en-US" b="1" dirty="0" err="1"/>
+              <a:t>készítjük</a:t>
+            </a:r>
+            <a:r>
+              <a:rPr lang="en-US" b="1" dirty="0"/>
+              <a:t> </a:t>
+            </a:r>
+            <a:r>
+              <a:rPr lang="en-US" b="1" dirty="0" err="1"/>
+              <a:t>el</a:t>
+            </a:r>
+            <a:r>
+              <a:rPr lang="en-US" b="1" dirty="0"/>
+              <a:t> </a:t>
+            </a:r>
+            <a:r>
+              <a:rPr lang="en-US" b="1" dirty="0" err="1"/>
+              <a:t>jól</a:t>
             </a:r>
             <a:r>
               <a:rPr lang="en-US" b="0" dirty="0"/>
               <a:t>.</a:t>
             </a:r>
-            <a:r>
-              <a:rPr lang="hu-HU" b="0" dirty="0"/>
-              <a:t> Leírja, milyen végpontok vannak, milyen HTTP metódussal, milyen kérés/válasz adatstruktúrával, milyen verzióval, stb.</a:t>
-            </a:r>
-          </a:p>
-          <a:p>
-            <a:r>
-              <a:rPr lang="en-US" dirty="0"/>
-              <a:t>Swagger UI = </a:t>
-            </a:r>
-            <a:r>
-              <a:rPr lang="en-US" dirty="0" err="1"/>
-              <a:t>megjelenítés</a:t>
-            </a:r>
-            <a:r>
-              <a:rPr lang="hu-HU" dirty="0"/>
-              <a:t>. </a:t>
-            </a:r>
-            <a:r>
-              <a:rPr lang="en-US" b="0" dirty="0"/>
-              <a:t>Swagger UI </a:t>
-            </a:r>
-            <a:r>
-              <a:rPr lang="en-US" b="0" dirty="0" err="1"/>
-              <a:t>azt</a:t>
-            </a:r>
-            <a:r>
-              <a:rPr lang="en-US" b="0" dirty="0"/>
-              <a:t> </a:t>
-            </a:r>
-            <a:r>
-              <a:rPr lang="en-US" b="0" dirty="0" err="1"/>
-              <a:t>csinálja</a:t>
-            </a:r>
-            <a:r>
-              <a:rPr lang="en-US" b="0" dirty="0"/>
-              <a:t>, </a:t>
-            </a:r>
-            <a:r>
-              <a:rPr lang="en-US" b="0" dirty="0" err="1"/>
-              <a:t>hogy</a:t>
-            </a:r>
-            <a:r>
-              <a:rPr lang="en-US" b="0" dirty="0"/>
-              <a:t>:</a:t>
-            </a:r>
-            <a:r>
-              <a:rPr lang="hu-HU" b="0" dirty="0"/>
-              <a:t> </a:t>
-            </a:r>
-            <a:r>
-              <a:rPr lang="en-US" b="0" dirty="0" err="1"/>
-              <a:t>az</a:t>
-            </a:r>
-            <a:r>
-              <a:rPr lang="en-US" b="0" dirty="0"/>
-              <a:t> </a:t>
-            </a:r>
-            <a:r>
-              <a:rPr lang="en-US" b="0" dirty="0" err="1"/>
-              <a:t>OpenAPI</a:t>
-            </a:r>
-            <a:r>
-              <a:rPr lang="en-US" b="0" dirty="0"/>
-              <a:t> </a:t>
-            </a:r>
-            <a:r>
-              <a:rPr lang="en-US" b="0" dirty="0" err="1"/>
-              <a:t>leírást</a:t>
-            </a:r>
-            <a:r>
-              <a:rPr lang="hu-HU" b="0" dirty="0"/>
-              <a:t> </a:t>
-            </a:r>
-            <a:r>
-              <a:rPr lang="en-US" b="0" dirty="0" err="1"/>
-              <a:t>szép</a:t>
-            </a:r>
-            <a:r>
-              <a:rPr lang="en-US" b="0" dirty="0"/>
-              <a:t>, </a:t>
-            </a:r>
-            <a:r>
-              <a:rPr lang="en-US" b="0" dirty="0" err="1"/>
-              <a:t>érthető</a:t>
-            </a:r>
-            <a:r>
-              <a:rPr lang="en-US" b="0" dirty="0"/>
-              <a:t> </a:t>
-            </a:r>
-            <a:r>
-              <a:rPr lang="en-US" b="0" dirty="0" err="1"/>
-              <a:t>webes</a:t>
-            </a:r>
-            <a:r>
-              <a:rPr lang="en-US" b="0" dirty="0"/>
-              <a:t> </a:t>
-            </a:r>
-            <a:r>
-              <a:rPr lang="en-US" b="0" dirty="0" err="1"/>
-              <a:t>felületen</a:t>
-            </a:r>
-            <a:r>
-              <a:rPr lang="en-US" b="0" dirty="0"/>
-              <a:t> </a:t>
-            </a:r>
-            <a:r>
-              <a:rPr lang="en-US" b="0" dirty="0" err="1"/>
-              <a:t>megjeleníti</a:t>
-            </a:r>
-            <a:r>
-              <a:rPr lang="hu-HU" b="0" dirty="0"/>
-              <a:t>. Ez egy interaktív felület. Az API nem csak megtekinthető, hanem ki is lehet próbálni.</a:t>
-            </a:r>
-            <a:endParaRPr lang="en-US" b="0" dirty="0"/>
-          </a:p>
-          <a:p>
-            <a:r>
-              <a:rPr lang="en-US" dirty="0" err="1"/>
-              <a:t>Tehát</a:t>
-            </a:r>
-            <a:r>
-              <a:rPr lang="en-US" dirty="0"/>
-              <a:t>:</a:t>
-            </a:r>
-          </a:p>
-          <a:p>
-            <a:r>
-              <a:rPr lang="en-US" b="1" dirty="0" err="1"/>
-              <a:t>OpenAPI</a:t>
-            </a:r>
-            <a:r>
-              <a:rPr lang="en-US" dirty="0"/>
-              <a:t> → </a:t>
-            </a:r>
-            <a:r>
-              <a:rPr lang="en-US" dirty="0" err="1"/>
-              <a:t>mit</a:t>
-            </a:r>
-            <a:r>
-              <a:rPr lang="en-US" dirty="0"/>
-              <a:t> </a:t>
-            </a:r>
-            <a:r>
-              <a:rPr lang="en-US" dirty="0" err="1"/>
-              <a:t>tud</a:t>
-            </a:r>
-            <a:r>
-              <a:rPr lang="en-US" dirty="0"/>
-              <a:t> </a:t>
-            </a:r>
-            <a:r>
-              <a:rPr lang="en-US" dirty="0" err="1"/>
-              <a:t>az</a:t>
-            </a:r>
-            <a:r>
-              <a:rPr lang="en-US" dirty="0"/>
-              <a:t> API</a:t>
-            </a:r>
-          </a:p>
-          <a:p>
-            <a:r>
-              <a:rPr lang="en-US" b="1" dirty="0"/>
-              <a:t>Swagger UI</a:t>
-            </a:r>
-            <a:r>
-              <a:rPr lang="en-US" dirty="0"/>
-              <a:t> → </a:t>
-            </a:r>
-            <a:r>
-              <a:rPr lang="en-US" dirty="0" err="1"/>
-              <a:t>hogyan</a:t>
-            </a:r>
-            <a:r>
-              <a:rPr lang="en-US" dirty="0"/>
-              <a:t> </a:t>
-            </a:r>
-            <a:r>
-              <a:rPr lang="en-US" dirty="0" err="1"/>
-              <a:t>látjuk</a:t>
-            </a:r>
-            <a:r>
-              <a:rPr lang="en-US" dirty="0"/>
-              <a:t> </a:t>
-            </a:r>
-            <a:r>
-              <a:rPr lang="en-US" dirty="0" err="1"/>
-              <a:t>ezt</a:t>
-            </a:r>
-            <a:endParaRPr lang="hu-HU" dirty="0"/>
-          </a:p>
-          <a:p>
-            <a:r>
-              <a:rPr lang="hu-HU" b="0" dirty="0"/>
-              <a:t>N</a:t>
-            </a:r>
-            <a:r>
-              <a:rPr lang="en-US" b="0" dirty="0" err="1"/>
-              <a:t>em</a:t>
-            </a:r>
-            <a:r>
-              <a:rPr lang="en-US" b="0" dirty="0"/>
-              <a:t> </a:t>
-            </a:r>
-            <a:r>
-              <a:rPr lang="en-US" b="0" dirty="0" err="1"/>
-              <a:t>csak</a:t>
-            </a:r>
-            <a:r>
-              <a:rPr lang="en-US" b="0" dirty="0"/>
-              <a:t> </a:t>
-            </a:r>
-            <a:r>
-              <a:rPr lang="en-US" b="0" dirty="0" err="1"/>
-              <a:t>leírja</a:t>
-            </a:r>
-            <a:r>
-              <a:rPr lang="en-US" b="0" dirty="0"/>
-              <a:t> </a:t>
-            </a:r>
-            <a:r>
-              <a:rPr lang="en-US" b="0" dirty="0" err="1"/>
-              <a:t>az</a:t>
-            </a:r>
-            <a:r>
-              <a:rPr lang="en-US" b="0" dirty="0"/>
-              <a:t> API-t,</a:t>
-            </a:r>
-            <a:r>
-              <a:rPr lang="hu-HU" b="0" dirty="0"/>
-              <a:t> </a:t>
-            </a:r>
-            <a:r>
-              <a:rPr lang="en-US" b="0" dirty="0" err="1"/>
-              <a:t>hanem</a:t>
-            </a:r>
-            <a:r>
-              <a:rPr lang="en-US" b="0" dirty="0"/>
-              <a:t> </a:t>
-            </a:r>
-            <a:r>
-              <a:rPr lang="en-US" b="0" dirty="0" err="1"/>
-              <a:t>aktívan</a:t>
-            </a:r>
-            <a:r>
-              <a:rPr lang="en-US" b="0" dirty="0"/>
-              <a:t> </a:t>
-            </a:r>
-            <a:r>
-              <a:rPr lang="en-US" b="0" dirty="0" err="1"/>
-              <a:t>segíti</a:t>
-            </a:r>
-            <a:r>
-              <a:rPr lang="en-US" b="0" dirty="0"/>
-              <a:t> a </a:t>
-            </a:r>
-            <a:r>
-              <a:rPr lang="en-US" b="0" dirty="0" err="1"/>
-              <a:t>fejlesztést</a:t>
-            </a:r>
-            <a:r>
-              <a:rPr lang="en-US" b="0" dirty="0"/>
-              <a:t>.</a:t>
-            </a:r>
-          </a:p>
-          <a:p>
-            <a:endParaRPr lang="en-US" b="0" dirty="0"/>
+            <a:endParaRPr lang="hu-HU" b="0" dirty="0"/>
+          </a:p>
+          <a:p>
+            <a:endParaRPr lang="hu-HU" b="0" dirty="0"/>
           </a:p>
         </p:txBody>
       </p:sp>
@@ -9583,7 +9544,7 @@
           <a:p>
             <a:fld id="{82D23EBC-67FA-4278-B97C-82D0A52FD2DA}" type="slidenum">
               <a:rPr lang="en-US" smtClean="0"/>
-              <a:t>13</a:t>
+              <a:t>14</a:t>
             </a:fld>
             <a:endParaRPr lang="en-US"/>
           </a:p>
@@ -9592,7 +9553,7 @@
     </p:spTree>
     <p:extLst>
       <p:ext uri="{BB962C8B-B14F-4D97-AF65-F5344CB8AC3E}">
-        <p14:creationId xmlns:p14="http://schemas.microsoft.com/office/powerpoint/2010/main" val="1887556368"/>
+        <p14:creationId xmlns:p14="http://schemas.microsoft.com/office/powerpoint/2010/main" val="407882782"/>
       </p:ext>
     </p:extLst>
   </p:cSld>
@@ -9648,62 +9609,429 @@
           <a:p>
             <a:r>
               <a:rPr lang="hu-HU" dirty="0"/>
-              <a:t>Sokszor félreértik, és azt gondolják, ha REST-</a:t>
-            </a:r>
-            <a:r>
-              <a:rPr lang="hu-HU" dirty="0" err="1"/>
-              <a:t>et</a:t>
+              <a:t>A dokumentációt h</a:t>
+            </a:r>
+            <a:r>
+              <a:rPr lang="en-US" dirty="0" err="1"/>
+              <a:t>ogyan</a:t>
+            </a:r>
+            <a:r>
+              <a:rPr lang="en-US" dirty="0"/>
+              <a:t> </a:t>
+            </a:r>
+            <a:r>
+              <a:rPr lang="en-US" dirty="0" err="1"/>
+              <a:t>csináljuk</a:t>
+            </a:r>
+            <a:r>
+              <a:rPr lang="en-US" dirty="0"/>
+              <a:t> </a:t>
+            </a:r>
+            <a:r>
+              <a:rPr lang="en-US" dirty="0" err="1"/>
+              <a:t>jól</a:t>
+            </a:r>
+            <a:r>
+              <a:rPr lang="en-US" dirty="0"/>
+              <a:t>, modern </a:t>
+            </a:r>
+            <a:r>
+              <a:rPr lang="en-US" dirty="0" err="1"/>
+              <a:t>módon</a:t>
+            </a:r>
+            <a:r>
+              <a:rPr lang="en-US" dirty="0"/>
+              <a:t>?</a:t>
             </a:r>
             <a:r>
               <a:rPr lang="hu-HU" dirty="0"/>
-              <a:t> használunk, akkor az MVC megszűnik. Ez nem igaz. A valóság inkább az, hogy az MVC </a:t>
-            </a:r>
-            <a:r>
-              <a:rPr lang="hu-HU" b="1" dirty="0"/>
-              <a:t>nem eltűnik, </a:t>
+              <a:t> A válasz: </a:t>
+            </a:r>
+            <a:r>
+              <a:rPr lang="en-US" dirty="0" err="1"/>
+              <a:t>OpenAPI</a:t>
+            </a:r>
+            <a:r>
+              <a:rPr lang="en-US" dirty="0"/>
+              <a:t> + Swagger</a:t>
             </a:r>
             <a:r>
               <a:rPr lang="hu-HU" dirty="0"/>
-              <a:t>hanem </a:t>
-            </a:r>
-            <a:r>
-              <a:rPr lang="hu-HU" b="1" dirty="0"/>
-              <a:t>más szerepet kap.</a:t>
+              <a:t>.</a:t>
+            </a:r>
+            <a:endParaRPr lang="hu-HU" b="0" dirty="0"/>
+          </a:p>
+          <a:p>
+            <a:r>
+              <a:rPr lang="hu-HU" b="0" dirty="0"/>
+              <a:t>Fontos! A</a:t>
+            </a:r>
+            <a:r>
+              <a:rPr lang="pt-BR" b="0" dirty="0"/>
+              <a:t> dokumentáció nem papír, hanem élő rendszer.</a:t>
+            </a:r>
+            <a:endParaRPr lang="hu-HU" b="0" dirty="0"/>
+          </a:p>
+          <a:p>
+            <a:r>
+              <a:rPr lang="en-US" dirty="0" err="1"/>
+              <a:t>OpenAPI</a:t>
+            </a:r>
+            <a:r>
+              <a:rPr lang="en-US" dirty="0"/>
+              <a:t> = </a:t>
+            </a:r>
+            <a:r>
+              <a:rPr lang="en-US" dirty="0" err="1"/>
+              <a:t>leíró</a:t>
+            </a:r>
+            <a:r>
+              <a:rPr lang="en-US" dirty="0"/>
+              <a:t> </a:t>
+            </a:r>
+            <a:r>
+              <a:rPr lang="en-US" dirty="0" err="1"/>
+              <a:t>nyelv</a:t>
+            </a:r>
+            <a:r>
+              <a:rPr lang="en-US" dirty="0"/>
+              <a:t> </a:t>
+            </a:r>
+            <a:r>
+              <a:rPr lang="hu-HU" dirty="0"/>
+              <a:t>(</a:t>
+            </a:r>
+            <a:r>
+              <a:rPr lang="en-US" dirty="0" err="1"/>
+              <a:t>specifikáció</a:t>
+            </a:r>
+            <a:r>
+              <a:rPr lang="hu-HU" dirty="0"/>
+              <a:t>). </a:t>
+            </a:r>
+            <a:r>
+              <a:rPr lang="en-US" b="0" dirty="0"/>
+              <a:t>Az </a:t>
+            </a:r>
+            <a:r>
+              <a:rPr lang="en-US" b="0" dirty="0" err="1"/>
+              <a:t>OpenAPI</a:t>
+            </a:r>
+            <a:r>
+              <a:rPr lang="en-US" b="0" dirty="0"/>
+              <a:t> </a:t>
+            </a:r>
+            <a:r>
+              <a:rPr lang="en-US" b="0" dirty="0" err="1"/>
+              <a:t>nem</a:t>
+            </a:r>
+            <a:r>
+              <a:rPr lang="en-US" b="0" dirty="0"/>
+              <a:t> </a:t>
+            </a:r>
+            <a:r>
+              <a:rPr lang="en-US" b="0" dirty="0" err="1"/>
+              <a:t>egy</a:t>
+            </a:r>
+            <a:r>
+              <a:rPr lang="en-US" b="0" dirty="0"/>
+              <a:t> program,</a:t>
+            </a:r>
+            <a:r>
+              <a:rPr lang="hu-HU" b="0" dirty="0"/>
+              <a:t> </a:t>
+            </a:r>
+            <a:r>
+              <a:rPr lang="en-US" b="0" dirty="0" err="1"/>
+              <a:t>hanem</a:t>
+            </a:r>
+            <a:r>
+              <a:rPr lang="en-US" b="0" dirty="0"/>
+              <a:t> </a:t>
+            </a:r>
+            <a:r>
+              <a:rPr lang="en-US" b="0" dirty="0" err="1"/>
+              <a:t>egy</a:t>
+            </a:r>
+            <a:r>
+              <a:rPr lang="en-US" b="0" dirty="0"/>
+              <a:t> </a:t>
+            </a:r>
+            <a:r>
+              <a:rPr lang="en-US" b="0" dirty="0" err="1"/>
+              <a:t>szabványos</a:t>
+            </a:r>
+            <a:r>
+              <a:rPr lang="en-US" b="0" dirty="0"/>
+              <a:t> </a:t>
+            </a:r>
+            <a:r>
+              <a:rPr lang="en-US" b="0" dirty="0" err="1"/>
+              <a:t>leíró</a:t>
+            </a:r>
+            <a:r>
+              <a:rPr lang="en-US" b="0" dirty="0"/>
+              <a:t> </a:t>
+            </a:r>
+            <a:r>
+              <a:rPr lang="en-US" b="0" dirty="0" err="1"/>
+              <a:t>nyelv</a:t>
+            </a:r>
+            <a:r>
+              <a:rPr lang="en-US" b="0" dirty="0"/>
+              <a:t>.</a:t>
+            </a:r>
+            <a:r>
+              <a:rPr lang="hu-HU" b="0" dirty="0"/>
+              <a:t> Leírja, milyen végpontok vannak, milyen HTTP metódussal, milyen kérés/válasz adatstruktúrával, milyen verzióval, stb.</a:t>
+            </a:r>
+          </a:p>
+          <a:p>
+            <a:r>
+              <a:rPr lang="en-US" dirty="0"/>
+              <a:t>Swagger UI = </a:t>
+            </a:r>
+            <a:r>
+              <a:rPr lang="en-US" dirty="0" err="1"/>
+              <a:t>megjelenítés</a:t>
+            </a:r>
+            <a:r>
+              <a:rPr lang="hu-HU" dirty="0"/>
+              <a:t>. </a:t>
+            </a:r>
+            <a:r>
+              <a:rPr lang="en-US" b="0" dirty="0"/>
+              <a:t>Swagger UI </a:t>
+            </a:r>
+            <a:r>
+              <a:rPr lang="en-US" b="0" dirty="0" err="1"/>
+              <a:t>azt</a:t>
+            </a:r>
+            <a:r>
+              <a:rPr lang="en-US" b="0" dirty="0"/>
+              <a:t> </a:t>
+            </a:r>
+            <a:r>
+              <a:rPr lang="en-US" b="0" dirty="0" err="1"/>
+              <a:t>csinálja</a:t>
+            </a:r>
+            <a:r>
+              <a:rPr lang="en-US" b="0" dirty="0"/>
+              <a:t>, </a:t>
+            </a:r>
+            <a:r>
+              <a:rPr lang="en-US" b="0" dirty="0" err="1"/>
+              <a:t>hogy</a:t>
+            </a:r>
+            <a:r>
+              <a:rPr lang="en-US" b="0" dirty="0"/>
+              <a:t>:</a:t>
+            </a:r>
+            <a:r>
+              <a:rPr lang="hu-HU" b="0" dirty="0"/>
+              <a:t> </a:t>
+            </a:r>
+            <a:r>
+              <a:rPr lang="en-US" b="0" dirty="0" err="1"/>
+              <a:t>az</a:t>
+            </a:r>
+            <a:r>
+              <a:rPr lang="en-US" b="0" dirty="0"/>
+              <a:t> </a:t>
+            </a:r>
+            <a:r>
+              <a:rPr lang="en-US" b="0" dirty="0" err="1"/>
+              <a:t>OpenAPI</a:t>
+            </a:r>
+            <a:r>
+              <a:rPr lang="en-US" b="0" dirty="0"/>
+              <a:t> </a:t>
+            </a:r>
+            <a:r>
+              <a:rPr lang="en-US" b="0" dirty="0" err="1"/>
+              <a:t>leírást</a:t>
+            </a:r>
+            <a:r>
+              <a:rPr lang="hu-HU" b="0" dirty="0"/>
+              <a:t> </a:t>
+            </a:r>
+            <a:r>
+              <a:rPr lang="en-US" b="0" dirty="0" err="1"/>
+              <a:t>szép</a:t>
+            </a:r>
+            <a:r>
+              <a:rPr lang="en-US" b="0" dirty="0"/>
+              <a:t>, </a:t>
+            </a:r>
+            <a:r>
+              <a:rPr lang="en-US" b="0" dirty="0" err="1"/>
+              <a:t>érthető</a:t>
+            </a:r>
+            <a:r>
+              <a:rPr lang="en-US" b="0" dirty="0"/>
+              <a:t> </a:t>
+            </a:r>
+            <a:r>
+              <a:rPr lang="en-US" b="0" dirty="0" err="1"/>
+              <a:t>webes</a:t>
+            </a:r>
+            <a:r>
+              <a:rPr lang="en-US" b="0" dirty="0"/>
+              <a:t> </a:t>
+            </a:r>
+            <a:r>
+              <a:rPr lang="en-US" b="0" dirty="0" err="1"/>
+              <a:t>felületen</a:t>
+            </a:r>
+            <a:r>
+              <a:rPr lang="en-US" b="0" dirty="0"/>
+              <a:t> </a:t>
+            </a:r>
+            <a:r>
+              <a:rPr lang="en-US" b="0" dirty="0" err="1"/>
+              <a:t>megjeleníti</a:t>
+            </a:r>
+            <a:r>
+              <a:rPr lang="hu-HU" b="0" dirty="0"/>
+              <a:t>. Ez egy interaktív felület. Az API nem csak megtekinthető, hanem ki is lehet próbálni.</a:t>
+            </a:r>
+            <a:endParaRPr lang="en-US" b="0" dirty="0"/>
+          </a:p>
+          <a:p>
+            <a:r>
+              <a:rPr lang="en-US" dirty="0" err="1"/>
+              <a:t>Tehát</a:t>
+            </a:r>
+            <a:r>
+              <a:rPr lang="en-US" dirty="0"/>
+              <a:t>:</a:t>
+            </a:r>
+          </a:p>
+          <a:p>
+            <a:r>
+              <a:rPr lang="en-US" b="1" dirty="0" err="1"/>
+              <a:t>OpenAPI</a:t>
+            </a:r>
+            <a:r>
+              <a:rPr lang="en-US" dirty="0"/>
+              <a:t> → </a:t>
+            </a:r>
+            <a:r>
+              <a:rPr lang="en-US" dirty="0" err="1"/>
+              <a:t>mit</a:t>
+            </a:r>
+            <a:r>
+              <a:rPr lang="en-US" dirty="0"/>
+              <a:t> </a:t>
+            </a:r>
+            <a:r>
+              <a:rPr lang="en-US" dirty="0" err="1"/>
+              <a:t>tud</a:t>
+            </a:r>
+            <a:r>
+              <a:rPr lang="en-US" dirty="0"/>
+              <a:t> </a:t>
+            </a:r>
+            <a:r>
+              <a:rPr lang="en-US" dirty="0" err="1"/>
+              <a:t>az</a:t>
+            </a:r>
+            <a:r>
+              <a:rPr lang="en-US" dirty="0"/>
+              <a:t> API</a:t>
+            </a:r>
+          </a:p>
+          <a:p>
+            <a:r>
+              <a:rPr lang="en-US" b="1" dirty="0"/>
+              <a:t>Swagger UI</a:t>
+            </a:r>
+            <a:r>
+              <a:rPr lang="en-US" dirty="0"/>
+              <a:t> → </a:t>
+            </a:r>
+            <a:r>
+              <a:rPr lang="en-US" dirty="0" err="1"/>
+              <a:t>hogyan</a:t>
+            </a:r>
+            <a:r>
+              <a:rPr lang="en-US" dirty="0"/>
+              <a:t> </a:t>
+            </a:r>
+            <a:r>
+              <a:rPr lang="en-US" dirty="0" err="1"/>
+              <a:t>látjuk</a:t>
+            </a:r>
+            <a:r>
+              <a:rPr lang="en-US" dirty="0"/>
+              <a:t> </a:t>
+            </a:r>
+            <a:r>
+              <a:rPr lang="en-US" dirty="0" err="1"/>
+              <a:t>ezt</a:t>
             </a:r>
             <a:endParaRPr lang="hu-HU" dirty="0"/>
           </a:p>
           <a:p>
             <a:r>
+              <a:rPr lang="hu-HU" b="0" dirty="0"/>
+              <a:t>N</a:t>
+            </a:r>
+            <a:r>
+              <a:rPr lang="en-US" b="0" dirty="0" err="1"/>
+              <a:t>em</a:t>
+            </a:r>
+            <a:r>
               <a:rPr lang="en-US" b="0" dirty="0"/>
-              <a:t>Mi </a:t>
+              <a:t> </a:t>
             </a:r>
             <a:r>
               <a:rPr lang="en-US" b="0" dirty="0" err="1"/>
-              <a:t>változik</a:t>
+              <a:t>csak</a:t>
             </a:r>
             <a:r>
               <a:rPr lang="en-US" b="0" dirty="0"/>
-              <a:t> REST </a:t>
+              <a:t> </a:t>
             </a:r>
             <a:r>
               <a:rPr lang="en-US" b="0" dirty="0" err="1"/>
-              <a:t>esetén</a:t>
+              <a:t>leírja</a:t>
             </a:r>
             <a:r>
               <a:rPr lang="en-US" b="0" dirty="0"/>
-              <a:t>?</a:t>
+              <a:t> </a:t>
+            </a:r>
+            <a:r>
+              <a:rPr lang="en-US" b="0" dirty="0" err="1"/>
+              <a:t>az</a:t>
+            </a:r>
+            <a:r>
+              <a:rPr lang="en-US" b="0" dirty="0"/>
+              <a:t> API-t,</a:t>
             </a:r>
             <a:r>
               <a:rPr lang="hu-HU" b="0" dirty="0"/>
               <a:t> </a:t>
             </a:r>
             <a:r>
+              <a:rPr lang="en-US" b="0" dirty="0" err="1"/>
+              <a:t>hanem</a:t>
+            </a:r>
+            <a:r>
               <a:rPr lang="en-US" b="0" dirty="0"/>
-              <a:t>REST-</a:t>
+              <a:t> </a:t>
             </a:r>
             <a:r>
               <a:rPr lang="en-US" b="0" dirty="0" err="1"/>
-              <a:t>nél</a:t>
+              <a:t>aktívan</a:t>
+            </a:r>
+            <a:r>
+              <a:rPr lang="en-US" b="0" dirty="0"/>
+              <a:t> </a:t>
+            </a:r>
+            <a:r>
+              <a:rPr lang="en-US" b="0" dirty="0" err="1"/>
+              <a:t>segíti</a:t>
             </a:r>
             <a:r>
               <a:rPr lang="en-US" b="0" dirty="0"/>
@@ -9711,347 +10039,15 @@
             </a:r>
             <a:r>
               <a:rPr lang="en-US" b="0" dirty="0" err="1"/>
-              <a:t>szerver</a:t>
-            </a:r>
-            <a:r>
-              <a:rPr lang="hu-HU" b="0" dirty="0"/>
-              <a:t> </a:t>
-            </a:r>
-            <a:r>
-              <a:rPr lang="en-US" b="0" dirty="0" err="1"/>
-              <a:t>nem</a:t>
+              <a:t>fejlesztést</a:t>
             </a:r>
             <a:r>
               <a:rPr lang="en-US" b="0" dirty="0"/>
-              <a:t> HTML-t ad </a:t>
-            </a:r>
-            <a:r>
-              <a:rPr lang="en-US" b="0" dirty="0" err="1"/>
-              <a:t>vissza</a:t>
-            </a:r>
-            <a:r>
-              <a:rPr lang="hu-HU" b="0" dirty="0"/>
-              <a:t>, </a:t>
-            </a:r>
-            <a:r>
-              <a:rPr lang="en-US" b="0" dirty="0" err="1"/>
-              <a:t>hanem</a:t>
-            </a:r>
-            <a:r>
-              <a:rPr lang="en-US" b="0" dirty="0"/>
-              <a:t> </a:t>
-            </a:r>
-            <a:r>
-              <a:rPr lang="en-US" b="0" dirty="0" err="1"/>
-              <a:t>adatot</a:t>
-            </a:r>
-            <a:r>
-              <a:rPr lang="en-US" b="0" dirty="0"/>
-              <a:t> (</a:t>
-            </a:r>
-            <a:r>
-              <a:rPr lang="en-US" b="0" dirty="0" err="1"/>
-              <a:t>jellemzően</a:t>
-            </a:r>
-            <a:r>
-              <a:rPr lang="en-US" b="0" dirty="0"/>
-              <a:t> JSON-t)</a:t>
-            </a:r>
-            <a:r>
-              <a:rPr lang="hu-HU" b="0" dirty="0"/>
-              <a:t>. Ezáltal az </a:t>
-            </a:r>
-            <a:r>
-              <a:rPr lang="en-US" b="0" dirty="0"/>
-              <a:t>UI </a:t>
-            </a:r>
-            <a:r>
-              <a:rPr lang="en-US" b="0" dirty="0" err="1"/>
-              <a:t>logika</a:t>
-            </a:r>
-            <a:r>
-              <a:rPr lang="en-US" b="0" dirty="0"/>
-              <a:t> </a:t>
-            </a:r>
-            <a:r>
-              <a:rPr lang="en-US" b="0" dirty="0" err="1"/>
-              <a:t>kikerül</a:t>
-            </a:r>
-            <a:r>
-              <a:rPr lang="en-US" b="0" dirty="0"/>
-              <a:t> a </a:t>
-            </a:r>
-            <a:r>
-              <a:rPr lang="en-US" b="0" dirty="0" err="1"/>
-              <a:t>szerverről</a:t>
-            </a:r>
-            <a:r>
-              <a:rPr lang="hu-HU" b="0" dirty="0"/>
               <a:t>.</a:t>
             </a:r>
           </a:p>
           <a:p>
-            <a:r>
-              <a:rPr lang="hu-HU" dirty="0"/>
-              <a:t>Egy REST API mögött </a:t>
-            </a:r>
-            <a:r>
-              <a:rPr lang="hu-HU" b="0" dirty="0"/>
-              <a:t>szinte mindig </a:t>
-            </a:r>
-            <a:r>
-              <a:rPr lang="hu-HU" dirty="0"/>
-              <a:t>egy MVC-szerű architektúra dolgozik.</a:t>
-            </a:r>
             <a:endParaRPr lang="en-US" b="0" dirty="0"/>
-          </a:p>
-          <a:p>
-            <a:endParaRPr lang="hu-HU" dirty="0"/>
-          </a:p>
-          <a:p>
-            <a:r>
-              <a:rPr lang="en-US" b="1" dirty="0"/>
-              <a:t>Controller → REST endpoint</a:t>
-            </a:r>
-          </a:p>
-          <a:p>
-            <a:r>
-              <a:rPr lang="en-US" dirty="0"/>
-              <a:t>HTTP request </a:t>
-            </a:r>
-            <a:r>
-              <a:rPr lang="en-US" dirty="0" err="1"/>
-              <a:t>fogadása</a:t>
-            </a:r>
-            <a:r>
-              <a:rPr lang="hu-HU" dirty="0"/>
-              <a:t>, </a:t>
-            </a:r>
-            <a:r>
-              <a:rPr lang="en-US" dirty="0" err="1"/>
-              <a:t>paraméterek</a:t>
-            </a:r>
-            <a:r>
-              <a:rPr lang="en-US" dirty="0"/>
-              <a:t> </a:t>
-            </a:r>
-            <a:r>
-              <a:rPr lang="en-US" dirty="0" err="1"/>
-              <a:t>feldolgozása</a:t>
-            </a:r>
-            <a:r>
-              <a:rPr lang="hu-HU" dirty="0"/>
-              <a:t>, és </a:t>
-            </a:r>
-            <a:r>
-              <a:rPr lang="en-US" dirty="0"/>
-              <a:t>HTTP </a:t>
-            </a:r>
-            <a:r>
-              <a:rPr lang="en-US" dirty="0" err="1"/>
-              <a:t>válasz</a:t>
-            </a:r>
-            <a:r>
-              <a:rPr lang="en-US" dirty="0"/>
-              <a:t> </a:t>
-            </a:r>
-            <a:r>
-              <a:rPr lang="en-US" dirty="0" err="1"/>
-              <a:t>visszaadása</a:t>
-            </a:r>
-            <a:r>
-              <a:rPr lang="hu-HU" dirty="0"/>
-              <a:t> (JSON adat).</a:t>
-            </a:r>
-          </a:p>
-          <a:p>
-            <a:endParaRPr lang="hu-HU" dirty="0"/>
-          </a:p>
-          <a:p>
-            <a:r>
-              <a:rPr lang="en-US" b="1" dirty="0"/>
-              <a:t>Model</a:t>
-            </a:r>
-            <a:r>
-              <a:rPr lang="en-US" dirty="0"/>
-              <a:t> </a:t>
-            </a:r>
-            <a:r>
-              <a:rPr lang="en-US" b="1" dirty="0"/>
-              <a:t>→ </a:t>
-            </a:r>
-            <a:r>
-              <a:rPr lang="en-US" b="1" dirty="0" err="1"/>
-              <a:t>üzleti</a:t>
-            </a:r>
-            <a:r>
-              <a:rPr lang="en-US" b="1" dirty="0"/>
-              <a:t> </a:t>
-            </a:r>
-            <a:r>
-              <a:rPr lang="en-US" b="1" dirty="0" err="1"/>
-              <a:t>logika</a:t>
-            </a:r>
-            <a:endParaRPr lang="hu-HU" b="1" dirty="0"/>
-          </a:p>
-          <a:p>
-            <a:r>
-              <a:rPr lang="hu-HU" dirty="0"/>
-              <a:t>Ez nem változik a REST-nél sem. A </a:t>
-            </a:r>
-            <a:r>
-              <a:rPr lang="hu-HU" dirty="0" err="1"/>
-              <a:t>Model</a:t>
-            </a:r>
-            <a:r>
-              <a:rPr lang="hu-HU" dirty="0"/>
-              <a:t> tartalmazza: szolgáltatási réteg, üzleti adatok/objektumok, adatbázis-elérés, validációk, és egyéb üzleti szabályok.</a:t>
-            </a:r>
-          </a:p>
-          <a:p>
-            <a:endParaRPr lang="hu-HU" dirty="0"/>
-          </a:p>
-          <a:p>
-            <a:r>
-              <a:rPr lang="en-US" b="1" dirty="0"/>
-              <a:t>View → JSON </a:t>
-            </a:r>
-            <a:r>
-              <a:rPr lang="en-US" b="1" dirty="0" err="1"/>
-              <a:t>válasz</a:t>
-            </a:r>
-            <a:endParaRPr lang="hu-HU" b="1" dirty="0"/>
-          </a:p>
-          <a:p>
-            <a:r>
-              <a:rPr lang="hu-HU" dirty="0"/>
-              <a:t>Itt van a szemléletváltás, és a legnagyobb változás. A REST esetén a </a:t>
-            </a:r>
-            <a:r>
-              <a:rPr lang="hu-HU" dirty="0" err="1"/>
-              <a:t>View</a:t>
-            </a:r>
-            <a:r>
-              <a:rPr lang="hu-HU" dirty="0"/>
-              <a:t> nem HTML, hanem JSON adat.</a:t>
-            </a:r>
-          </a:p>
-          <a:p>
-            <a:endParaRPr lang="hu-HU" dirty="0"/>
-          </a:p>
-          <a:p>
-            <a:r>
-              <a:rPr lang="en-US" dirty="0"/>
-              <a:t>A REST </a:t>
-            </a:r>
-            <a:r>
-              <a:rPr lang="en-US" b="1" dirty="0" err="1"/>
-              <a:t>szétválasztja</a:t>
-            </a:r>
-            <a:r>
-              <a:rPr lang="en-US" b="1" dirty="0"/>
-              <a:t> a </a:t>
-            </a:r>
-            <a:r>
-              <a:rPr lang="en-US" b="1" dirty="0" err="1"/>
-              <a:t>felelősségeket</a:t>
-            </a:r>
-            <a:r>
-              <a:rPr lang="en-US" dirty="0"/>
-              <a:t>.</a:t>
-            </a:r>
-            <a:r>
-              <a:rPr lang="hu-HU" dirty="0"/>
-              <a:t> </a:t>
-            </a:r>
-            <a:r>
-              <a:rPr lang="en-US" dirty="0"/>
-              <a:t>Az MVC </a:t>
-            </a:r>
-            <a:r>
-              <a:rPr lang="en-US" dirty="0" err="1"/>
-              <a:t>marad</a:t>
-            </a:r>
-            <a:r>
-              <a:rPr lang="en-US" dirty="0"/>
-              <a:t> a </a:t>
-            </a:r>
-            <a:r>
-              <a:rPr lang="en-US" dirty="0" err="1"/>
-              <a:t>szerveren</a:t>
-            </a:r>
-            <a:r>
-              <a:rPr lang="en-US" dirty="0"/>
-              <a:t>,</a:t>
-            </a:r>
-            <a:r>
-              <a:rPr lang="hu-HU" dirty="0"/>
-              <a:t> </a:t>
-            </a:r>
-            <a:r>
-              <a:rPr lang="en-US" dirty="0"/>
-              <a:t>a </a:t>
-            </a:r>
-            <a:r>
-              <a:rPr lang="en-US" dirty="0" err="1"/>
-              <a:t>megjelenítés</a:t>
-            </a:r>
-            <a:r>
-              <a:rPr lang="en-US" dirty="0"/>
-              <a:t> </a:t>
-            </a:r>
-            <a:r>
-              <a:rPr lang="en-US" dirty="0" err="1"/>
-              <a:t>pedig</a:t>
-            </a:r>
-            <a:r>
-              <a:rPr lang="en-US" dirty="0"/>
-              <a:t> </a:t>
-            </a:r>
-            <a:r>
-              <a:rPr lang="en-US" dirty="0" err="1"/>
-              <a:t>átkerül</a:t>
-            </a:r>
-            <a:r>
-              <a:rPr lang="en-US" dirty="0"/>
-              <a:t> a </a:t>
-            </a:r>
-            <a:r>
-              <a:rPr lang="en-US" dirty="0" err="1"/>
-              <a:t>klienshez</a:t>
-            </a:r>
-            <a:r>
-              <a:rPr lang="en-US" dirty="0"/>
-              <a:t>.</a:t>
-            </a:r>
-            <a:r>
-              <a:rPr lang="hu-HU" dirty="0"/>
-              <a:t> Ennek előnye, hogy a </a:t>
-            </a:r>
-            <a:r>
-              <a:rPr lang="en-US" dirty="0"/>
-              <a:t>frontend és backend </a:t>
-            </a:r>
-            <a:r>
-              <a:rPr lang="en-US" dirty="0" err="1"/>
-              <a:t>külön</a:t>
-            </a:r>
-            <a:r>
-              <a:rPr lang="en-US" dirty="0"/>
-              <a:t> </a:t>
-            </a:r>
-            <a:r>
-              <a:rPr lang="en-US" dirty="0" err="1"/>
-              <a:t>fejleszthető</a:t>
-            </a:r>
-            <a:r>
-              <a:rPr lang="hu-HU" dirty="0"/>
-              <a:t>. UI cserélhető a backend érintése nélkül.</a:t>
-            </a:r>
-            <a:endParaRPr lang="en-US" dirty="0"/>
-          </a:p>
-          <a:p>
-            <a:endParaRPr lang="en-US" dirty="0"/>
           </a:p>
         </p:txBody>
       </p:sp>
@@ -10072,7 +10068,7 @@
           <a:p>
             <a:fld id="{82D23EBC-67FA-4278-B97C-82D0A52FD2DA}" type="slidenum">
               <a:rPr lang="en-US" smtClean="0"/>
-              <a:t>16</a:t>
+              <a:t>15</a:t>
             </a:fld>
             <a:endParaRPr lang="en-US"/>
           </a:p>
@@ -10081,7 +10077,7 @@
     </p:spTree>
     <p:extLst>
       <p:ext uri="{BB962C8B-B14F-4D97-AF65-F5344CB8AC3E}">
-        <p14:creationId xmlns:p14="http://schemas.microsoft.com/office/powerpoint/2010/main" val="436745763"/>
+        <p14:creationId xmlns:p14="http://schemas.microsoft.com/office/powerpoint/2010/main" val="1887556368"/>
       </p:ext>
     </p:extLst>
   </p:cSld>
@@ -14151,7 +14147,7 @@
           <a:p>
             <a:fld id="{E80C50CD-E178-4744-9B35-B2F624D6C5E9}" type="datetimeFigureOut">
               <a:rPr lang="en-US" smtClean="0"/>
-              <a:t>3/8/2026</a:t>
+              <a:t>3/16/2026</a:t>
             </a:fld>
             <a:endParaRPr lang="en-US"/>
           </a:p>
@@ -14349,7 +14345,7 @@
           <a:p>
             <a:fld id="{E80C50CD-E178-4744-9B35-B2F624D6C5E9}" type="datetimeFigureOut">
               <a:rPr lang="en-US" smtClean="0"/>
-              <a:t>3/8/2026</a:t>
+              <a:t>3/16/2026</a:t>
             </a:fld>
             <a:endParaRPr lang="en-US"/>
           </a:p>
@@ -14557,7 +14553,7 @@
           <a:p>
             <a:fld id="{E80C50CD-E178-4744-9B35-B2F624D6C5E9}" type="datetimeFigureOut">
               <a:rPr lang="en-US" smtClean="0"/>
-              <a:t>3/8/2026</a:t>
+              <a:t>3/16/2026</a:t>
             </a:fld>
             <a:endParaRPr lang="en-US"/>
           </a:p>
@@ -14807,7 +14803,7 @@
           <a:p>
             <a:fld id="{E80C50CD-E178-4744-9B35-B2F624D6C5E9}" type="datetimeFigureOut">
               <a:rPr lang="en-US" smtClean="0"/>
-              <a:t>3/8/2026</a:t>
+              <a:t>3/16/2026</a:t>
             </a:fld>
             <a:endParaRPr lang="en-US"/>
           </a:p>
@@ -15086,7 +15082,7 @@
           <a:p>
             <a:fld id="{E80C50CD-E178-4744-9B35-B2F624D6C5E9}" type="datetimeFigureOut">
               <a:rPr lang="en-US" smtClean="0"/>
-              <a:t>3/8/2026</a:t>
+              <a:t>3/16/2026</a:t>
             </a:fld>
             <a:endParaRPr lang="en-US"/>
           </a:p>
@@ -15403,7 +15399,7 @@
           <a:p>
             <a:fld id="{E80C50CD-E178-4744-9B35-B2F624D6C5E9}" type="datetimeFigureOut">
               <a:rPr lang="en-US" smtClean="0"/>
-              <a:t>3/8/2026</a:t>
+              <a:t>3/16/2026</a:t>
             </a:fld>
             <a:endParaRPr lang="en-US"/>
           </a:p>
@@ -15819,7 +15815,7 @@
           <a:p>
             <a:fld id="{E80C50CD-E178-4744-9B35-B2F624D6C5E9}" type="datetimeFigureOut">
               <a:rPr lang="en-US" smtClean="0"/>
-              <a:t>3/8/2026</a:t>
+              <a:t>3/16/2026</a:t>
             </a:fld>
             <a:endParaRPr lang="en-US"/>
           </a:p>
@@ -15960,7 +15956,7 @@
           <a:p>
             <a:fld id="{E80C50CD-E178-4744-9B35-B2F624D6C5E9}" type="datetimeFigureOut">
               <a:rPr lang="en-US" smtClean="0"/>
-              <a:t>3/8/2026</a:t>
+              <a:t>3/16/2026</a:t>
             </a:fld>
             <a:endParaRPr lang="en-US"/>
           </a:p>
@@ -16073,7 +16069,7 @@
           <a:p>
             <a:fld id="{E80C50CD-E178-4744-9B35-B2F624D6C5E9}" type="datetimeFigureOut">
               <a:rPr lang="en-US" smtClean="0"/>
-              <a:t>3/8/2026</a:t>
+              <a:t>3/16/2026</a:t>
             </a:fld>
             <a:endParaRPr lang="en-US"/>
           </a:p>
@@ -16390,7 +16386,7 @@
           <a:p>
             <a:fld id="{E80C50CD-E178-4744-9B35-B2F624D6C5E9}" type="datetimeFigureOut">
               <a:rPr lang="en-US" smtClean="0"/>
-              <a:t>3/8/2026</a:t>
+              <a:t>3/16/2026</a:t>
             </a:fld>
             <a:endParaRPr lang="en-US"/>
           </a:p>
@@ -16682,7 +16678,7 @@
           <a:p>
             <a:fld id="{E80C50CD-E178-4744-9B35-B2F624D6C5E9}" type="datetimeFigureOut">
               <a:rPr lang="en-US" smtClean="0"/>
-              <a:t>3/8/2026</a:t>
+              <a:t>3/16/2026</a:t>
             </a:fld>
             <a:endParaRPr lang="en-US"/>
           </a:p>
@@ -16922,7 +16918,7 @@
             <a:fld id="{E80C50CD-E178-4744-9B35-B2F624D6C5E9}" type="datetimeFigureOut">
               <a:rPr lang="en-US" smtClean="0"/>
               <a:pPr/>
-              <a:t>3/8/2026</a:t>
+              <a:t>3/16/2026</a:t>
             </a:fld>
             <a:endParaRPr lang="en-US"/>
           </a:p>
@@ -18101,6 +18097,729 @@
           <p:cNvPr id="2" name="Title 1">
             <a:extLst>
               <a:ext uri="{FF2B5EF4-FFF2-40B4-BE49-F238E27FC236}">
+                <a16:creationId xmlns:a16="http://schemas.microsoft.com/office/drawing/2014/main" id="{2A2BFAF2-1FFE-D1E7-9DA9-636190A3FFD6}"/>
+              </a:ext>
+            </a:extLst>
+          </p:cNvPr>
+          <p:cNvSpPr>
+            <a:spLocks noGrp="1"/>
+          </p:cNvSpPr>
+          <p:nvPr>
+            <p:ph type="title"/>
+          </p:nvPr>
+        </p:nvSpPr>
+        <p:spPr>
+          <a:xfrm>
+            <a:off x="521208" y="978408"/>
+            <a:ext cx="11155680" cy="861967"/>
+          </a:xfrm>
+        </p:spPr>
+        <p:txBody>
+          <a:bodyPr>
+            <a:normAutofit/>
+          </a:bodyPr>
+          <a:lstStyle/>
+          <a:p>
+            <a:r>
+              <a:rPr lang="en-US" sz="4000" dirty="0"/>
+              <a:t>MVC és REST </a:t>
+            </a:r>
+            <a:r>
+              <a:rPr lang="en-US" sz="4000" dirty="0" err="1"/>
+              <a:t>kapcsolata</a:t>
+            </a:r>
+            <a:endParaRPr lang="en-US" sz="4000" dirty="0"/>
+          </a:p>
+        </p:txBody>
+      </p:sp>
+      <p:sp>
+        <p:nvSpPr>
+          <p:cNvPr id="4" name="Rectangle 1">
+            <a:extLst>
+              <a:ext uri="{FF2B5EF4-FFF2-40B4-BE49-F238E27FC236}">
+                <a16:creationId xmlns:a16="http://schemas.microsoft.com/office/drawing/2014/main" id="{A4B6CCC7-4697-F699-5CE8-E9AE1062AB6D}"/>
+              </a:ext>
+            </a:extLst>
+          </p:cNvPr>
+          <p:cNvSpPr>
+            <a:spLocks noGrp="1" noChangeArrowheads="1"/>
+          </p:cNvSpPr>
+          <p:nvPr>
+            <p:ph idx="1"/>
+          </p:nvPr>
+        </p:nvSpPr>
+        <p:spPr bwMode="auto">
+          <a:xfrm>
+            <a:off x="520700" y="2083037"/>
+            <a:ext cx="8032991" cy="3890489"/>
+          </a:xfrm>
+          <a:prstGeom prst="rect">
+            <a:avLst/>
+          </a:prstGeom>
+          <a:noFill/>
+          <a:ln>
+            <a:noFill/>
+          </a:ln>
+          <a:effectLst/>
+          <a:extLst>
+            <a:ext uri="{909E8E84-426E-40DD-AFC4-6F175D3DCCD1}">
+              <a14:hiddenFill xmlns:a14="http://schemas.microsoft.com/office/drawing/2010/main">
+                <a:solidFill>
+                  <a:schemeClr val="accent1"/>
+                </a:solidFill>
+              </a14:hiddenFill>
+            </a:ext>
+            <a:ext uri="{91240B29-F687-4F45-9708-019B960494DF}">
+              <a14:hiddenLine xmlns:a14="http://schemas.microsoft.com/office/drawing/2010/main" w="9525">
+                <a:solidFill>
+                  <a:schemeClr val="tx1"/>
+                </a:solidFill>
+                <a:miter lim="800000"/>
+                <a:headEnd/>
+                <a:tailEnd/>
+              </a14:hiddenLine>
+            </a:ext>
+            <a:ext uri="{AF507438-7753-43E0-B8FC-AC1667EBCBE1}">
+              <a14:hiddenEffects xmlns:a14="http://schemas.microsoft.com/office/drawing/2010/main">
+                <a:effectLst>
+                  <a:outerShdw dist="35921" dir="2700000" algn="ctr" rotWithShape="0">
+                    <a:schemeClr val="bg2"/>
+                  </a:outerShdw>
+                </a:effectLst>
+              </a14:hiddenEffects>
+            </a:ext>
+          </a:extLst>
+        </p:spPr>
+        <p:txBody>
+          <a:bodyPr vert="horz" wrap="square" lIns="91440" tIns="45720" rIns="91440" bIns="45720" numCol="1" anchor="ctr" anchorCtr="0" compatLnSpc="1">
+            <a:prstTxWarp prst="textNoShape">
+              <a:avLst/>
+            </a:prstTxWarp>
+            <a:spAutoFit/>
+          </a:bodyPr>
+          <a:lstStyle/>
+          <a:p>
+            <a:pPr marL="0" marR="0" lvl="0" indent="0" algn="l" defTabSz="914400" rtl="0" eaLnBrk="0" fontAlgn="base" latinLnBrk="0" hangingPunct="0">
+              <a:lnSpc>
+                <a:spcPct val="150000"/>
+              </a:lnSpc>
+              <a:spcBef>
+                <a:spcPct val="0"/>
+              </a:spcBef>
+              <a:spcAft>
+                <a:spcPct val="0"/>
+              </a:spcAft>
+              <a:buClrTx/>
+              <a:buSzTx/>
+              <a:buFontTx/>
+              <a:buChar char="•"/>
+              <a:tabLst/>
+            </a:pPr>
+            <a:r>
+              <a:rPr kumimoji="0" lang="hu-HU" altLang="en-US" sz="2800" b="0" i="0" u="none" strike="noStrike" cap="none" normalizeH="0" baseline="0" dirty="0">
+                <a:ln>
+                  <a:noFill/>
+                </a:ln>
+                <a:solidFill>
+                  <a:schemeClr val="tx1"/>
+                </a:solidFill>
+                <a:effectLst/>
+                <a:latin typeface="Arial" panose="020B0604020202020204" pitchFamily="34" charset="0"/>
+              </a:rPr>
+              <a:t> </a:t>
+            </a:r>
+            <a:r>
+              <a:rPr kumimoji="0" lang="en-US" altLang="en-US" sz="2800" b="0" i="0" u="none" strike="noStrike" cap="none" normalizeH="0" baseline="0" dirty="0">
+                <a:ln>
+                  <a:noFill/>
+                </a:ln>
+                <a:solidFill>
+                  <a:schemeClr val="tx1"/>
+                </a:solidFill>
+                <a:effectLst/>
+                <a:latin typeface="Arial" panose="020B0604020202020204" pitchFamily="34" charset="0"/>
+              </a:rPr>
+              <a:t>MVC a </a:t>
+            </a:r>
+            <a:r>
+              <a:rPr kumimoji="0" lang="en-US" altLang="en-US" sz="2800" b="0" i="0" u="none" strike="noStrike" cap="none" normalizeH="0" baseline="0" dirty="0" err="1">
+                <a:ln>
+                  <a:noFill/>
+                </a:ln>
+                <a:solidFill>
+                  <a:schemeClr val="tx1"/>
+                </a:solidFill>
+                <a:effectLst/>
+                <a:latin typeface="Arial" panose="020B0604020202020204" pitchFamily="34" charset="0"/>
+              </a:rPr>
+              <a:t>szerveren</a:t>
+            </a:r>
+            <a:endParaRPr kumimoji="0" lang="en-US" altLang="en-US" sz="2800" b="0" i="0" u="none" strike="noStrike" cap="none" normalizeH="0" baseline="0" dirty="0">
+              <a:ln>
+                <a:noFill/>
+              </a:ln>
+              <a:solidFill>
+                <a:schemeClr val="tx1"/>
+              </a:solidFill>
+              <a:effectLst/>
+              <a:latin typeface="Arial" panose="020B0604020202020204" pitchFamily="34" charset="0"/>
+            </a:endParaRPr>
+          </a:p>
+          <a:p>
+            <a:pPr marL="0" marR="0" lvl="0" indent="0" algn="l" defTabSz="914400" rtl="0" eaLnBrk="0" fontAlgn="base" latinLnBrk="0" hangingPunct="0">
+              <a:lnSpc>
+                <a:spcPct val="150000"/>
+              </a:lnSpc>
+              <a:spcBef>
+                <a:spcPct val="0"/>
+              </a:spcBef>
+              <a:spcAft>
+                <a:spcPct val="0"/>
+              </a:spcAft>
+              <a:buClrTx/>
+              <a:buSzTx/>
+              <a:buFontTx/>
+              <a:buChar char="•"/>
+              <a:tabLst/>
+            </a:pPr>
+            <a:r>
+              <a:rPr kumimoji="0" lang="hu-HU" altLang="en-US" sz="2800" b="0" i="0" u="none" strike="noStrike" cap="none" normalizeH="0" baseline="0" dirty="0">
+                <a:ln>
+                  <a:noFill/>
+                </a:ln>
+                <a:solidFill>
+                  <a:schemeClr val="tx1"/>
+                </a:solidFill>
+                <a:effectLst/>
+                <a:latin typeface="Arial" panose="020B0604020202020204" pitchFamily="34" charset="0"/>
+              </a:rPr>
+              <a:t> </a:t>
+            </a:r>
+            <a:r>
+              <a:rPr kumimoji="0" lang="en-US" altLang="en-US" sz="2800" b="0" i="0" u="none" strike="noStrike" cap="none" normalizeH="0" baseline="0" dirty="0">
+                <a:ln>
+                  <a:noFill/>
+                </a:ln>
+                <a:solidFill>
+                  <a:schemeClr val="tx1"/>
+                </a:solidFill>
+                <a:effectLst/>
+                <a:latin typeface="Arial" panose="020B0604020202020204" pitchFamily="34" charset="0"/>
+              </a:rPr>
+              <a:t>REST API mint backend </a:t>
+            </a:r>
+            <a:r>
+              <a:rPr kumimoji="0" lang="en-US" altLang="en-US" sz="2800" b="0" i="0" u="none" strike="noStrike" cap="none" normalizeH="0" baseline="0" dirty="0" err="1">
+                <a:ln>
+                  <a:noFill/>
+                </a:ln>
+                <a:solidFill>
+                  <a:schemeClr val="tx1"/>
+                </a:solidFill>
+                <a:effectLst/>
+                <a:latin typeface="Arial" panose="020B0604020202020204" pitchFamily="34" charset="0"/>
+              </a:rPr>
+              <a:t>interfész</a:t>
+            </a:r>
+            <a:endParaRPr kumimoji="0" lang="en-US" altLang="en-US" sz="2800" b="0" i="0" u="none" strike="noStrike" cap="none" normalizeH="0" baseline="0" dirty="0">
+              <a:ln>
+                <a:noFill/>
+              </a:ln>
+              <a:solidFill>
+                <a:schemeClr val="tx1"/>
+              </a:solidFill>
+              <a:effectLst/>
+              <a:latin typeface="Arial" panose="020B0604020202020204" pitchFamily="34" charset="0"/>
+            </a:endParaRPr>
+          </a:p>
+          <a:p>
+            <a:pPr marL="0" marR="0" lvl="0" indent="0" algn="l" defTabSz="914400" rtl="0" eaLnBrk="0" fontAlgn="base" latinLnBrk="0" hangingPunct="0">
+              <a:lnSpc>
+                <a:spcPct val="150000"/>
+              </a:lnSpc>
+              <a:spcBef>
+                <a:spcPct val="0"/>
+              </a:spcBef>
+              <a:spcAft>
+                <a:spcPct val="0"/>
+              </a:spcAft>
+              <a:buClrTx/>
+              <a:buSzTx/>
+              <a:buFontTx/>
+              <a:buChar char="•"/>
+              <a:tabLst/>
+            </a:pPr>
+            <a:r>
+              <a:rPr kumimoji="0" lang="hu-HU" altLang="en-US" sz="2800" b="0" i="0" u="none" strike="noStrike" cap="none" normalizeH="0" baseline="0" dirty="0">
+                <a:ln>
+                  <a:noFill/>
+                </a:ln>
+                <a:solidFill>
+                  <a:schemeClr val="tx1"/>
+                </a:solidFill>
+                <a:effectLst/>
+                <a:latin typeface="Arial" panose="020B0604020202020204" pitchFamily="34" charset="0"/>
+              </a:rPr>
+              <a:t> </a:t>
+            </a:r>
+            <a:r>
+              <a:rPr kumimoji="0" lang="en-US" altLang="en-US" sz="2800" b="0" i="0" u="none" strike="noStrike" cap="none" normalizeH="0" baseline="0" dirty="0">
+                <a:ln>
+                  <a:noFill/>
+                </a:ln>
+                <a:solidFill>
+                  <a:schemeClr val="tx1"/>
+                </a:solidFill>
+                <a:effectLst/>
+                <a:latin typeface="Arial" panose="020B0604020202020204" pitchFamily="34" charset="0"/>
+              </a:rPr>
+              <a:t>Frontend </a:t>
+            </a:r>
+            <a:r>
+              <a:rPr kumimoji="0" lang="en-US" altLang="en-US" sz="2800" b="0" i="0" u="none" strike="noStrike" cap="none" normalizeH="0" baseline="0" dirty="0" err="1">
+                <a:ln>
+                  <a:noFill/>
+                </a:ln>
+                <a:solidFill>
+                  <a:schemeClr val="tx1"/>
+                </a:solidFill>
+                <a:effectLst/>
+                <a:latin typeface="Arial" panose="020B0604020202020204" pitchFamily="34" charset="0"/>
+              </a:rPr>
+              <a:t>külön</a:t>
+            </a:r>
+            <a:r>
+              <a:rPr kumimoji="0" lang="en-US" altLang="en-US" sz="2800" b="0" i="0" u="none" strike="noStrike" cap="none" normalizeH="0" baseline="0" dirty="0">
+                <a:ln>
+                  <a:noFill/>
+                </a:ln>
+                <a:solidFill>
+                  <a:schemeClr val="tx1"/>
+                </a:solidFill>
+                <a:effectLst/>
+                <a:latin typeface="Arial" panose="020B0604020202020204" pitchFamily="34" charset="0"/>
+              </a:rPr>
+              <a:t> </a:t>
+            </a:r>
+            <a:r>
+              <a:rPr kumimoji="0" lang="en-US" altLang="en-US" sz="2800" b="0" i="0" u="none" strike="noStrike" cap="none" normalizeH="0" baseline="0" dirty="0" err="1">
+                <a:ln>
+                  <a:noFill/>
+                </a:ln>
+                <a:solidFill>
+                  <a:schemeClr val="tx1"/>
+                </a:solidFill>
+                <a:effectLst/>
+                <a:latin typeface="Arial" panose="020B0604020202020204" pitchFamily="34" charset="0"/>
+              </a:rPr>
+              <a:t>alkalmazás</a:t>
+            </a:r>
+            <a:endParaRPr kumimoji="0" lang="en-US" altLang="en-US" sz="2800" b="0" i="0" u="none" strike="noStrike" cap="none" normalizeH="0" baseline="0" dirty="0">
+              <a:ln>
+                <a:noFill/>
+              </a:ln>
+              <a:solidFill>
+                <a:schemeClr val="tx1"/>
+              </a:solidFill>
+              <a:effectLst/>
+              <a:latin typeface="Arial" panose="020B0604020202020204" pitchFamily="34" charset="0"/>
+            </a:endParaRPr>
+          </a:p>
+          <a:p>
+            <a:pPr marL="0" marR="0" lvl="0" indent="0" algn="l" defTabSz="914400" rtl="0" eaLnBrk="0" fontAlgn="base" latinLnBrk="0" hangingPunct="0">
+              <a:lnSpc>
+                <a:spcPct val="150000"/>
+              </a:lnSpc>
+              <a:spcBef>
+                <a:spcPct val="0"/>
+              </a:spcBef>
+              <a:spcAft>
+                <a:spcPct val="0"/>
+              </a:spcAft>
+              <a:buClrTx/>
+              <a:buSzTx/>
+              <a:buFontTx/>
+              <a:buChar char="•"/>
+              <a:tabLst/>
+            </a:pPr>
+            <a:r>
+              <a:rPr kumimoji="0" lang="hu-HU" altLang="en-US" sz="2800" b="0" i="0" u="none" strike="noStrike" cap="none" normalizeH="0" baseline="0" dirty="0">
+                <a:ln>
+                  <a:noFill/>
+                </a:ln>
+                <a:solidFill>
+                  <a:schemeClr val="tx1"/>
+                </a:solidFill>
+                <a:effectLst/>
+                <a:latin typeface="Arial" panose="020B0604020202020204" pitchFamily="34" charset="0"/>
+              </a:rPr>
+              <a:t> </a:t>
+            </a:r>
+            <a:r>
+              <a:rPr kumimoji="0" lang="en-US" altLang="en-US" sz="2800" b="1" i="0" u="none" strike="noStrike" cap="none" normalizeH="0" baseline="0" dirty="0">
+                <a:ln>
+                  <a:noFill/>
+                </a:ln>
+                <a:solidFill>
+                  <a:schemeClr val="tx1"/>
+                </a:solidFill>
+                <a:effectLst/>
+                <a:latin typeface="Arial" panose="020B0604020202020204" pitchFamily="34" charset="0"/>
+              </a:rPr>
+              <a:t>Controller</a:t>
+            </a:r>
+            <a:r>
+              <a:rPr kumimoji="0" lang="en-US" altLang="en-US" sz="2800" b="0" i="0" u="none" strike="noStrike" cap="none" normalizeH="0" baseline="0" dirty="0">
+                <a:ln>
+                  <a:noFill/>
+                </a:ln>
+                <a:solidFill>
+                  <a:schemeClr val="tx1"/>
+                </a:solidFill>
+                <a:effectLst/>
+                <a:latin typeface="Arial" panose="020B0604020202020204" pitchFamily="34" charset="0"/>
+              </a:rPr>
+              <a:t> → REST endpoint</a:t>
+            </a:r>
+          </a:p>
+          <a:p>
+            <a:pPr marL="0" marR="0" lvl="0" indent="0" algn="l" defTabSz="914400" rtl="0" eaLnBrk="0" fontAlgn="base" latinLnBrk="0" hangingPunct="0">
+              <a:lnSpc>
+                <a:spcPct val="150000"/>
+              </a:lnSpc>
+              <a:spcBef>
+                <a:spcPct val="0"/>
+              </a:spcBef>
+              <a:spcAft>
+                <a:spcPct val="0"/>
+              </a:spcAft>
+              <a:buClrTx/>
+              <a:buSzTx/>
+              <a:buFontTx/>
+              <a:buChar char="•"/>
+              <a:tabLst/>
+            </a:pPr>
+            <a:r>
+              <a:rPr kumimoji="0" lang="hu-HU" altLang="en-US" sz="2800" b="0" i="0" u="none" strike="noStrike" cap="none" normalizeH="0" baseline="0" dirty="0">
+                <a:ln>
+                  <a:noFill/>
+                </a:ln>
+                <a:solidFill>
+                  <a:schemeClr val="tx1"/>
+                </a:solidFill>
+                <a:effectLst/>
+                <a:latin typeface="Arial" panose="020B0604020202020204" pitchFamily="34" charset="0"/>
+              </a:rPr>
+              <a:t> </a:t>
+            </a:r>
+            <a:r>
+              <a:rPr kumimoji="0" lang="en-US" altLang="en-US" sz="2800" b="1" i="0" u="none" strike="noStrike" cap="none" normalizeH="0" baseline="0" dirty="0">
+                <a:ln>
+                  <a:noFill/>
+                </a:ln>
+                <a:solidFill>
+                  <a:schemeClr val="tx1"/>
+                </a:solidFill>
+                <a:effectLst/>
+                <a:latin typeface="Arial" panose="020B0604020202020204" pitchFamily="34" charset="0"/>
+              </a:rPr>
+              <a:t>Model</a:t>
+            </a:r>
+            <a:r>
+              <a:rPr kumimoji="0" lang="en-US" altLang="en-US" sz="2800" b="0" i="0" u="none" strike="noStrike" cap="none" normalizeH="0" baseline="0" dirty="0">
+                <a:ln>
+                  <a:noFill/>
+                </a:ln>
+                <a:solidFill>
+                  <a:schemeClr val="tx1"/>
+                </a:solidFill>
+                <a:effectLst/>
+                <a:latin typeface="Arial" panose="020B0604020202020204" pitchFamily="34" charset="0"/>
+              </a:rPr>
+              <a:t> → </a:t>
+            </a:r>
+            <a:r>
+              <a:rPr kumimoji="0" lang="en-US" altLang="en-US" sz="2800" b="0" i="0" u="none" strike="noStrike" cap="none" normalizeH="0" baseline="0" dirty="0" err="1">
+                <a:ln>
+                  <a:noFill/>
+                </a:ln>
+                <a:solidFill>
+                  <a:schemeClr val="tx1"/>
+                </a:solidFill>
+                <a:effectLst/>
+                <a:latin typeface="Arial" panose="020B0604020202020204" pitchFamily="34" charset="0"/>
+              </a:rPr>
+              <a:t>üzleti</a:t>
+            </a:r>
+            <a:r>
+              <a:rPr kumimoji="0" lang="en-US" altLang="en-US" sz="2800" b="0" i="0" u="none" strike="noStrike" cap="none" normalizeH="0" baseline="0" dirty="0">
+                <a:ln>
+                  <a:noFill/>
+                </a:ln>
+                <a:solidFill>
+                  <a:schemeClr val="tx1"/>
+                </a:solidFill>
+                <a:effectLst/>
+                <a:latin typeface="Arial" panose="020B0604020202020204" pitchFamily="34" charset="0"/>
+              </a:rPr>
+              <a:t> </a:t>
+            </a:r>
+            <a:r>
+              <a:rPr kumimoji="0" lang="en-US" altLang="en-US" sz="2800" b="0" i="0" u="none" strike="noStrike" cap="none" normalizeH="0" baseline="0" dirty="0" err="1">
+                <a:ln>
+                  <a:noFill/>
+                </a:ln>
+                <a:solidFill>
+                  <a:schemeClr val="tx1"/>
+                </a:solidFill>
+                <a:effectLst/>
+                <a:latin typeface="Arial" panose="020B0604020202020204" pitchFamily="34" charset="0"/>
+              </a:rPr>
+              <a:t>logika</a:t>
+            </a:r>
+            <a:endParaRPr kumimoji="0" lang="en-US" altLang="en-US" sz="2800" b="0" i="0" u="none" strike="noStrike" cap="none" normalizeH="0" baseline="0" dirty="0">
+              <a:ln>
+                <a:noFill/>
+              </a:ln>
+              <a:solidFill>
+                <a:schemeClr val="tx1"/>
+              </a:solidFill>
+              <a:effectLst/>
+              <a:latin typeface="Arial" panose="020B0604020202020204" pitchFamily="34" charset="0"/>
+            </a:endParaRPr>
+          </a:p>
+          <a:p>
+            <a:pPr marL="0" marR="0" lvl="0" indent="0" algn="l" defTabSz="914400" rtl="0" eaLnBrk="0" fontAlgn="base" latinLnBrk="0" hangingPunct="0">
+              <a:lnSpc>
+                <a:spcPct val="150000"/>
+              </a:lnSpc>
+              <a:spcBef>
+                <a:spcPct val="0"/>
+              </a:spcBef>
+              <a:spcAft>
+                <a:spcPct val="0"/>
+              </a:spcAft>
+              <a:buClrTx/>
+              <a:buSzTx/>
+              <a:buFontTx/>
+              <a:buChar char="•"/>
+              <a:tabLst/>
+            </a:pPr>
+            <a:r>
+              <a:rPr kumimoji="0" lang="hu-HU" altLang="en-US" sz="2800" b="0" i="0" u="none" strike="noStrike" cap="none" normalizeH="0" baseline="0" dirty="0">
+                <a:ln>
+                  <a:noFill/>
+                </a:ln>
+                <a:solidFill>
+                  <a:schemeClr val="tx1"/>
+                </a:solidFill>
+                <a:effectLst/>
+                <a:latin typeface="Arial" panose="020B0604020202020204" pitchFamily="34" charset="0"/>
+              </a:rPr>
+              <a:t> </a:t>
+            </a:r>
+            <a:r>
+              <a:rPr kumimoji="0" lang="en-US" altLang="en-US" sz="2800" b="1" i="0" u="none" strike="noStrike" cap="none" normalizeH="0" baseline="0" dirty="0">
+                <a:ln>
+                  <a:noFill/>
+                </a:ln>
+                <a:solidFill>
+                  <a:schemeClr val="tx1"/>
+                </a:solidFill>
+                <a:effectLst/>
+                <a:latin typeface="Arial" panose="020B0604020202020204" pitchFamily="34" charset="0"/>
+              </a:rPr>
+              <a:t>View</a:t>
+            </a:r>
+            <a:r>
+              <a:rPr kumimoji="0" lang="en-US" altLang="en-US" sz="2800" b="0" i="0" u="none" strike="noStrike" cap="none" normalizeH="0" baseline="0" dirty="0">
+                <a:ln>
+                  <a:noFill/>
+                </a:ln>
+                <a:solidFill>
+                  <a:schemeClr val="tx1"/>
+                </a:solidFill>
+                <a:effectLst/>
+                <a:latin typeface="Arial" panose="020B0604020202020204" pitchFamily="34" charset="0"/>
+              </a:rPr>
+              <a:t> → JSON </a:t>
+            </a:r>
+            <a:r>
+              <a:rPr kumimoji="0" lang="en-US" altLang="en-US" sz="2800" b="0" i="0" u="none" strike="noStrike" cap="none" normalizeH="0" baseline="0" dirty="0" err="1">
+                <a:ln>
+                  <a:noFill/>
+                </a:ln>
+                <a:solidFill>
+                  <a:schemeClr val="tx1"/>
+                </a:solidFill>
+                <a:effectLst/>
+                <a:latin typeface="Arial" panose="020B0604020202020204" pitchFamily="34" charset="0"/>
+              </a:rPr>
+              <a:t>válasz</a:t>
+            </a:r>
+            <a:endParaRPr kumimoji="0" lang="en-US" altLang="en-US" sz="2800" b="0" i="0" u="none" strike="noStrike" cap="none" normalizeH="0" baseline="0" dirty="0">
+              <a:ln>
+                <a:noFill/>
+              </a:ln>
+              <a:solidFill>
+                <a:schemeClr val="tx1"/>
+              </a:solidFill>
+              <a:effectLst/>
+              <a:latin typeface="Arial" panose="020B0604020202020204" pitchFamily="34" charset="0"/>
+            </a:endParaRPr>
+          </a:p>
+        </p:txBody>
+      </p:sp>
+    </p:spTree>
+    <p:extLst>
+      <p:ext uri="{BB962C8B-B14F-4D97-AF65-F5344CB8AC3E}">
+        <p14:creationId xmlns:p14="http://schemas.microsoft.com/office/powerpoint/2010/main" val="1673117147"/>
+      </p:ext>
+    </p:extLst>
+  </p:cSld>
+  <p:clrMapOvr>
+    <a:masterClrMapping/>
+  </p:clrMapOvr>
+</p:sld>
+</file>
+
+<file path=ppt/slides/slide11.xml><?xml version="1.0" encoding="utf-8"?>
+<p:sld xmlns:a="http://schemas.openxmlformats.org/drawingml/2006/main" xmlns:r="http://schemas.openxmlformats.org/officeDocument/2006/relationships" xmlns:p="http://schemas.openxmlformats.org/presentationml/2006/main">
+  <p:cSld>
+    <p:spTree>
+      <p:nvGrpSpPr>
+        <p:cNvPr id="1" name=""/>
+        <p:cNvGrpSpPr/>
+        <p:nvPr/>
+      </p:nvGrpSpPr>
+      <p:grpSpPr>
+        <a:xfrm>
+          <a:off x="0" y="0"/>
+          <a:ext cx="0" cy="0"/>
+          <a:chOff x="0" y="0"/>
+          <a:chExt cx="0" cy="0"/>
+        </a:xfrm>
+      </p:grpSpPr>
+      <p:sp>
+        <p:nvSpPr>
+          <p:cNvPr id="2" name="Title 1">
+            <a:extLst>
+              <a:ext uri="{FF2B5EF4-FFF2-40B4-BE49-F238E27FC236}">
+                <a16:creationId xmlns:a16="http://schemas.microsoft.com/office/drawing/2014/main" id="{B3DAB796-2617-5342-A839-C50F52934104}"/>
+              </a:ext>
+            </a:extLst>
+          </p:cNvPr>
+          <p:cNvSpPr>
+            <a:spLocks noGrp="1"/>
+          </p:cNvSpPr>
+          <p:nvPr>
+            <p:ph type="title"/>
+          </p:nvPr>
+        </p:nvSpPr>
+        <p:spPr>
+          <a:xfrm>
+            <a:off x="521208" y="978408"/>
+            <a:ext cx="11155680" cy="850392"/>
+          </a:xfrm>
+        </p:spPr>
+        <p:txBody>
+          <a:bodyPr/>
+          <a:lstStyle/>
+          <a:p>
+            <a:r>
+              <a:rPr lang="en-US" dirty="0"/>
+              <a:t>MVC és REST </a:t>
+            </a:r>
+            <a:r>
+              <a:rPr lang="en-US" dirty="0" err="1"/>
+              <a:t>kapcsolata</a:t>
+            </a:r>
+            <a:endParaRPr lang="en-US" dirty="0"/>
+          </a:p>
+        </p:txBody>
+      </p:sp>
+      <p:pic>
+        <p:nvPicPr>
+          <p:cNvPr id="11268" name="Picture 4" descr="Rest Api Java Spring Mvc Tutorial Rest Api Java Mvc Framework Tutorial  Repository Spring Mvc Rest">
+            <a:extLst>
+              <a:ext uri="{FF2B5EF4-FFF2-40B4-BE49-F238E27FC236}">
+                <a16:creationId xmlns:a16="http://schemas.microsoft.com/office/drawing/2014/main" id="{BC7E89FC-D81B-E1C2-C09F-E90ED1C4D46F}"/>
+              </a:ext>
+            </a:extLst>
+          </p:cNvPr>
+          <p:cNvPicPr>
+            <a:picLocks noChangeAspect="1" noChangeArrowheads="1"/>
+          </p:cNvPicPr>
+          <p:nvPr/>
+        </p:nvPicPr>
+        <p:blipFill>
+          <a:blip r:embed="rId2">
+            <a:extLst>
+              <a:ext uri="{28A0092B-C50C-407E-A947-70E740481C1C}">
+                <a14:useLocalDpi xmlns:a14="http://schemas.microsoft.com/office/drawing/2010/main" val="0"/>
+              </a:ext>
+            </a:extLst>
+          </a:blip>
+          <a:srcRect/>
+          <a:stretch>
+            <a:fillRect/>
+          </a:stretch>
+        </p:blipFill>
+        <p:spPr bwMode="auto">
+          <a:xfrm>
+            <a:off x="1932309" y="1956120"/>
+            <a:ext cx="6690830" cy="4463029"/>
+          </a:xfrm>
+          <a:prstGeom prst="rect">
+            <a:avLst/>
+          </a:prstGeom>
+          <a:noFill/>
+          <a:extLst>
+            <a:ext uri="{909E8E84-426E-40DD-AFC4-6F175D3DCCD1}">
+              <a14:hiddenFill xmlns:a14="http://schemas.microsoft.com/office/drawing/2010/main">
+                <a:solidFill>
+                  <a:srgbClr val="FFFFFF"/>
+                </a:solidFill>
+              </a14:hiddenFill>
+            </a:ext>
+          </a:extLst>
+        </p:spPr>
+      </p:pic>
+    </p:spTree>
+    <p:extLst>
+      <p:ext uri="{BB962C8B-B14F-4D97-AF65-F5344CB8AC3E}">
+        <p14:creationId xmlns:p14="http://schemas.microsoft.com/office/powerpoint/2010/main" val="3699848474"/>
+      </p:ext>
+    </p:extLst>
+  </p:cSld>
+  <p:clrMapOvr>
+    <a:masterClrMapping/>
+  </p:clrMapOvr>
+</p:sld>
+</file>
+
+<file path=ppt/slides/slide12.xml><?xml version="1.0" encoding="utf-8"?>
+<p:sld xmlns:a="http://schemas.openxmlformats.org/drawingml/2006/main" xmlns:r="http://schemas.openxmlformats.org/officeDocument/2006/relationships" xmlns:p="http://schemas.openxmlformats.org/presentationml/2006/main">
+  <p:cSld>
+    <p:spTree>
+      <p:nvGrpSpPr>
+        <p:cNvPr id="1" name=""/>
+        <p:cNvGrpSpPr/>
+        <p:nvPr/>
+      </p:nvGrpSpPr>
+      <p:grpSpPr>
+        <a:xfrm>
+          <a:off x="0" y="0"/>
+          <a:ext cx="0" cy="0"/>
+          <a:chOff x="0" y="0"/>
+          <a:chExt cx="0" cy="0"/>
+        </a:xfrm>
+      </p:grpSpPr>
+      <p:sp>
+        <p:nvSpPr>
+          <p:cNvPr id="2" name="Title 1">
+            <a:extLst>
+              <a:ext uri="{FF2B5EF4-FFF2-40B4-BE49-F238E27FC236}">
                 <a16:creationId xmlns:a16="http://schemas.microsoft.com/office/drawing/2014/main" id="{57AA0A1F-87F0-CEF9-98FE-56CAC13F6C97}"/>
               </a:ext>
             </a:extLst>
@@ -18499,7 +19218,7 @@
 </p:sld>
 </file>
 
-<file path=ppt/slides/slide11.xml><?xml version="1.0" encoding="utf-8"?>
+<file path=ppt/slides/slide13.xml><?xml version="1.0" encoding="utf-8"?>
 <p:sld xmlns:a="http://schemas.openxmlformats.org/drawingml/2006/main" xmlns:r="http://schemas.openxmlformats.org/officeDocument/2006/relationships" xmlns:p="http://schemas.openxmlformats.org/presentationml/2006/main">
   <p:cSld>
     <p:spTree>
@@ -19123,7 +19842,7 @@
 </p:sld>
 </file>
 
-<file path=ppt/slides/slide12.xml><?xml version="1.0" encoding="utf-8"?>
+<file path=ppt/slides/slide14.xml><?xml version="1.0" encoding="utf-8"?>
 <p:sld xmlns:a="http://schemas.openxmlformats.org/drawingml/2006/main" xmlns:r="http://schemas.openxmlformats.org/officeDocument/2006/relationships" xmlns:p="http://schemas.openxmlformats.org/presentationml/2006/main">
   <p:cSld>
     <p:spTree>
@@ -19688,7 +20407,7 @@
 </p:sld>
 </file>
 
-<file path=ppt/slides/slide13.xml><?xml version="1.0" encoding="utf-8"?>
+<file path=ppt/slides/slide15.xml><?xml version="1.0" encoding="utf-8"?>
 <p:sld xmlns:a="http://schemas.openxmlformats.org/drawingml/2006/main" xmlns:r="http://schemas.openxmlformats.org/officeDocument/2006/relationships" xmlns:p="http://schemas.openxmlformats.org/presentationml/2006/main">
   <p:cSld>
     <p:spTree>
@@ -20193,7 +20912,7 @@
 </p:sld>
 </file>
 
-<file path=ppt/slides/slide14.xml><?xml version="1.0" encoding="utf-8"?>
+<file path=ppt/slides/slide16.xml><?xml version="1.0" encoding="utf-8"?>
 <p:sld xmlns:a="http://schemas.openxmlformats.org/drawingml/2006/main" xmlns:r="http://schemas.openxmlformats.org/officeDocument/2006/relationships" xmlns:p="http://schemas.openxmlformats.org/presentationml/2006/main">
   <p:cSld>
     <p:spTree>
@@ -20312,7 +21031,7 @@
 </p:sld>
 </file>
 
-<file path=ppt/slides/slide15.xml><?xml version="1.0" encoding="utf-8"?>
+<file path=ppt/slides/slide17.xml><?xml version="1.0" encoding="utf-8"?>
 <p:sld xmlns:a="http://schemas.openxmlformats.org/drawingml/2006/main" xmlns:r="http://schemas.openxmlformats.org/officeDocument/2006/relationships" xmlns:p="http://schemas.openxmlformats.org/presentationml/2006/main">
   <p:cSld>
     <p:spTree>
@@ -20420,729 +21139,6 @@
     <p:extLst>
       <p:ext uri="{BB962C8B-B14F-4D97-AF65-F5344CB8AC3E}">
         <p14:creationId xmlns:p14="http://schemas.microsoft.com/office/powerpoint/2010/main" val="1717315739"/>
-      </p:ext>
-    </p:extLst>
-  </p:cSld>
-  <p:clrMapOvr>
-    <a:masterClrMapping/>
-  </p:clrMapOvr>
-</p:sld>
-</file>
-
-<file path=ppt/slides/slide16.xml><?xml version="1.0" encoding="utf-8"?>
-<p:sld xmlns:a="http://schemas.openxmlformats.org/drawingml/2006/main" xmlns:r="http://schemas.openxmlformats.org/officeDocument/2006/relationships" xmlns:p="http://schemas.openxmlformats.org/presentationml/2006/main">
-  <p:cSld>
-    <p:spTree>
-      <p:nvGrpSpPr>
-        <p:cNvPr id="1" name=""/>
-        <p:cNvGrpSpPr/>
-        <p:nvPr/>
-      </p:nvGrpSpPr>
-      <p:grpSpPr>
-        <a:xfrm>
-          <a:off x="0" y="0"/>
-          <a:ext cx="0" cy="0"/>
-          <a:chOff x="0" y="0"/>
-          <a:chExt cx="0" cy="0"/>
-        </a:xfrm>
-      </p:grpSpPr>
-      <p:sp>
-        <p:nvSpPr>
-          <p:cNvPr id="2" name="Title 1">
-            <a:extLst>
-              <a:ext uri="{FF2B5EF4-FFF2-40B4-BE49-F238E27FC236}">
-                <a16:creationId xmlns:a16="http://schemas.microsoft.com/office/drawing/2014/main" id="{2A2BFAF2-1FFE-D1E7-9DA9-636190A3FFD6}"/>
-              </a:ext>
-            </a:extLst>
-          </p:cNvPr>
-          <p:cNvSpPr>
-            <a:spLocks noGrp="1"/>
-          </p:cNvSpPr>
-          <p:nvPr>
-            <p:ph type="title"/>
-          </p:nvPr>
-        </p:nvSpPr>
-        <p:spPr>
-          <a:xfrm>
-            <a:off x="521208" y="978408"/>
-            <a:ext cx="11155680" cy="861967"/>
-          </a:xfrm>
-        </p:spPr>
-        <p:txBody>
-          <a:bodyPr>
-            <a:normAutofit/>
-          </a:bodyPr>
-          <a:lstStyle/>
-          <a:p>
-            <a:r>
-              <a:rPr lang="en-US" sz="4000" dirty="0"/>
-              <a:t>MVC és REST </a:t>
-            </a:r>
-            <a:r>
-              <a:rPr lang="en-US" sz="4000" dirty="0" err="1"/>
-              <a:t>kapcsolata</a:t>
-            </a:r>
-            <a:endParaRPr lang="en-US" sz="4000" dirty="0"/>
-          </a:p>
-        </p:txBody>
-      </p:sp>
-      <p:sp>
-        <p:nvSpPr>
-          <p:cNvPr id="4" name="Rectangle 1">
-            <a:extLst>
-              <a:ext uri="{FF2B5EF4-FFF2-40B4-BE49-F238E27FC236}">
-                <a16:creationId xmlns:a16="http://schemas.microsoft.com/office/drawing/2014/main" id="{A4B6CCC7-4697-F699-5CE8-E9AE1062AB6D}"/>
-              </a:ext>
-            </a:extLst>
-          </p:cNvPr>
-          <p:cNvSpPr>
-            <a:spLocks noGrp="1" noChangeArrowheads="1"/>
-          </p:cNvSpPr>
-          <p:nvPr>
-            <p:ph idx="1"/>
-          </p:nvPr>
-        </p:nvSpPr>
-        <p:spPr bwMode="auto">
-          <a:xfrm>
-            <a:off x="520700" y="2083037"/>
-            <a:ext cx="8032991" cy="3890489"/>
-          </a:xfrm>
-          <a:prstGeom prst="rect">
-            <a:avLst/>
-          </a:prstGeom>
-          <a:noFill/>
-          <a:ln>
-            <a:noFill/>
-          </a:ln>
-          <a:effectLst/>
-          <a:extLst>
-            <a:ext uri="{909E8E84-426E-40DD-AFC4-6F175D3DCCD1}">
-              <a14:hiddenFill xmlns:a14="http://schemas.microsoft.com/office/drawing/2010/main">
-                <a:solidFill>
-                  <a:schemeClr val="accent1"/>
-                </a:solidFill>
-              </a14:hiddenFill>
-            </a:ext>
-            <a:ext uri="{91240B29-F687-4F45-9708-019B960494DF}">
-              <a14:hiddenLine xmlns:a14="http://schemas.microsoft.com/office/drawing/2010/main" w="9525">
-                <a:solidFill>
-                  <a:schemeClr val="tx1"/>
-                </a:solidFill>
-                <a:miter lim="800000"/>
-                <a:headEnd/>
-                <a:tailEnd/>
-              </a14:hiddenLine>
-            </a:ext>
-            <a:ext uri="{AF507438-7753-43E0-B8FC-AC1667EBCBE1}">
-              <a14:hiddenEffects xmlns:a14="http://schemas.microsoft.com/office/drawing/2010/main">
-                <a:effectLst>
-                  <a:outerShdw dist="35921" dir="2700000" algn="ctr" rotWithShape="0">
-                    <a:schemeClr val="bg2"/>
-                  </a:outerShdw>
-                </a:effectLst>
-              </a14:hiddenEffects>
-            </a:ext>
-          </a:extLst>
-        </p:spPr>
-        <p:txBody>
-          <a:bodyPr vert="horz" wrap="square" lIns="91440" tIns="45720" rIns="91440" bIns="45720" numCol="1" anchor="ctr" anchorCtr="0" compatLnSpc="1">
-            <a:prstTxWarp prst="textNoShape">
-              <a:avLst/>
-            </a:prstTxWarp>
-            <a:spAutoFit/>
-          </a:bodyPr>
-          <a:lstStyle/>
-          <a:p>
-            <a:pPr marL="0" marR="0" lvl="0" indent="0" algn="l" defTabSz="914400" rtl="0" eaLnBrk="0" fontAlgn="base" latinLnBrk="0" hangingPunct="0">
-              <a:lnSpc>
-                <a:spcPct val="150000"/>
-              </a:lnSpc>
-              <a:spcBef>
-                <a:spcPct val="0"/>
-              </a:spcBef>
-              <a:spcAft>
-                <a:spcPct val="0"/>
-              </a:spcAft>
-              <a:buClrTx/>
-              <a:buSzTx/>
-              <a:buFontTx/>
-              <a:buChar char="•"/>
-              <a:tabLst/>
-            </a:pPr>
-            <a:r>
-              <a:rPr kumimoji="0" lang="hu-HU" altLang="en-US" sz="2800" b="0" i="0" u="none" strike="noStrike" cap="none" normalizeH="0" baseline="0" dirty="0">
-                <a:ln>
-                  <a:noFill/>
-                </a:ln>
-                <a:solidFill>
-                  <a:schemeClr val="tx1"/>
-                </a:solidFill>
-                <a:effectLst/>
-                <a:latin typeface="Arial" panose="020B0604020202020204" pitchFamily="34" charset="0"/>
-              </a:rPr>
-              <a:t> </a:t>
-            </a:r>
-            <a:r>
-              <a:rPr kumimoji="0" lang="en-US" altLang="en-US" sz="2800" b="0" i="0" u="none" strike="noStrike" cap="none" normalizeH="0" baseline="0" dirty="0">
-                <a:ln>
-                  <a:noFill/>
-                </a:ln>
-                <a:solidFill>
-                  <a:schemeClr val="tx1"/>
-                </a:solidFill>
-                <a:effectLst/>
-                <a:latin typeface="Arial" panose="020B0604020202020204" pitchFamily="34" charset="0"/>
-              </a:rPr>
-              <a:t>MVC a </a:t>
-            </a:r>
-            <a:r>
-              <a:rPr kumimoji="0" lang="en-US" altLang="en-US" sz="2800" b="0" i="0" u="none" strike="noStrike" cap="none" normalizeH="0" baseline="0" dirty="0" err="1">
-                <a:ln>
-                  <a:noFill/>
-                </a:ln>
-                <a:solidFill>
-                  <a:schemeClr val="tx1"/>
-                </a:solidFill>
-                <a:effectLst/>
-                <a:latin typeface="Arial" panose="020B0604020202020204" pitchFamily="34" charset="0"/>
-              </a:rPr>
-              <a:t>szerveren</a:t>
-            </a:r>
-            <a:endParaRPr kumimoji="0" lang="en-US" altLang="en-US" sz="2800" b="0" i="0" u="none" strike="noStrike" cap="none" normalizeH="0" baseline="0" dirty="0">
-              <a:ln>
-                <a:noFill/>
-              </a:ln>
-              <a:solidFill>
-                <a:schemeClr val="tx1"/>
-              </a:solidFill>
-              <a:effectLst/>
-              <a:latin typeface="Arial" panose="020B0604020202020204" pitchFamily="34" charset="0"/>
-            </a:endParaRPr>
-          </a:p>
-          <a:p>
-            <a:pPr marL="0" marR="0" lvl="0" indent="0" algn="l" defTabSz="914400" rtl="0" eaLnBrk="0" fontAlgn="base" latinLnBrk="0" hangingPunct="0">
-              <a:lnSpc>
-                <a:spcPct val="150000"/>
-              </a:lnSpc>
-              <a:spcBef>
-                <a:spcPct val="0"/>
-              </a:spcBef>
-              <a:spcAft>
-                <a:spcPct val="0"/>
-              </a:spcAft>
-              <a:buClrTx/>
-              <a:buSzTx/>
-              <a:buFontTx/>
-              <a:buChar char="•"/>
-              <a:tabLst/>
-            </a:pPr>
-            <a:r>
-              <a:rPr kumimoji="0" lang="hu-HU" altLang="en-US" sz="2800" b="0" i="0" u="none" strike="noStrike" cap="none" normalizeH="0" baseline="0" dirty="0">
-                <a:ln>
-                  <a:noFill/>
-                </a:ln>
-                <a:solidFill>
-                  <a:schemeClr val="tx1"/>
-                </a:solidFill>
-                <a:effectLst/>
-                <a:latin typeface="Arial" panose="020B0604020202020204" pitchFamily="34" charset="0"/>
-              </a:rPr>
-              <a:t> </a:t>
-            </a:r>
-            <a:r>
-              <a:rPr kumimoji="0" lang="en-US" altLang="en-US" sz="2800" b="0" i="0" u="none" strike="noStrike" cap="none" normalizeH="0" baseline="0" dirty="0">
-                <a:ln>
-                  <a:noFill/>
-                </a:ln>
-                <a:solidFill>
-                  <a:schemeClr val="tx1"/>
-                </a:solidFill>
-                <a:effectLst/>
-                <a:latin typeface="Arial" panose="020B0604020202020204" pitchFamily="34" charset="0"/>
-              </a:rPr>
-              <a:t>REST API mint backend </a:t>
-            </a:r>
-            <a:r>
-              <a:rPr kumimoji="0" lang="en-US" altLang="en-US" sz="2800" b="0" i="0" u="none" strike="noStrike" cap="none" normalizeH="0" baseline="0" dirty="0" err="1">
-                <a:ln>
-                  <a:noFill/>
-                </a:ln>
-                <a:solidFill>
-                  <a:schemeClr val="tx1"/>
-                </a:solidFill>
-                <a:effectLst/>
-                <a:latin typeface="Arial" panose="020B0604020202020204" pitchFamily="34" charset="0"/>
-              </a:rPr>
-              <a:t>interfész</a:t>
-            </a:r>
-            <a:endParaRPr kumimoji="0" lang="en-US" altLang="en-US" sz="2800" b="0" i="0" u="none" strike="noStrike" cap="none" normalizeH="0" baseline="0" dirty="0">
-              <a:ln>
-                <a:noFill/>
-              </a:ln>
-              <a:solidFill>
-                <a:schemeClr val="tx1"/>
-              </a:solidFill>
-              <a:effectLst/>
-              <a:latin typeface="Arial" panose="020B0604020202020204" pitchFamily="34" charset="0"/>
-            </a:endParaRPr>
-          </a:p>
-          <a:p>
-            <a:pPr marL="0" marR="0" lvl="0" indent="0" algn="l" defTabSz="914400" rtl="0" eaLnBrk="0" fontAlgn="base" latinLnBrk="0" hangingPunct="0">
-              <a:lnSpc>
-                <a:spcPct val="150000"/>
-              </a:lnSpc>
-              <a:spcBef>
-                <a:spcPct val="0"/>
-              </a:spcBef>
-              <a:spcAft>
-                <a:spcPct val="0"/>
-              </a:spcAft>
-              <a:buClrTx/>
-              <a:buSzTx/>
-              <a:buFontTx/>
-              <a:buChar char="•"/>
-              <a:tabLst/>
-            </a:pPr>
-            <a:r>
-              <a:rPr kumimoji="0" lang="hu-HU" altLang="en-US" sz="2800" b="0" i="0" u="none" strike="noStrike" cap="none" normalizeH="0" baseline="0" dirty="0">
-                <a:ln>
-                  <a:noFill/>
-                </a:ln>
-                <a:solidFill>
-                  <a:schemeClr val="tx1"/>
-                </a:solidFill>
-                <a:effectLst/>
-                <a:latin typeface="Arial" panose="020B0604020202020204" pitchFamily="34" charset="0"/>
-              </a:rPr>
-              <a:t> </a:t>
-            </a:r>
-            <a:r>
-              <a:rPr kumimoji="0" lang="en-US" altLang="en-US" sz="2800" b="0" i="0" u="none" strike="noStrike" cap="none" normalizeH="0" baseline="0" dirty="0">
-                <a:ln>
-                  <a:noFill/>
-                </a:ln>
-                <a:solidFill>
-                  <a:schemeClr val="tx1"/>
-                </a:solidFill>
-                <a:effectLst/>
-                <a:latin typeface="Arial" panose="020B0604020202020204" pitchFamily="34" charset="0"/>
-              </a:rPr>
-              <a:t>Frontend </a:t>
-            </a:r>
-            <a:r>
-              <a:rPr kumimoji="0" lang="en-US" altLang="en-US" sz="2800" b="0" i="0" u="none" strike="noStrike" cap="none" normalizeH="0" baseline="0" dirty="0" err="1">
-                <a:ln>
-                  <a:noFill/>
-                </a:ln>
-                <a:solidFill>
-                  <a:schemeClr val="tx1"/>
-                </a:solidFill>
-                <a:effectLst/>
-                <a:latin typeface="Arial" panose="020B0604020202020204" pitchFamily="34" charset="0"/>
-              </a:rPr>
-              <a:t>külön</a:t>
-            </a:r>
-            <a:r>
-              <a:rPr kumimoji="0" lang="en-US" altLang="en-US" sz="2800" b="0" i="0" u="none" strike="noStrike" cap="none" normalizeH="0" baseline="0" dirty="0">
-                <a:ln>
-                  <a:noFill/>
-                </a:ln>
-                <a:solidFill>
-                  <a:schemeClr val="tx1"/>
-                </a:solidFill>
-                <a:effectLst/>
-                <a:latin typeface="Arial" panose="020B0604020202020204" pitchFamily="34" charset="0"/>
-              </a:rPr>
-              <a:t> </a:t>
-            </a:r>
-            <a:r>
-              <a:rPr kumimoji="0" lang="en-US" altLang="en-US" sz="2800" b="0" i="0" u="none" strike="noStrike" cap="none" normalizeH="0" baseline="0" dirty="0" err="1">
-                <a:ln>
-                  <a:noFill/>
-                </a:ln>
-                <a:solidFill>
-                  <a:schemeClr val="tx1"/>
-                </a:solidFill>
-                <a:effectLst/>
-                <a:latin typeface="Arial" panose="020B0604020202020204" pitchFamily="34" charset="0"/>
-              </a:rPr>
-              <a:t>alkalmazás</a:t>
-            </a:r>
-            <a:endParaRPr kumimoji="0" lang="en-US" altLang="en-US" sz="2800" b="0" i="0" u="none" strike="noStrike" cap="none" normalizeH="0" baseline="0" dirty="0">
-              <a:ln>
-                <a:noFill/>
-              </a:ln>
-              <a:solidFill>
-                <a:schemeClr val="tx1"/>
-              </a:solidFill>
-              <a:effectLst/>
-              <a:latin typeface="Arial" panose="020B0604020202020204" pitchFamily="34" charset="0"/>
-            </a:endParaRPr>
-          </a:p>
-          <a:p>
-            <a:pPr marL="0" marR="0" lvl="0" indent="0" algn="l" defTabSz="914400" rtl="0" eaLnBrk="0" fontAlgn="base" latinLnBrk="0" hangingPunct="0">
-              <a:lnSpc>
-                <a:spcPct val="150000"/>
-              </a:lnSpc>
-              <a:spcBef>
-                <a:spcPct val="0"/>
-              </a:spcBef>
-              <a:spcAft>
-                <a:spcPct val="0"/>
-              </a:spcAft>
-              <a:buClrTx/>
-              <a:buSzTx/>
-              <a:buFontTx/>
-              <a:buChar char="•"/>
-              <a:tabLst/>
-            </a:pPr>
-            <a:r>
-              <a:rPr kumimoji="0" lang="hu-HU" altLang="en-US" sz="2800" b="0" i="0" u="none" strike="noStrike" cap="none" normalizeH="0" baseline="0" dirty="0">
-                <a:ln>
-                  <a:noFill/>
-                </a:ln>
-                <a:solidFill>
-                  <a:schemeClr val="tx1"/>
-                </a:solidFill>
-                <a:effectLst/>
-                <a:latin typeface="Arial" panose="020B0604020202020204" pitchFamily="34" charset="0"/>
-              </a:rPr>
-              <a:t> </a:t>
-            </a:r>
-            <a:r>
-              <a:rPr kumimoji="0" lang="en-US" altLang="en-US" sz="2800" b="1" i="0" u="none" strike="noStrike" cap="none" normalizeH="0" baseline="0" dirty="0">
-                <a:ln>
-                  <a:noFill/>
-                </a:ln>
-                <a:solidFill>
-                  <a:schemeClr val="tx1"/>
-                </a:solidFill>
-                <a:effectLst/>
-                <a:latin typeface="Arial" panose="020B0604020202020204" pitchFamily="34" charset="0"/>
-              </a:rPr>
-              <a:t>Controller</a:t>
-            </a:r>
-            <a:r>
-              <a:rPr kumimoji="0" lang="en-US" altLang="en-US" sz="2800" b="0" i="0" u="none" strike="noStrike" cap="none" normalizeH="0" baseline="0" dirty="0">
-                <a:ln>
-                  <a:noFill/>
-                </a:ln>
-                <a:solidFill>
-                  <a:schemeClr val="tx1"/>
-                </a:solidFill>
-                <a:effectLst/>
-                <a:latin typeface="Arial" panose="020B0604020202020204" pitchFamily="34" charset="0"/>
-              </a:rPr>
-              <a:t> → REST endpoint</a:t>
-            </a:r>
-          </a:p>
-          <a:p>
-            <a:pPr marL="0" marR="0" lvl="0" indent="0" algn="l" defTabSz="914400" rtl="0" eaLnBrk="0" fontAlgn="base" latinLnBrk="0" hangingPunct="0">
-              <a:lnSpc>
-                <a:spcPct val="150000"/>
-              </a:lnSpc>
-              <a:spcBef>
-                <a:spcPct val="0"/>
-              </a:spcBef>
-              <a:spcAft>
-                <a:spcPct val="0"/>
-              </a:spcAft>
-              <a:buClrTx/>
-              <a:buSzTx/>
-              <a:buFontTx/>
-              <a:buChar char="•"/>
-              <a:tabLst/>
-            </a:pPr>
-            <a:r>
-              <a:rPr kumimoji="0" lang="hu-HU" altLang="en-US" sz="2800" b="0" i="0" u="none" strike="noStrike" cap="none" normalizeH="0" baseline="0" dirty="0">
-                <a:ln>
-                  <a:noFill/>
-                </a:ln>
-                <a:solidFill>
-                  <a:schemeClr val="tx1"/>
-                </a:solidFill>
-                <a:effectLst/>
-                <a:latin typeface="Arial" panose="020B0604020202020204" pitchFamily="34" charset="0"/>
-              </a:rPr>
-              <a:t> </a:t>
-            </a:r>
-            <a:r>
-              <a:rPr kumimoji="0" lang="en-US" altLang="en-US" sz="2800" b="1" i="0" u="none" strike="noStrike" cap="none" normalizeH="0" baseline="0" dirty="0">
-                <a:ln>
-                  <a:noFill/>
-                </a:ln>
-                <a:solidFill>
-                  <a:schemeClr val="tx1"/>
-                </a:solidFill>
-                <a:effectLst/>
-                <a:latin typeface="Arial" panose="020B0604020202020204" pitchFamily="34" charset="0"/>
-              </a:rPr>
-              <a:t>Model</a:t>
-            </a:r>
-            <a:r>
-              <a:rPr kumimoji="0" lang="en-US" altLang="en-US" sz="2800" b="0" i="0" u="none" strike="noStrike" cap="none" normalizeH="0" baseline="0" dirty="0">
-                <a:ln>
-                  <a:noFill/>
-                </a:ln>
-                <a:solidFill>
-                  <a:schemeClr val="tx1"/>
-                </a:solidFill>
-                <a:effectLst/>
-                <a:latin typeface="Arial" panose="020B0604020202020204" pitchFamily="34" charset="0"/>
-              </a:rPr>
-              <a:t> → </a:t>
-            </a:r>
-            <a:r>
-              <a:rPr kumimoji="0" lang="en-US" altLang="en-US" sz="2800" b="0" i="0" u="none" strike="noStrike" cap="none" normalizeH="0" baseline="0" dirty="0" err="1">
-                <a:ln>
-                  <a:noFill/>
-                </a:ln>
-                <a:solidFill>
-                  <a:schemeClr val="tx1"/>
-                </a:solidFill>
-                <a:effectLst/>
-                <a:latin typeface="Arial" panose="020B0604020202020204" pitchFamily="34" charset="0"/>
-              </a:rPr>
-              <a:t>üzleti</a:t>
-            </a:r>
-            <a:r>
-              <a:rPr kumimoji="0" lang="en-US" altLang="en-US" sz="2800" b="0" i="0" u="none" strike="noStrike" cap="none" normalizeH="0" baseline="0" dirty="0">
-                <a:ln>
-                  <a:noFill/>
-                </a:ln>
-                <a:solidFill>
-                  <a:schemeClr val="tx1"/>
-                </a:solidFill>
-                <a:effectLst/>
-                <a:latin typeface="Arial" panose="020B0604020202020204" pitchFamily="34" charset="0"/>
-              </a:rPr>
-              <a:t> </a:t>
-            </a:r>
-            <a:r>
-              <a:rPr kumimoji="0" lang="en-US" altLang="en-US" sz="2800" b="0" i="0" u="none" strike="noStrike" cap="none" normalizeH="0" baseline="0" dirty="0" err="1">
-                <a:ln>
-                  <a:noFill/>
-                </a:ln>
-                <a:solidFill>
-                  <a:schemeClr val="tx1"/>
-                </a:solidFill>
-                <a:effectLst/>
-                <a:latin typeface="Arial" panose="020B0604020202020204" pitchFamily="34" charset="0"/>
-              </a:rPr>
-              <a:t>logika</a:t>
-            </a:r>
-            <a:endParaRPr kumimoji="0" lang="en-US" altLang="en-US" sz="2800" b="0" i="0" u="none" strike="noStrike" cap="none" normalizeH="0" baseline="0" dirty="0">
-              <a:ln>
-                <a:noFill/>
-              </a:ln>
-              <a:solidFill>
-                <a:schemeClr val="tx1"/>
-              </a:solidFill>
-              <a:effectLst/>
-              <a:latin typeface="Arial" panose="020B0604020202020204" pitchFamily="34" charset="0"/>
-            </a:endParaRPr>
-          </a:p>
-          <a:p>
-            <a:pPr marL="0" marR="0" lvl="0" indent="0" algn="l" defTabSz="914400" rtl="0" eaLnBrk="0" fontAlgn="base" latinLnBrk="0" hangingPunct="0">
-              <a:lnSpc>
-                <a:spcPct val="150000"/>
-              </a:lnSpc>
-              <a:spcBef>
-                <a:spcPct val="0"/>
-              </a:spcBef>
-              <a:spcAft>
-                <a:spcPct val="0"/>
-              </a:spcAft>
-              <a:buClrTx/>
-              <a:buSzTx/>
-              <a:buFontTx/>
-              <a:buChar char="•"/>
-              <a:tabLst/>
-            </a:pPr>
-            <a:r>
-              <a:rPr kumimoji="0" lang="hu-HU" altLang="en-US" sz="2800" b="0" i="0" u="none" strike="noStrike" cap="none" normalizeH="0" baseline="0" dirty="0">
-                <a:ln>
-                  <a:noFill/>
-                </a:ln>
-                <a:solidFill>
-                  <a:schemeClr val="tx1"/>
-                </a:solidFill>
-                <a:effectLst/>
-                <a:latin typeface="Arial" panose="020B0604020202020204" pitchFamily="34" charset="0"/>
-              </a:rPr>
-              <a:t> </a:t>
-            </a:r>
-            <a:r>
-              <a:rPr kumimoji="0" lang="en-US" altLang="en-US" sz="2800" b="1" i="0" u="none" strike="noStrike" cap="none" normalizeH="0" baseline="0" dirty="0">
-                <a:ln>
-                  <a:noFill/>
-                </a:ln>
-                <a:solidFill>
-                  <a:schemeClr val="tx1"/>
-                </a:solidFill>
-                <a:effectLst/>
-                <a:latin typeface="Arial" panose="020B0604020202020204" pitchFamily="34" charset="0"/>
-              </a:rPr>
-              <a:t>View</a:t>
-            </a:r>
-            <a:r>
-              <a:rPr kumimoji="0" lang="en-US" altLang="en-US" sz="2800" b="0" i="0" u="none" strike="noStrike" cap="none" normalizeH="0" baseline="0" dirty="0">
-                <a:ln>
-                  <a:noFill/>
-                </a:ln>
-                <a:solidFill>
-                  <a:schemeClr val="tx1"/>
-                </a:solidFill>
-                <a:effectLst/>
-                <a:latin typeface="Arial" panose="020B0604020202020204" pitchFamily="34" charset="0"/>
-              </a:rPr>
-              <a:t> → JSON </a:t>
-            </a:r>
-            <a:r>
-              <a:rPr kumimoji="0" lang="en-US" altLang="en-US" sz="2800" b="0" i="0" u="none" strike="noStrike" cap="none" normalizeH="0" baseline="0" dirty="0" err="1">
-                <a:ln>
-                  <a:noFill/>
-                </a:ln>
-                <a:solidFill>
-                  <a:schemeClr val="tx1"/>
-                </a:solidFill>
-                <a:effectLst/>
-                <a:latin typeface="Arial" panose="020B0604020202020204" pitchFamily="34" charset="0"/>
-              </a:rPr>
-              <a:t>válasz</a:t>
-            </a:r>
-            <a:endParaRPr kumimoji="0" lang="en-US" altLang="en-US" sz="2800" b="0" i="0" u="none" strike="noStrike" cap="none" normalizeH="0" baseline="0" dirty="0">
-              <a:ln>
-                <a:noFill/>
-              </a:ln>
-              <a:solidFill>
-                <a:schemeClr val="tx1"/>
-              </a:solidFill>
-              <a:effectLst/>
-              <a:latin typeface="Arial" panose="020B0604020202020204" pitchFamily="34" charset="0"/>
-            </a:endParaRPr>
-          </a:p>
-        </p:txBody>
-      </p:sp>
-    </p:spTree>
-    <p:extLst>
-      <p:ext uri="{BB962C8B-B14F-4D97-AF65-F5344CB8AC3E}">
-        <p14:creationId xmlns:p14="http://schemas.microsoft.com/office/powerpoint/2010/main" val="1673117147"/>
-      </p:ext>
-    </p:extLst>
-  </p:cSld>
-  <p:clrMapOvr>
-    <a:masterClrMapping/>
-  </p:clrMapOvr>
-</p:sld>
-</file>
-
-<file path=ppt/slides/slide17.xml><?xml version="1.0" encoding="utf-8"?>
-<p:sld xmlns:a="http://schemas.openxmlformats.org/drawingml/2006/main" xmlns:r="http://schemas.openxmlformats.org/officeDocument/2006/relationships" xmlns:p="http://schemas.openxmlformats.org/presentationml/2006/main">
-  <p:cSld>
-    <p:spTree>
-      <p:nvGrpSpPr>
-        <p:cNvPr id="1" name=""/>
-        <p:cNvGrpSpPr/>
-        <p:nvPr/>
-      </p:nvGrpSpPr>
-      <p:grpSpPr>
-        <a:xfrm>
-          <a:off x="0" y="0"/>
-          <a:ext cx="0" cy="0"/>
-          <a:chOff x="0" y="0"/>
-          <a:chExt cx="0" cy="0"/>
-        </a:xfrm>
-      </p:grpSpPr>
-      <p:sp>
-        <p:nvSpPr>
-          <p:cNvPr id="2" name="Title 1">
-            <a:extLst>
-              <a:ext uri="{FF2B5EF4-FFF2-40B4-BE49-F238E27FC236}">
-                <a16:creationId xmlns:a16="http://schemas.microsoft.com/office/drawing/2014/main" id="{B3DAB796-2617-5342-A839-C50F52934104}"/>
-              </a:ext>
-            </a:extLst>
-          </p:cNvPr>
-          <p:cNvSpPr>
-            <a:spLocks noGrp="1"/>
-          </p:cNvSpPr>
-          <p:nvPr>
-            <p:ph type="title"/>
-          </p:nvPr>
-        </p:nvSpPr>
-        <p:spPr>
-          <a:xfrm>
-            <a:off x="521208" y="978408"/>
-            <a:ext cx="11155680" cy="850392"/>
-          </a:xfrm>
-        </p:spPr>
-        <p:txBody>
-          <a:bodyPr/>
-          <a:lstStyle/>
-          <a:p>
-            <a:r>
-              <a:rPr lang="en-US" dirty="0"/>
-              <a:t>MVC és REST </a:t>
-            </a:r>
-            <a:r>
-              <a:rPr lang="en-US" dirty="0" err="1"/>
-              <a:t>kapcsolata</a:t>
-            </a:r>
-            <a:endParaRPr lang="en-US" dirty="0"/>
-          </a:p>
-        </p:txBody>
-      </p:sp>
-      <p:pic>
-        <p:nvPicPr>
-          <p:cNvPr id="11268" name="Picture 4" descr="Rest Api Java Spring Mvc Tutorial Rest Api Java Mvc Framework Tutorial  Repository Spring Mvc Rest">
-            <a:extLst>
-              <a:ext uri="{FF2B5EF4-FFF2-40B4-BE49-F238E27FC236}">
-                <a16:creationId xmlns:a16="http://schemas.microsoft.com/office/drawing/2014/main" id="{BC7E89FC-D81B-E1C2-C09F-E90ED1C4D46F}"/>
-              </a:ext>
-            </a:extLst>
-          </p:cNvPr>
-          <p:cNvPicPr>
-            <a:picLocks noChangeAspect="1" noChangeArrowheads="1"/>
-          </p:cNvPicPr>
-          <p:nvPr/>
-        </p:nvPicPr>
-        <p:blipFill>
-          <a:blip r:embed="rId2">
-            <a:extLst>
-              <a:ext uri="{28A0092B-C50C-407E-A947-70E740481C1C}">
-                <a14:useLocalDpi xmlns:a14="http://schemas.microsoft.com/office/drawing/2010/main" val="0"/>
-              </a:ext>
-            </a:extLst>
-          </a:blip>
-          <a:srcRect/>
-          <a:stretch>
-            <a:fillRect/>
-          </a:stretch>
-        </p:blipFill>
-        <p:spPr bwMode="auto">
-          <a:xfrm>
-            <a:off x="1932309" y="1956120"/>
-            <a:ext cx="6690830" cy="4463029"/>
-          </a:xfrm>
-          <a:prstGeom prst="rect">
-            <a:avLst/>
-          </a:prstGeom>
-          <a:noFill/>
-          <a:extLst>
-            <a:ext uri="{909E8E84-426E-40DD-AFC4-6F175D3DCCD1}">
-              <a14:hiddenFill xmlns:a14="http://schemas.microsoft.com/office/drawing/2010/main">
-                <a:solidFill>
-                  <a:srgbClr val="FFFFFF"/>
-                </a:solidFill>
-              </a14:hiddenFill>
-            </a:ext>
-          </a:extLst>
-        </p:spPr>
-      </p:pic>
-    </p:spTree>
-    <p:extLst>
-      <p:ext uri="{BB962C8B-B14F-4D97-AF65-F5344CB8AC3E}">
-        <p14:creationId xmlns:p14="http://schemas.microsoft.com/office/powerpoint/2010/main" val="3699848474"/>
       </p:ext>
     </p:extLst>
   </p:cSld>
@@ -23548,8 +23544,8 @@
         </p:nvSpPr>
         <p:spPr bwMode="auto">
           <a:xfrm>
-            <a:off x="515112" y="2301626"/>
-            <a:ext cx="7060210" cy="2597827"/>
+            <a:off x="521208" y="2309078"/>
+            <a:ext cx="7060210" cy="2239844"/>
           </a:xfrm>
           <a:prstGeom prst="rect">
             <a:avLst/>
@@ -23614,7 +23610,7 @@
               <a:tabLst/>
             </a:pPr>
             <a:r>
-              <a:rPr kumimoji="0" lang="hu-HU" altLang="en-US" sz="2800" b="0" i="0" u="none" strike="noStrike" cap="none" normalizeH="0" baseline="0" dirty="0">
+              <a:rPr kumimoji="0" lang="hu-HU" altLang="en-US" sz="2400" b="0" i="0" u="none" strike="noStrike" cap="none" normalizeH="0" baseline="0" dirty="0">
                 <a:ln>
                   <a:noFill/>
                 </a:ln>
@@ -23627,7 +23623,7 @@
               <a:t> </a:t>
             </a:r>
             <a:r>
-              <a:rPr kumimoji="0" lang="en-US" altLang="en-US" sz="2800" b="0" i="0" u="none" strike="noStrike" cap="none" normalizeH="0" baseline="0" dirty="0">
+              <a:rPr kumimoji="0" lang="en-US" altLang="en-US" sz="2400" b="0" i="0" u="none" strike="noStrike" cap="none" normalizeH="0" baseline="0" dirty="0">
                 <a:ln>
                   <a:noFill/>
                 </a:ln>
@@ -23640,7 +23636,7 @@
               <a:t>Client–Server</a:t>
             </a:r>
             <a:r>
-              <a:rPr kumimoji="0" lang="hu-HU" altLang="en-US" sz="2800" b="0" i="0" u="none" strike="noStrike" cap="none" normalizeH="0" baseline="0" dirty="0">
+              <a:rPr kumimoji="0" lang="hu-HU" altLang="en-US" sz="2400" b="0" i="0" u="none" strike="noStrike" cap="none" normalizeH="0" baseline="0" dirty="0">
                 <a:ln>
                   <a:noFill/>
                 </a:ln>
@@ -23652,7 +23648,7 @@
               </a:rPr>
               <a:t> felépítés</a:t>
             </a:r>
-            <a:endParaRPr kumimoji="0" lang="en-US" altLang="en-US" sz="2800" b="0" i="0" u="none" strike="noStrike" cap="none" normalizeH="0" baseline="0" dirty="0">
+            <a:endParaRPr kumimoji="0" lang="en-US" altLang="en-US" sz="2400" b="0" i="0" u="none" strike="noStrike" cap="none" normalizeH="0" baseline="0" dirty="0">
               <a:ln>
                 <a:noFill/>
               </a:ln>
@@ -23681,7 +23677,7 @@
               <a:tabLst/>
             </a:pPr>
             <a:r>
-              <a:rPr kumimoji="0" lang="hu-HU" altLang="en-US" sz="2800" b="0" i="0" u="none" strike="noStrike" cap="none" normalizeH="0" baseline="0" dirty="0">
+              <a:rPr kumimoji="0" lang="hu-HU" altLang="en-US" sz="2400" b="0" i="0" u="none" strike="noStrike" cap="none" normalizeH="0" baseline="0" dirty="0">
                 <a:ln>
                   <a:noFill/>
                 </a:ln>
@@ -23694,7 +23690,7 @@
               <a:t> Állapotnélküli (</a:t>
             </a:r>
             <a:r>
-              <a:rPr kumimoji="0" lang="hu-HU" altLang="en-US" sz="2800" b="0" i="0" u="none" strike="noStrike" cap="none" normalizeH="0" baseline="0" dirty="0" err="1">
+              <a:rPr kumimoji="0" lang="hu-HU" altLang="en-US" sz="2400" b="0" i="0" u="none" strike="noStrike" cap="none" normalizeH="0" baseline="0" dirty="0" err="1">
                 <a:ln>
                   <a:noFill/>
                 </a:ln>
@@ -23707,7 +23703,7 @@
               <a:t>stateless</a:t>
             </a:r>
             <a:r>
-              <a:rPr kumimoji="0" lang="hu-HU" altLang="en-US" sz="2800" b="0" i="0" u="none" strike="noStrike" cap="none" normalizeH="0" baseline="0" dirty="0">
+              <a:rPr kumimoji="0" lang="hu-HU" altLang="en-US" sz="2400" b="0" i="0" u="none" strike="noStrike" cap="none" normalizeH="0" baseline="0" dirty="0">
                 <a:ln>
                   <a:noFill/>
                 </a:ln>
@@ -23719,7 +23715,7 @@
               </a:rPr>
               <a:t>)</a:t>
             </a:r>
-            <a:endParaRPr kumimoji="0" lang="en-US" altLang="en-US" sz="2800" b="0" i="0" u="none" strike="noStrike" cap="none" normalizeH="0" baseline="0" dirty="0">
+            <a:endParaRPr kumimoji="0" lang="en-US" altLang="en-US" sz="2400" b="0" i="0" u="none" strike="noStrike" cap="none" normalizeH="0" baseline="0" dirty="0">
               <a:ln>
                 <a:noFill/>
               </a:ln>
@@ -23748,7 +23744,7 @@
               <a:tabLst/>
             </a:pPr>
             <a:r>
-              <a:rPr kumimoji="0" lang="hu-HU" altLang="en-US" sz="2800" b="0" i="0" u="none" strike="noStrike" cap="none" normalizeH="0" baseline="0" dirty="0">
+              <a:rPr kumimoji="0" lang="hu-HU" altLang="en-US" sz="2400" b="0" i="0" u="none" strike="noStrike" cap="none" normalizeH="0" baseline="0" dirty="0">
                 <a:ln>
                   <a:noFill/>
                 </a:ln>
@@ -23761,7 +23757,7 @@
               <a:t> Egységes felület (</a:t>
             </a:r>
             <a:r>
-              <a:rPr kumimoji="0" lang="en-US" altLang="en-US" sz="2800" b="0" i="0" u="none" strike="noStrike" cap="none" normalizeH="0" baseline="0" dirty="0">
+              <a:rPr kumimoji="0" lang="en-US" altLang="en-US" sz="2400" b="0" i="0" u="none" strike="noStrike" cap="none" normalizeH="0" baseline="0" dirty="0">
                 <a:ln>
                   <a:noFill/>
                 </a:ln>
@@ -23774,7 +23770,7 @@
               <a:t>Uniform Interface</a:t>
             </a:r>
             <a:r>
-              <a:rPr kumimoji="0" lang="hu-HU" altLang="en-US" sz="2800" b="0" i="0" u="none" strike="noStrike" cap="none" normalizeH="0" baseline="0" dirty="0">
+              <a:rPr kumimoji="0" lang="hu-HU" altLang="en-US" sz="2400" b="0" i="0" u="none" strike="noStrike" cap="none" normalizeH="0" baseline="0" dirty="0">
                 <a:ln>
                   <a:noFill/>
                 </a:ln>
@@ -23786,7 +23782,7 @@
               </a:rPr>
               <a:t>)</a:t>
             </a:r>
-            <a:endParaRPr kumimoji="0" lang="en-US" altLang="en-US" sz="2800" b="0" i="0" u="none" strike="noStrike" cap="none" normalizeH="0" baseline="0" dirty="0">
+            <a:endParaRPr kumimoji="0" lang="en-US" altLang="en-US" sz="2400" b="0" i="0" u="none" strike="noStrike" cap="none" normalizeH="0" baseline="0" dirty="0">
               <a:ln>
                 <a:noFill/>
               </a:ln>
@@ -23815,7 +23811,7 @@
               <a:tabLst/>
             </a:pPr>
             <a:r>
-              <a:rPr kumimoji="0" lang="hu-HU" altLang="en-US" sz="2800" b="0" i="0" u="none" strike="noStrike" cap="none" normalizeH="0" baseline="0" dirty="0">
+              <a:rPr kumimoji="0" lang="hu-HU" altLang="en-US" sz="2400" b="0" i="0" u="none" strike="noStrike" cap="none" normalizeH="0" baseline="0" dirty="0">
                 <a:ln>
                   <a:noFill/>
                 </a:ln>
@@ -23828,7 +23824,7 @@
               <a:t> </a:t>
             </a:r>
             <a:r>
-              <a:rPr kumimoji="0" lang="hu-HU" altLang="en-US" sz="2800" b="0" i="0" u="none" strike="noStrike" cap="none" normalizeH="0" baseline="0" dirty="0" err="1">
+              <a:rPr kumimoji="0" lang="hu-HU" altLang="en-US" sz="2400" b="0" i="0" u="none" strike="noStrike" cap="none" normalizeH="0" baseline="0" dirty="0" err="1">
                 <a:ln>
                   <a:noFill/>
                 </a:ln>
@@ -23841,7 +23837,7 @@
               <a:t>Gyorsítótárazás</a:t>
             </a:r>
             <a:r>
-              <a:rPr kumimoji="0" lang="hu-HU" altLang="en-US" sz="2800" b="0" i="0" u="none" strike="noStrike" cap="none" normalizeH="0" baseline="0" dirty="0">
+              <a:rPr kumimoji="0" lang="hu-HU" altLang="en-US" sz="2400" b="0" i="0" u="none" strike="noStrike" cap="none" normalizeH="0" baseline="0" dirty="0">
                 <a:ln>
                   <a:noFill/>
                 </a:ln>
@@ -23854,7 +23850,7 @@
               <a:t> (</a:t>
             </a:r>
             <a:r>
-              <a:rPr kumimoji="0" lang="en-US" altLang="en-US" sz="2800" b="0" i="0" u="none" strike="noStrike" cap="none" normalizeH="0" baseline="0" dirty="0">
+              <a:rPr kumimoji="0" lang="en-US" altLang="en-US" sz="2400" b="0" i="0" u="none" strike="noStrike" cap="none" normalizeH="0" baseline="0" dirty="0">
                 <a:ln>
                   <a:noFill/>
                 </a:ln>
@@ -23867,7 +23863,7 @@
               <a:t>Cacheable</a:t>
             </a:r>
             <a:r>
-              <a:rPr kumimoji="0" lang="hu-HU" altLang="en-US" sz="2800" b="0" i="0" u="none" strike="noStrike" cap="none" normalizeH="0" baseline="0" dirty="0">
+              <a:rPr kumimoji="0" lang="hu-HU" altLang="en-US" sz="2400" b="0" i="0" u="none" strike="noStrike" cap="none" normalizeH="0" baseline="0" dirty="0">
                 <a:ln>
                   <a:noFill/>
                 </a:ln>
@@ -23879,7 +23875,7 @@
               </a:rPr>
               <a:t>)</a:t>
             </a:r>
-            <a:endParaRPr kumimoji="0" lang="en-US" altLang="en-US" sz="2800" b="0" i="0" u="none" strike="noStrike" cap="none" normalizeH="0" baseline="0" dirty="0">
+            <a:endParaRPr kumimoji="0" lang="en-US" altLang="en-US" sz="2400" b="0" i="0" u="none" strike="noStrike" cap="none" normalizeH="0" baseline="0" dirty="0">
               <a:ln>
                 <a:noFill/>
               </a:ln>
@@ -23889,6 +23885,99 @@
               <a:effectLst/>
               <a:latin typeface="Arial" panose="020B0604020202020204" pitchFamily="34" charset="0"/>
             </a:endParaRPr>
+          </a:p>
+        </p:txBody>
+      </p:sp>
+      <p:sp>
+        <p:nvSpPr>
+          <p:cNvPr id="5" name="TextBox 4">
+            <a:extLst>
+              <a:ext uri="{FF2B5EF4-FFF2-40B4-BE49-F238E27FC236}">
+                <a16:creationId xmlns:a16="http://schemas.microsoft.com/office/drawing/2014/main" id="{67BFF959-B263-8891-744C-C4BF98BBE5FD}"/>
+              </a:ext>
+            </a:extLst>
+          </p:cNvPr>
+          <p:cNvSpPr txBox="1"/>
+          <p:nvPr/>
+        </p:nvSpPr>
+        <p:spPr>
+          <a:xfrm>
+            <a:off x="521207" y="5233261"/>
+            <a:ext cx="7326555" cy="769441"/>
+          </a:xfrm>
+          <a:prstGeom prst="rect">
+            <a:avLst/>
+          </a:prstGeom>
+          <a:noFill/>
+        </p:spPr>
+        <p:txBody>
+          <a:bodyPr wrap="square">
+            <a:spAutoFit/>
+          </a:bodyPr>
+          <a:lstStyle/>
+          <a:p>
+            <a:pPr marL="0" marR="0" lvl="0" indent="0" algn="l" defTabSz="914400" rtl="0" eaLnBrk="1" fontAlgn="auto" latinLnBrk="0" hangingPunct="1">
+              <a:lnSpc>
+                <a:spcPct val="100000"/>
+              </a:lnSpc>
+              <a:spcBef>
+                <a:spcPts val="0"/>
+              </a:spcBef>
+              <a:spcAft>
+                <a:spcPts val="0"/>
+              </a:spcAft>
+              <a:buClrTx/>
+              <a:buSzTx/>
+              <a:buFontTx/>
+              <a:buNone/>
+              <a:tabLst/>
+              <a:defRPr/>
+            </a:pPr>
+            <a:r>
+              <a:rPr lang="en-US" sz="2200" dirty="0"/>
+              <a:t>A REST </a:t>
+            </a:r>
+            <a:r>
+              <a:rPr lang="en-US" sz="2200" dirty="0" err="1"/>
+              <a:t>alapelvek</a:t>
+            </a:r>
+            <a:r>
+              <a:rPr lang="en-US" sz="2200" dirty="0"/>
+              <a:t> </a:t>
+            </a:r>
+            <a:r>
+              <a:rPr lang="en-US" sz="2200" dirty="0" err="1"/>
+              <a:t>célja</a:t>
+            </a:r>
+            <a:r>
+              <a:rPr lang="hu-HU" sz="2200" dirty="0"/>
+              <a:t>, hogy a webes API </a:t>
+            </a:r>
+            <a:r>
+              <a:rPr lang="hu-HU" sz="2200" b="1" dirty="0"/>
+              <a:t>egyszerű</a:t>
+            </a:r>
+            <a:r>
+              <a:rPr lang="hu-HU" sz="2200" dirty="0"/>
+              <a:t> legyen, jól </a:t>
+            </a:r>
+            <a:r>
+              <a:rPr lang="hu-HU" sz="2200" b="1" dirty="0"/>
+              <a:t>skálázható</a:t>
+            </a:r>
+            <a:r>
+              <a:rPr lang="hu-HU" sz="2200" dirty="0"/>
+              <a:t> és hosszú távon </a:t>
+            </a:r>
+            <a:r>
+              <a:rPr lang="hu-HU" sz="2200" b="1" dirty="0"/>
+              <a:t>karbantartható</a:t>
+            </a:r>
+            <a:r>
+              <a:rPr lang="hu-HU" sz="2200" dirty="0"/>
+              <a:t>.</a:t>
+            </a:r>
+            <a:endParaRPr lang="hu-HU" sz="2200" b="1" dirty="0"/>
           </a:p>
         </p:txBody>
       </p:sp>
